--- a/presentation/breast_cancer_ml_tutorial.pptx
+++ b/presentation/breast_cancer_ml_tutorial.pptx
@@ -2,23 +2,30 @@
 <file path=ppt/presentation.xml><?xml version="1.0" encoding="utf-8"?>
 <p:presentation xmlns:p="http://schemas.openxmlformats.org/presentationml/2006/main">
   <p:sldMasterIdLst>
-    <p:sldMasterId xmlns:r="http://schemas.openxmlformats.org/officeDocument/2006/relationships" id="2147483648" r:id="R947a51fd1ad0418f"/>
+    <p:sldMasterId xmlns:r="http://schemas.openxmlformats.org/officeDocument/2006/relationships" id="2147483648" r:id="Rf91c0b33e2524458"/>
   </p:sldMasterIdLst>
   <p:notesMasterIdLst>
-    <p:notesMasterId xmlns:r="http://schemas.openxmlformats.org/officeDocument/2006/relationships" r:id="Re22531dc77bb4470"/>
+    <p:notesMasterId xmlns:r="http://schemas.openxmlformats.org/officeDocument/2006/relationships" r:id="R18429baf569640b5"/>
   </p:notesMasterIdLst>
   <p:sldIdLst>
-    <p:sldId xmlns:r="http://schemas.openxmlformats.org/officeDocument/2006/relationships" id="256" r:id="Rc3ae22fc21f542a6"/>
-    <p:sldId xmlns:r="http://schemas.openxmlformats.org/officeDocument/2006/relationships" id="257" r:id="R180c4784296346b5"/>
-    <p:sldId xmlns:r="http://schemas.openxmlformats.org/officeDocument/2006/relationships" id="258" r:id="Rc1e47e16041149ef"/>
-    <p:sldId xmlns:r="http://schemas.openxmlformats.org/officeDocument/2006/relationships" id="259" r:id="R65cb595908a743f9"/>
-    <p:sldId xmlns:r="http://schemas.openxmlformats.org/officeDocument/2006/relationships" id="260" r:id="R5312145be9df4957"/>
-    <p:sldId xmlns:r="http://schemas.openxmlformats.org/officeDocument/2006/relationships" id="261" r:id="Rcba96c6eb87745bd"/>
-    <p:sldId xmlns:r="http://schemas.openxmlformats.org/officeDocument/2006/relationships" id="262" r:id="R3a3656c13b6b4a7e"/>
-    <p:sldId xmlns:r="http://schemas.openxmlformats.org/officeDocument/2006/relationships" id="263" r:id="R25adb111538142e2"/>
-    <p:sldId xmlns:r="http://schemas.openxmlformats.org/officeDocument/2006/relationships" id="264" r:id="R4efd15dddf134600"/>
-    <p:sldId xmlns:r="http://schemas.openxmlformats.org/officeDocument/2006/relationships" id="265" r:id="R435082947aae4016"/>
-    <p:sldId xmlns:r="http://schemas.openxmlformats.org/officeDocument/2006/relationships" id="266" r:id="R43a9b078b8714f34"/>
+    <p:sldId xmlns:r="http://schemas.openxmlformats.org/officeDocument/2006/relationships" id="256" r:id="R73d085ca283e435b"/>
+    <p:sldId xmlns:r="http://schemas.openxmlformats.org/officeDocument/2006/relationships" id="257" r:id="R7cc12d88292849ec"/>
+    <p:sldId xmlns:r="http://schemas.openxmlformats.org/officeDocument/2006/relationships" id="258" r:id="R78868663dbbe41ea"/>
+    <p:sldId xmlns:r="http://schemas.openxmlformats.org/officeDocument/2006/relationships" id="259" r:id="Rabdafeb7bb9a41c0"/>
+    <p:sldId xmlns:r="http://schemas.openxmlformats.org/officeDocument/2006/relationships" id="260" r:id="R4271951550064dfb"/>
+    <p:sldId xmlns:r="http://schemas.openxmlformats.org/officeDocument/2006/relationships" id="261" r:id="Rd19461b6317f40f4"/>
+    <p:sldId xmlns:r="http://schemas.openxmlformats.org/officeDocument/2006/relationships" id="262" r:id="Rb918936e5abc427a"/>
+    <p:sldId xmlns:r="http://schemas.openxmlformats.org/officeDocument/2006/relationships" id="263" r:id="Ra73dca7adb254dec"/>
+    <p:sldId xmlns:r="http://schemas.openxmlformats.org/officeDocument/2006/relationships" id="264" r:id="R457118e6c9c54064"/>
+    <p:sldId xmlns:r="http://schemas.openxmlformats.org/officeDocument/2006/relationships" id="265" r:id="R58c7a487b09b4fdb"/>
+    <p:sldId xmlns:r="http://schemas.openxmlformats.org/officeDocument/2006/relationships" id="266" r:id="Rce070e99ccf3440f"/>
+    <p:sldId xmlns:r="http://schemas.openxmlformats.org/officeDocument/2006/relationships" id="267" r:id="Rf4e63e96abc24ad5"/>
+    <p:sldId xmlns:r="http://schemas.openxmlformats.org/officeDocument/2006/relationships" id="268" r:id="R5dcf86268be44fb9"/>
+    <p:sldId xmlns:r="http://schemas.openxmlformats.org/officeDocument/2006/relationships" id="269" r:id="R584170ed35a14fed"/>
+    <p:sldId xmlns:r="http://schemas.openxmlformats.org/officeDocument/2006/relationships" id="270" r:id="R296e600854194163"/>
+    <p:sldId xmlns:r="http://schemas.openxmlformats.org/officeDocument/2006/relationships" id="271" r:id="R020d8f59eb124ae2"/>
+    <p:sldId xmlns:r="http://schemas.openxmlformats.org/officeDocument/2006/relationships" id="272" r:id="R6cc2123a2b404514"/>
+    <p:sldId xmlns:r="http://schemas.openxmlformats.org/officeDocument/2006/relationships" id="273" r:id="Rdcb175a4b4124e67"/>
   </p:sldIdLst>
   <p:sldSz cx="12192000" cy="6858000"/>
   <p:notesSz cx="6858000" cy="9144000"/>
@@ -662,6 +669,506 @@
 </p:notes>
 </file>
 
+<file path=ppt/notesSlides/notesSlide12.xml><?xml version="1.0" encoding="utf-8"?>
+<p:notes xmlns:p="http://schemas.openxmlformats.org/presentationml/2006/main">
+  <p:cSld>
+    <p:spTree>
+      <p:nvGrpSpPr>
+        <p:cNvPr id="1" name=""/>
+        <p:cNvGrpSpPr/>
+        <p:nvPr/>
+      </p:nvGrpSpPr>
+      <p:grpSpPr>
+        <a:xfrm xmlns:a="http://schemas.openxmlformats.org/drawingml/2006/main"/>
+      </p:grpSpPr>
+      <p:sp>
+        <p:nvSpPr>
+          <p:cNvPr id="2" name="Slide Image Placeholder 1"/>
+          <p:cNvSpPr>
+            <a:spLocks xmlns:a="http://schemas.openxmlformats.org/drawingml/2006/main" noGrp="1"/>
+          </p:cNvSpPr>
+          <p:nvPr>
+            <p:ph type="sldImg" idx="0"/>
+          </p:nvPr>
+        </p:nvSpPr>
+        <p:spPr/>
+      </p:sp>
+      <p:sp>
+        <p:nvSpPr>
+          <p:cNvPr id="3" name="Notes Placeholder 2"/>
+          <p:cNvSpPr>
+            <a:spLocks xmlns:a="http://schemas.openxmlformats.org/drawingml/2006/main" noGrp="1"/>
+          </p:cNvSpPr>
+          <p:nvPr>
+            <p:ph type="body" idx="1"/>
+          </p:nvPr>
+        </p:nvSpPr>
+        <p:spPr/>
+        <p:txBody>
+          <a:bodyPr xmlns:a="http://schemas.openxmlformats.org/drawingml/2006/main"/>
+          <a:lstStyle xmlns:a="http://schemas.openxmlformats.org/drawingml/2006/main"/>
+          <a:p xmlns:a="http://schemas.openxmlformats.org/drawingml/2006/main">
+            <a:r>
+              <a:t>The feature names describe image-derived nucleus measurements. For example, mean radius is the average distance from the nucleus center to its perimeter; mean texture summarizes variation in grayscale intensity. Each of the ten base properties has mean, standard-error, and worst variants, making 30 columns. In this dataset, worst refers to the largest or most extreme measured value in that group; it does not mean the patient's clinical outcome was worst. These are not ordinary EHR variables.</a:t>
+            </a:r>
+          </a:p>
+          <a:p xmlns:a="http://schemas.openxmlformats.org/drawingml/2006/main">
+            <a:r>
+              <a:t/>
+            </a:r>
+          </a:p>
+          <a:p xmlns:a="http://schemas.openxmlformats.org/drawingml/2006/main">
+            <a:r>
+              <a:t>Source: scikit-learn dataset documentation, https://scikit-learn.org/stable/modules/generated/sklearn.datasets.load_breast_cancer.html</a:t>
+            </a:r>
+          </a:p>
+        </p:txBody>
+      </p:sp>
+      <p:sp>
+        <p:nvSpPr>
+          <p:cNvPr id="4" name="Slide Number Placeholder 3"/>
+          <p:cNvSpPr>
+            <a:spLocks xmlns:a="http://schemas.openxmlformats.org/drawingml/2006/main" noGrp="1"/>
+          </p:cNvSpPr>
+          <p:nvPr>
+            <p:ph type="sldNum" idx="5"/>
+          </p:nvPr>
+        </p:nvSpPr>
+        <p:spPr/>
+        <p:txBody>
+          <a:bodyPr xmlns:a="http://schemas.openxmlformats.org/drawingml/2006/main"/>
+          <a:lstStyle xmlns:a="http://schemas.openxmlformats.org/drawingml/2006/main"/>
+          <a:p xmlns:a="http://schemas.openxmlformats.org/drawingml/2006/main"/>
+        </p:txBody>
+      </p:sp>
+    </p:spTree>
+  </p:cSld>
+  <p:clrMapOvr>
+    <a:masterClrMapping xmlns:a="http://schemas.openxmlformats.org/drawingml/2006/main"/>
+  </p:clrMapOvr>
+</p:notes>
+</file>
+
+<file path=ppt/notesSlides/notesSlide13.xml><?xml version="1.0" encoding="utf-8"?>
+<p:notes xmlns:p="http://schemas.openxmlformats.org/presentationml/2006/main">
+  <p:cSld>
+    <p:spTree>
+      <p:nvGrpSpPr>
+        <p:cNvPr id="1" name=""/>
+        <p:cNvGrpSpPr/>
+        <p:nvPr/>
+      </p:nvGrpSpPr>
+      <p:grpSpPr>
+        <a:xfrm xmlns:a="http://schemas.openxmlformats.org/drawingml/2006/main"/>
+      </p:grpSpPr>
+      <p:sp>
+        <p:nvSpPr>
+          <p:cNvPr id="2" name="Slide Image Placeholder 1"/>
+          <p:cNvSpPr>
+            <a:spLocks xmlns:a="http://schemas.openxmlformats.org/drawingml/2006/main" noGrp="1"/>
+          </p:cNvSpPr>
+          <p:nvPr>
+            <p:ph type="sldImg" idx="0"/>
+          </p:nvPr>
+        </p:nvSpPr>
+        <p:spPr/>
+      </p:sp>
+      <p:sp>
+        <p:nvSpPr>
+          <p:cNvPr id="3" name="Notes Placeholder 2"/>
+          <p:cNvSpPr>
+            <a:spLocks xmlns:a="http://schemas.openxmlformats.org/drawingml/2006/main" noGrp="1"/>
+          </p:cNvSpPr>
+          <p:nvPr>
+            <p:ph type="body" idx="1"/>
+          </p:nvPr>
+        </p:nvSpPr>
+        <p:spPr/>
+        <p:txBody>
+          <a:bodyPr xmlns:a="http://schemas.openxmlformats.org/drawingml/2006/main"/>
+          <a:lstStyle xmlns:a="http://schemas.openxmlformats.org/drawingml/2006/main"/>
+          <a:p xmlns:a="http://schemas.openxmlformats.org/drawingml/2006/main">
+            <a:r>
+              <a:t>Read the code from top to bottom. X is the 569-by-30 feature table. Scikit-learn's target encoding is benign=1, malignant=0; we look up the string label rather than assume an index, then recode malignant as 1. Ask learners to predict what the positive class means before they run the next section.</a:t>
+            </a:r>
+          </a:p>
+        </p:txBody>
+      </p:sp>
+      <p:sp>
+        <p:nvSpPr>
+          <p:cNvPr id="4" name="Slide Number Placeholder 3"/>
+          <p:cNvSpPr>
+            <a:spLocks xmlns:a="http://schemas.openxmlformats.org/drawingml/2006/main" noGrp="1"/>
+          </p:cNvSpPr>
+          <p:nvPr>
+            <p:ph type="sldNum" idx="5"/>
+          </p:nvPr>
+        </p:nvSpPr>
+        <p:spPr/>
+        <p:txBody>
+          <a:bodyPr xmlns:a="http://schemas.openxmlformats.org/drawingml/2006/main"/>
+          <a:lstStyle xmlns:a="http://schemas.openxmlformats.org/drawingml/2006/main"/>
+          <a:p xmlns:a="http://schemas.openxmlformats.org/drawingml/2006/main"/>
+        </p:txBody>
+      </p:sp>
+    </p:spTree>
+  </p:cSld>
+  <p:clrMapOvr>
+    <a:masterClrMapping xmlns:a="http://schemas.openxmlformats.org/drawingml/2006/main"/>
+  </p:clrMapOvr>
+</p:notes>
+</file>
+
+<file path=ppt/notesSlides/notesSlide14.xml><?xml version="1.0" encoding="utf-8"?>
+<p:notes xmlns:p="http://schemas.openxmlformats.org/presentationml/2006/main">
+  <p:cSld>
+    <p:spTree>
+      <p:nvGrpSpPr>
+        <p:cNvPr id="1" name=""/>
+        <p:cNvGrpSpPr/>
+        <p:nvPr/>
+      </p:nvGrpSpPr>
+      <p:grpSpPr>
+        <a:xfrm xmlns:a="http://schemas.openxmlformats.org/drawingml/2006/main"/>
+      </p:grpSpPr>
+      <p:sp>
+        <p:nvSpPr>
+          <p:cNvPr id="2" name="Slide Image Placeholder 1"/>
+          <p:cNvSpPr>
+            <a:spLocks xmlns:a="http://schemas.openxmlformats.org/drawingml/2006/main" noGrp="1"/>
+          </p:cNvSpPr>
+          <p:nvPr>
+            <p:ph type="sldImg" idx="0"/>
+          </p:nvPr>
+        </p:nvSpPr>
+        <p:spPr/>
+      </p:sp>
+      <p:sp>
+        <p:nvSpPr>
+          <p:cNvPr id="3" name="Notes Placeholder 2"/>
+          <p:cNvSpPr>
+            <a:spLocks xmlns:a="http://schemas.openxmlformats.org/drawingml/2006/main" noGrp="1"/>
+          </p:cNvSpPr>
+          <p:nvPr>
+            <p:ph type="body" idx="1"/>
+          </p:nvPr>
+        </p:nvSpPr>
+        <p:spPr/>
+        <p:txBody>
+          <a:bodyPr xmlns:a="http://schemas.openxmlformats.org/drawingml/2006/main"/>
+          <a:lstStyle xmlns:a="http://schemas.openxmlformats.org/drawingml/2006/main"/>
+          <a:p xmlns:a="http://schemas.openxmlformats.org/drawingml/2006/main">
+            <a:r>
+              <a:t>The split happens before the scaler is fitted. Stratification maintains the class proportions, and random_state makes the split repeatable. StandardScaler learns its means and standard deviations from training rows only because it is the first stage of the Pipeline. Logistic regression is then fitted on the scaled training set. The test rows remain untouched until evaluation.</a:t>
+            </a:r>
+          </a:p>
+        </p:txBody>
+      </p:sp>
+      <p:sp>
+        <p:nvSpPr>
+          <p:cNvPr id="4" name="Slide Number Placeholder 3"/>
+          <p:cNvSpPr>
+            <a:spLocks xmlns:a="http://schemas.openxmlformats.org/drawingml/2006/main" noGrp="1"/>
+          </p:cNvSpPr>
+          <p:nvPr>
+            <p:ph type="sldNum" idx="5"/>
+          </p:nvPr>
+        </p:nvSpPr>
+        <p:spPr/>
+        <p:txBody>
+          <a:bodyPr xmlns:a="http://schemas.openxmlformats.org/drawingml/2006/main"/>
+          <a:lstStyle xmlns:a="http://schemas.openxmlformats.org/drawingml/2006/main"/>
+          <a:p xmlns:a="http://schemas.openxmlformats.org/drawingml/2006/main"/>
+        </p:txBody>
+      </p:sp>
+    </p:spTree>
+  </p:cSld>
+  <p:clrMapOvr>
+    <a:masterClrMapping xmlns:a="http://schemas.openxmlformats.org/drawingml/2006/main"/>
+  </p:clrMapOvr>
+</p:notes>
+</file>
+
+<file path=ppt/notesSlides/notesSlide15.xml><?xml version="1.0" encoding="utf-8"?>
+<p:notes xmlns:p="http://schemas.openxmlformats.org/presentationml/2006/main">
+  <p:cSld>
+    <p:spTree>
+      <p:nvGrpSpPr>
+        <p:cNvPr id="1" name=""/>
+        <p:cNvGrpSpPr/>
+        <p:nvPr/>
+      </p:nvGrpSpPr>
+      <p:grpSpPr>
+        <a:xfrm xmlns:a="http://schemas.openxmlformats.org/drawingml/2006/main"/>
+      </p:grpSpPr>
+      <p:sp>
+        <p:nvSpPr>
+          <p:cNvPr id="2" name="Slide Image Placeholder 1"/>
+          <p:cNvSpPr>
+            <a:spLocks xmlns:a="http://schemas.openxmlformats.org/drawingml/2006/main" noGrp="1"/>
+          </p:cNvSpPr>
+          <p:nvPr>
+            <p:ph type="sldImg" idx="0"/>
+          </p:nvPr>
+        </p:nvSpPr>
+        <p:spPr/>
+      </p:sp>
+      <p:sp>
+        <p:nvSpPr>
+          <p:cNvPr id="3" name="Notes Placeholder 2"/>
+          <p:cNvSpPr>
+            <a:spLocks xmlns:a="http://schemas.openxmlformats.org/drawingml/2006/main" noGrp="1"/>
+          </p:cNvSpPr>
+          <p:nvPr>
+            <p:ph type="body" idx="1"/>
+          </p:nvPr>
+        </p:nvSpPr>
+        <p:spPr/>
+        <p:txBody>
+          <a:bodyPr xmlns:a="http://schemas.openxmlformats.org/drawingml/2006/main"/>
+          <a:lstStyle xmlns:a="http://schemas.openxmlformats.org/drawingml/2006/main"/>
+          <a:p xmlns:a="http://schemas.openxmlformats.org/drawingml/2006/main">
+            <a:r>
+              <a:t>predict_proba returns a malignant-class probability because malignant was explicitly coded as 1. The 0.50 cutoff turns a score into a class label. The matrix ordering is fixed as labels [0,1], so it reads true negatives, false positives, false negatives, then true positives. A threshold is a decision choice; 0.50 is only a teaching default here.</a:t>
+            </a:r>
+          </a:p>
+        </p:txBody>
+      </p:sp>
+      <p:sp>
+        <p:nvSpPr>
+          <p:cNvPr id="4" name="Slide Number Placeholder 3"/>
+          <p:cNvSpPr>
+            <a:spLocks xmlns:a="http://schemas.openxmlformats.org/drawingml/2006/main" noGrp="1"/>
+          </p:cNvSpPr>
+          <p:nvPr>
+            <p:ph type="sldNum" idx="5"/>
+          </p:nvPr>
+        </p:nvSpPr>
+        <p:spPr/>
+        <p:txBody>
+          <a:bodyPr xmlns:a="http://schemas.openxmlformats.org/drawingml/2006/main"/>
+          <a:lstStyle xmlns:a="http://schemas.openxmlformats.org/drawingml/2006/main"/>
+          <a:p xmlns:a="http://schemas.openxmlformats.org/drawingml/2006/main"/>
+        </p:txBody>
+      </p:sp>
+    </p:spTree>
+  </p:cSld>
+  <p:clrMapOvr>
+    <a:masterClrMapping xmlns:a="http://schemas.openxmlformats.org/drawingml/2006/main"/>
+  </p:clrMapOvr>
+</p:notes>
+</file>
+
+<file path=ppt/notesSlides/notesSlide16.xml><?xml version="1.0" encoding="utf-8"?>
+<p:notes xmlns:p="http://schemas.openxmlformats.org/presentationml/2006/main">
+  <p:cSld>
+    <p:spTree>
+      <p:nvGrpSpPr>
+        <p:cNvPr id="1" name=""/>
+        <p:cNvGrpSpPr/>
+        <p:nvPr/>
+      </p:nvGrpSpPr>
+      <p:grpSpPr>
+        <a:xfrm xmlns:a="http://schemas.openxmlformats.org/drawingml/2006/main"/>
+      </p:grpSpPr>
+      <p:sp>
+        <p:nvSpPr>
+          <p:cNvPr id="2" name="Slide Image Placeholder 1"/>
+          <p:cNvSpPr>
+            <a:spLocks xmlns:a="http://schemas.openxmlformats.org/drawingml/2006/main" noGrp="1"/>
+          </p:cNvSpPr>
+          <p:nvPr>
+            <p:ph type="sldImg" idx="0"/>
+          </p:nvPr>
+        </p:nvSpPr>
+        <p:spPr/>
+      </p:sp>
+      <p:sp>
+        <p:nvSpPr>
+          <p:cNvPr id="3" name="Notes Placeholder 2"/>
+          <p:cNvSpPr>
+            <a:spLocks xmlns:a="http://schemas.openxmlformats.org/drawingml/2006/main" noGrp="1"/>
+          </p:cNvSpPr>
+          <p:nvPr>
+            <p:ph type="body" idx="1"/>
+          </p:nvPr>
+        </p:nvSpPr>
+        <p:spPr/>
+        <p:txBody>
+          <a:bodyPr xmlns:a="http://schemas.openxmlformats.org/drawingml/2006/main"/>
+          <a:lstStyle xmlns:a="http://schemas.openxmlformats.org/drawingml/2006/main"/>
+          <a:p xmlns:a="http://schemas.openxmlformats.org/drawingml/2006/main">
+            <a:r>
+              <a:t>Read the confusion matrix horizontally by true class. The model correctly classified 71 benign samples and flagged one benign sample; it correctly detected 39 of 42 malignant samples and missed three. The scatter chart is an editable ROC curve computed from the 114 held-out probability scores, not from training predictions. AUC 0.996 describes ranking on this one split, not clinical readiness or calibration.</a:t>
+            </a:r>
+          </a:p>
+        </p:txBody>
+      </p:sp>
+      <p:sp>
+        <p:nvSpPr>
+          <p:cNvPr id="4" name="Slide Number Placeholder 3"/>
+          <p:cNvSpPr>
+            <a:spLocks xmlns:a="http://schemas.openxmlformats.org/drawingml/2006/main" noGrp="1"/>
+          </p:cNvSpPr>
+          <p:nvPr>
+            <p:ph type="sldNum" idx="5"/>
+          </p:nvPr>
+        </p:nvSpPr>
+        <p:spPr/>
+        <p:txBody>
+          <a:bodyPr xmlns:a="http://schemas.openxmlformats.org/drawingml/2006/main"/>
+          <a:lstStyle xmlns:a="http://schemas.openxmlformats.org/drawingml/2006/main"/>
+          <a:p xmlns:a="http://schemas.openxmlformats.org/drawingml/2006/main"/>
+        </p:txBody>
+      </p:sp>
+    </p:spTree>
+  </p:cSld>
+  <p:clrMapOvr>
+    <a:masterClrMapping xmlns:a="http://schemas.openxmlformats.org/drawingml/2006/main"/>
+  </p:clrMapOvr>
+</p:notes>
+</file>
+
+<file path=ppt/notesSlides/notesSlide17.xml><?xml version="1.0" encoding="utf-8"?>
+<p:notes xmlns:p="http://schemas.openxmlformats.org/presentationml/2006/main">
+  <p:cSld>
+    <p:spTree>
+      <p:nvGrpSpPr>
+        <p:cNvPr id="1" name=""/>
+        <p:cNvGrpSpPr/>
+        <p:nvPr/>
+      </p:nvGrpSpPr>
+      <p:grpSpPr>
+        <a:xfrm xmlns:a="http://schemas.openxmlformats.org/drawingml/2006/main"/>
+      </p:grpSpPr>
+      <p:sp>
+        <p:nvSpPr>
+          <p:cNvPr id="2" name="Slide Image Placeholder 1"/>
+          <p:cNvSpPr>
+            <a:spLocks xmlns:a="http://schemas.openxmlformats.org/drawingml/2006/main" noGrp="1"/>
+          </p:cNvSpPr>
+          <p:nvPr>
+            <p:ph type="sldImg" idx="0"/>
+          </p:nvPr>
+        </p:nvSpPr>
+        <p:spPr/>
+      </p:sp>
+      <p:sp>
+        <p:nvSpPr>
+          <p:cNvPr id="3" name="Notes Placeholder 2"/>
+          <p:cNvSpPr>
+            <a:spLocks xmlns:a="http://schemas.openxmlformats.org/drawingml/2006/main" noGrp="1"/>
+          </p:cNvSpPr>
+          <p:nvPr>
+            <p:ph type="body" idx="1"/>
+          </p:nvPr>
+        </p:nvSpPr>
+        <p:spPr/>
+        <p:txBody>
+          <a:bodyPr xmlns:a="http://schemas.openxmlformats.org/drawingml/2006/main"/>
+          <a:lstStyle xmlns:a="http://schemas.openxmlformats.org/drawingml/2006/main"/>
+          <a:p xmlns:a="http://schemas.openxmlformats.org/drawingml/2006/main">
+            <a:r>
+              <a:t>These are the five largest absolute standardized logistic-regression coefficients from the fitted training model. Positive weights push the fitted model's log-odds toward malignant; negative weights push away, conditional on the other features. Correlated predictors can make weights unstable or hard to interpret. The chart is descriptive of this fit, not causal and not a substitute for clinical explanation.</a:t>
+            </a:r>
+          </a:p>
+        </p:txBody>
+      </p:sp>
+      <p:sp>
+        <p:nvSpPr>
+          <p:cNvPr id="4" name="Slide Number Placeholder 3"/>
+          <p:cNvSpPr>
+            <a:spLocks xmlns:a="http://schemas.openxmlformats.org/drawingml/2006/main" noGrp="1"/>
+          </p:cNvSpPr>
+          <p:nvPr>
+            <p:ph type="sldNum" idx="5"/>
+          </p:nvPr>
+        </p:nvSpPr>
+        <p:spPr/>
+        <p:txBody>
+          <a:bodyPr xmlns:a="http://schemas.openxmlformats.org/drawingml/2006/main"/>
+          <a:lstStyle xmlns:a="http://schemas.openxmlformats.org/drawingml/2006/main"/>
+          <a:p xmlns:a="http://schemas.openxmlformats.org/drawingml/2006/main"/>
+        </p:txBody>
+      </p:sp>
+    </p:spTree>
+  </p:cSld>
+  <p:clrMapOvr>
+    <a:masterClrMapping xmlns:a="http://schemas.openxmlformats.org/drawingml/2006/main"/>
+  </p:clrMapOvr>
+</p:notes>
+</file>
+
+<file path=ppt/notesSlides/notesSlide18.xml><?xml version="1.0" encoding="utf-8"?>
+<p:notes xmlns:p="http://schemas.openxmlformats.org/presentationml/2006/main">
+  <p:cSld>
+    <p:spTree>
+      <p:nvGrpSpPr>
+        <p:cNvPr id="1" name=""/>
+        <p:cNvGrpSpPr/>
+        <p:nvPr/>
+      </p:nvGrpSpPr>
+      <p:grpSpPr>
+        <a:xfrm xmlns:a="http://schemas.openxmlformats.org/drawingml/2006/main"/>
+      </p:grpSpPr>
+      <p:sp>
+        <p:nvSpPr>
+          <p:cNvPr id="2" name="Slide Image Placeholder 1"/>
+          <p:cNvSpPr>
+            <a:spLocks xmlns:a="http://schemas.openxmlformats.org/drawingml/2006/main" noGrp="1"/>
+          </p:cNvSpPr>
+          <p:nvPr>
+            <p:ph type="sldImg" idx="0"/>
+          </p:nvPr>
+        </p:nvSpPr>
+        <p:spPr/>
+      </p:sp>
+      <p:sp>
+        <p:nvSpPr>
+          <p:cNvPr id="3" name="Notes Placeholder 2"/>
+          <p:cNvSpPr>
+            <a:spLocks xmlns:a="http://schemas.openxmlformats.org/drawingml/2006/main" noGrp="1"/>
+          </p:cNvSpPr>
+          <p:nvPr>
+            <p:ph type="body" idx="1"/>
+          </p:nvPr>
+        </p:nvSpPr>
+        <p:spPr/>
+        <p:txBody>
+          <a:bodyPr xmlns:a="http://schemas.openxmlformats.org/drawingml/2006/main"/>
+          <a:lstStyle xmlns:a="http://schemas.openxmlformats.org/drawingml/2006/main"/>
+          <a:p xmlns:a="http://schemas.openxmlformats.org/drawingml/2006/main">
+            <a:r>
+              <a:t>Give learners five minutes to edit the threshold in the supplied predictions table without refitting the model. Ask what moves and what stays fixed. Suggested answer using this exact held-out split: threshold .25 gives TN=71, FP=1, FN=1, TP=41; .50 gives 71, 1, 3, 39; .75 gives 72, 0, 4, 38. Lowering the threshold reduces false negatives here but does not prove that .25 is clinically better. Thresholds require an explicit decision context and validation data.</a:t>
+            </a:r>
+          </a:p>
+        </p:txBody>
+      </p:sp>
+      <p:sp>
+        <p:nvSpPr>
+          <p:cNvPr id="4" name="Slide Number Placeholder 3"/>
+          <p:cNvSpPr>
+            <a:spLocks xmlns:a="http://schemas.openxmlformats.org/drawingml/2006/main" noGrp="1"/>
+          </p:cNvSpPr>
+          <p:nvPr>
+            <p:ph type="sldNum" idx="5"/>
+          </p:nvPr>
+        </p:nvSpPr>
+        <p:spPr/>
+        <p:txBody>
+          <a:bodyPr xmlns:a="http://schemas.openxmlformats.org/drawingml/2006/main"/>
+          <a:lstStyle xmlns:a="http://schemas.openxmlformats.org/drawingml/2006/main"/>
+          <a:p xmlns:a="http://schemas.openxmlformats.org/drawingml/2006/main"/>
+        </p:txBody>
+      </p:sp>
+    </p:spTree>
+  </p:cSld>
+  <p:clrMapOvr>
+    <a:masterClrMapping xmlns:a="http://schemas.openxmlformats.org/drawingml/2006/main"/>
+  </p:clrMapOvr>
+</p:notes>
+</file>
+
 <file path=ppt/notesSlides/notesSlide2.xml><?xml version="1.0" encoding="utf-8"?>
 <p:notes xmlns:p="http://schemas.openxmlformats.org/presentationml/2006/main">
   <p:cSld>
@@ -1280,7 +1787,7 @@
   </p:cSld>
   <p:clrMap bg1="lt1" tx1="dk1" bg2="lt2" tx2="dk2" accent1="accent1" accent2="accent2" accent3="accent3" accent4="accent4" accent5="accent5" accent6="accent6" hlink="hlink" folHlink="folHlink"/>
   <p:sldLayoutIdLst>
-    <p:sldLayoutId xmlns:r="http://schemas.openxmlformats.org/officeDocument/2006/relationships" id="2147483649" r:id="R0d0e12f758cd46bc"/>
+    <p:sldLayoutId xmlns:r="http://schemas.openxmlformats.org/officeDocument/2006/relationships" id="2147483649" r:id="Rad6ecdfaf7814f8f"/>
   </p:sldLayoutIdLst>
   <p:txStyles>
     <p:titleStyle>
@@ -1807,6 +2314,1259 @@
 </a:theme>
 </file>
 
+<file path=ppt/slides/charts/chart1.xml><?xml version="1.0" encoding="utf-8"?>
+<c:chartSpace xmlns:c="http://schemas.openxmlformats.org/drawingml/2006/chart" xmlns:r="http://schemas.openxmlformats.org/officeDocument/2006/relationships">
+  <c:lang val="en-US"/>
+  <c:chart>
+    <c:plotArea>
+      <c:scatterChart>
+        <c:scatterStyle val="line"/>
+        <c:ser>
+          <c:idx val="0"/>
+          <c:order val="0"/>
+          <c:tx>
+            <c:v>Logistic regression</c:v>
+          </c:tx>
+          <c:spPr>
+            <a:ln xmlns:a="http://schemas.openxmlformats.org/drawingml/2006/main" w="28575">
+              <a:solidFill>
+                <a:srgbClr val="167C80"/>
+              </a:solidFill>
+              <a:prstDash val="solid"/>
+            </a:ln>
+          </c:spPr>
+          <c:marker>
+            <c:symbol val="none"/>
+            <c:size val="2"/>
+          </c:marker>
+          <c:xVal>
+            <c:numRef>
+              <c:f>'Chart Data'!$A$2:$A$116</c:f>
+              <c:numCache>
+                <c:formatCode>General</c:formatCode>
+                <c:ptCount val="115"/>
+                <c:pt idx="0">
+                  <c:v>0</c:v>
+                </c:pt>
+                <c:pt idx="1">
+                  <c:v>0</c:v>
+                </c:pt>
+                <c:pt idx="2">
+                  <c:v>0</c:v>
+                </c:pt>
+                <c:pt idx="3">
+                  <c:v>0</c:v>
+                </c:pt>
+                <c:pt idx="4">
+                  <c:v>0</c:v>
+                </c:pt>
+                <c:pt idx="5">
+                  <c:v>0</c:v>
+                </c:pt>
+                <c:pt idx="6">
+                  <c:v>0</c:v>
+                </c:pt>
+                <c:pt idx="7">
+                  <c:v>0</c:v>
+                </c:pt>
+                <c:pt idx="8">
+                  <c:v>0</c:v>
+                </c:pt>
+                <c:pt idx="9">
+                  <c:v>0</c:v>
+                </c:pt>
+                <c:pt idx="10">
+                  <c:v>0</c:v>
+                </c:pt>
+                <c:pt idx="11">
+                  <c:v>0</c:v>
+                </c:pt>
+                <c:pt idx="12">
+                  <c:v>0</c:v>
+                </c:pt>
+                <c:pt idx="13">
+                  <c:v>0</c:v>
+                </c:pt>
+                <c:pt idx="14">
+                  <c:v>0</c:v>
+                </c:pt>
+                <c:pt idx="15">
+                  <c:v>0</c:v>
+                </c:pt>
+                <c:pt idx="16">
+                  <c:v>0</c:v>
+                </c:pt>
+                <c:pt idx="17">
+                  <c:v>0</c:v>
+                </c:pt>
+                <c:pt idx="18">
+                  <c:v>0</c:v>
+                </c:pt>
+                <c:pt idx="19">
+                  <c:v>0</c:v>
+                </c:pt>
+                <c:pt idx="20">
+                  <c:v>0</c:v>
+                </c:pt>
+                <c:pt idx="21">
+                  <c:v>0</c:v>
+                </c:pt>
+                <c:pt idx="22">
+                  <c:v>0</c:v>
+                </c:pt>
+                <c:pt idx="23">
+                  <c:v>0</c:v>
+                </c:pt>
+                <c:pt idx="24">
+                  <c:v>0</c:v>
+                </c:pt>
+                <c:pt idx="25">
+                  <c:v>0</c:v>
+                </c:pt>
+                <c:pt idx="26">
+                  <c:v>0</c:v>
+                </c:pt>
+                <c:pt idx="27">
+                  <c:v>0</c:v>
+                </c:pt>
+                <c:pt idx="28">
+                  <c:v>0</c:v>
+                </c:pt>
+                <c:pt idx="29">
+                  <c:v>0</c:v>
+                </c:pt>
+                <c:pt idx="30">
+                  <c:v>0</c:v>
+                </c:pt>
+                <c:pt idx="31">
+                  <c:v>0</c:v>
+                </c:pt>
+                <c:pt idx="32">
+                  <c:v>0</c:v>
+                </c:pt>
+                <c:pt idx="33">
+                  <c:v>0</c:v>
+                </c:pt>
+                <c:pt idx="34">
+                  <c:v>0</c:v>
+                </c:pt>
+                <c:pt idx="35">
+                  <c:v>0</c:v>
+                </c:pt>
+                <c:pt idx="36">
+                  <c:v>0</c:v>
+                </c:pt>
+                <c:pt idx="37">
+                  <c:v>0</c:v>
+                </c:pt>
+                <c:pt idx="38">
+                  <c:v>0</c:v>
+                </c:pt>
+                <c:pt idx="39">
+                  <c:v>0</c:v>
+                </c:pt>
+                <c:pt idx="40">
+                  <c:v>0.013889</c:v>
+                </c:pt>
+                <c:pt idx="41">
+                  <c:v>0.013889</c:v>
+                </c:pt>
+                <c:pt idx="42">
+                  <c:v>0.013889</c:v>
+                </c:pt>
+                <c:pt idx="43">
+                  <c:v>0.027778</c:v>
+                </c:pt>
+                <c:pt idx="44">
+                  <c:v>0.041667</c:v>
+                </c:pt>
+                <c:pt idx="45">
+                  <c:v>0.055556</c:v>
+                </c:pt>
+                <c:pt idx="46">
+                  <c:v>0.069444</c:v>
+                </c:pt>
+                <c:pt idx="47">
+                  <c:v>0.083333</c:v>
+                </c:pt>
+                <c:pt idx="48">
+                  <c:v>0.097222</c:v>
+                </c:pt>
+                <c:pt idx="49">
+                  <c:v>0.111111</c:v>
+                </c:pt>
+                <c:pt idx="50">
+                  <c:v>0.125</c:v>
+                </c:pt>
+                <c:pt idx="51">
+                  <c:v>0.138889</c:v>
+                </c:pt>
+                <c:pt idx="52">
+                  <c:v>0.138889</c:v>
+                </c:pt>
+                <c:pt idx="53">
+                  <c:v>0.152778</c:v>
+                </c:pt>
+                <c:pt idx="54">
+                  <c:v>0.166667</c:v>
+                </c:pt>
+                <c:pt idx="55">
+                  <c:v>0.180556</c:v>
+                </c:pt>
+                <c:pt idx="56">
+                  <c:v>0.194444</c:v>
+                </c:pt>
+                <c:pt idx="57">
+                  <c:v>0.208333</c:v>
+                </c:pt>
+                <c:pt idx="58">
+                  <c:v>0.222222</c:v>
+                </c:pt>
+                <c:pt idx="59">
+                  <c:v>0.236111</c:v>
+                </c:pt>
+                <c:pt idx="60">
+                  <c:v>0.25</c:v>
+                </c:pt>
+                <c:pt idx="61">
+                  <c:v>0.263889</c:v>
+                </c:pt>
+                <c:pt idx="62">
+                  <c:v>0.277778</c:v>
+                </c:pt>
+                <c:pt idx="63">
+                  <c:v>0.291667</c:v>
+                </c:pt>
+                <c:pt idx="64">
+                  <c:v>0.305556</c:v>
+                </c:pt>
+                <c:pt idx="65">
+                  <c:v>0.319444</c:v>
+                </c:pt>
+                <c:pt idx="66">
+                  <c:v>0.333333</c:v>
+                </c:pt>
+                <c:pt idx="67">
+                  <c:v>0.347222</c:v>
+                </c:pt>
+                <c:pt idx="68">
+                  <c:v>0.361111</c:v>
+                </c:pt>
+                <c:pt idx="69">
+                  <c:v>0.375</c:v>
+                </c:pt>
+                <c:pt idx="70">
+                  <c:v>0.388889</c:v>
+                </c:pt>
+                <c:pt idx="71">
+                  <c:v>0.402778</c:v>
+                </c:pt>
+                <c:pt idx="72">
+                  <c:v>0.416667</c:v>
+                </c:pt>
+                <c:pt idx="73">
+                  <c:v>0.430556</c:v>
+                </c:pt>
+                <c:pt idx="74">
+                  <c:v>0.444444</c:v>
+                </c:pt>
+                <c:pt idx="75">
+                  <c:v>0.458333</c:v>
+                </c:pt>
+                <c:pt idx="76">
+                  <c:v>0.472222</c:v>
+                </c:pt>
+                <c:pt idx="77">
+                  <c:v>0.486111</c:v>
+                </c:pt>
+                <c:pt idx="78">
+                  <c:v>0.5</c:v>
+                </c:pt>
+                <c:pt idx="79">
+                  <c:v>0.513889</c:v>
+                </c:pt>
+                <c:pt idx="80">
+                  <c:v>0.527778</c:v>
+                </c:pt>
+                <c:pt idx="81">
+                  <c:v>0.541667</c:v>
+                </c:pt>
+                <c:pt idx="82">
+                  <c:v>0.555556</c:v>
+                </c:pt>
+                <c:pt idx="83">
+                  <c:v>0.569444</c:v>
+                </c:pt>
+                <c:pt idx="84">
+                  <c:v>0.583333</c:v>
+                </c:pt>
+                <c:pt idx="85">
+                  <c:v>0.597222</c:v>
+                </c:pt>
+                <c:pt idx="86">
+                  <c:v>0.611111</c:v>
+                </c:pt>
+                <c:pt idx="87">
+                  <c:v>0.625</c:v>
+                </c:pt>
+                <c:pt idx="88">
+                  <c:v>0.638889</c:v>
+                </c:pt>
+                <c:pt idx="89">
+                  <c:v>0.652778</c:v>
+                </c:pt>
+                <c:pt idx="90">
+                  <c:v>0.666667</c:v>
+                </c:pt>
+                <c:pt idx="91">
+                  <c:v>0.680556</c:v>
+                </c:pt>
+                <c:pt idx="92">
+                  <c:v>0.694444</c:v>
+                </c:pt>
+                <c:pt idx="93">
+                  <c:v>0.708333</c:v>
+                </c:pt>
+                <c:pt idx="94">
+                  <c:v>0.722222</c:v>
+                </c:pt>
+                <c:pt idx="95">
+                  <c:v>0.736111</c:v>
+                </c:pt>
+                <c:pt idx="96">
+                  <c:v>0.75</c:v>
+                </c:pt>
+                <c:pt idx="97">
+                  <c:v>0.763889</c:v>
+                </c:pt>
+                <c:pt idx="98">
+                  <c:v>0.777778</c:v>
+                </c:pt>
+                <c:pt idx="99">
+                  <c:v>0.791667</c:v>
+                </c:pt>
+                <c:pt idx="100">
+                  <c:v>0.805556</c:v>
+                </c:pt>
+                <c:pt idx="101">
+                  <c:v>0.819444</c:v>
+                </c:pt>
+                <c:pt idx="102">
+                  <c:v>0.833333</c:v>
+                </c:pt>
+                <c:pt idx="103">
+                  <c:v>0.847222</c:v>
+                </c:pt>
+                <c:pt idx="104">
+                  <c:v>0.861111</c:v>
+                </c:pt>
+                <c:pt idx="105">
+                  <c:v>0.875</c:v>
+                </c:pt>
+                <c:pt idx="106">
+                  <c:v>0.888889</c:v>
+                </c:pt>
+                <c:pt idx="107">
+                  <c:v>0.902778</c:v>
+                </c:pt>
+                <c:pt idx="108">
+                  <c:v>0.916667</c:v>
+                </c:pt>
+                <c:pt idx="109">
+                  <c:v>0.930556</c:v>
+                </c:pt>
+                <c:pt idx="110">
+                  <c:v>0.944444</c:v>
+                </c:pt>
+                <c:pt idx="111">
+                  <c:v>0.958333</c:v>
+                </c:pt>
+                <c:pt idx="112">
+                  <c:v>0.972222</c:v>
+                </c:pt>
+                <c:pt idx="113">
+                  <c:v>0.986111</c:v>
+                </c:pt>
+                <c:pt idx="114">
+                  <c:v>1</c:v>
+                </c:pt>
+              </c:numCache>
+            </c:numRef>
+          </c:xVal>
+          <c:yVal>
+            <c:numRef>
+              <c:f>'Chart Data'!$B$2:$B$116</c:f>
+              <c:numCache>
+                <c:formatCode>0%</c:formatCode>
+                <c:ptCount val="115"/>
+                <c:pt idx="0">
+                  <c:v>0</c:v>
+                </c:pt>
+                <c:pt idx="1">
+                  <c:v>0.02381</c:v>
+                </c:pt>
+                <c:pt idx="2">
+                  <c:v>0.047619</c:v>
+                </c:pt>
+                <c:pt idx="3">
+                  <c:v>0.071429</c:v>
+                </c:pt>
+                <c:pt idx="4">
+                  <c:v>0.095238</c:v>
+                </c:pt>
+                <c:pt idx="5">
+                  <c:v>0.119048</c:v>
+                </c:pt>
+                <c:pt idx="6">
+                  <c:v>0.142857</c:v>
+                </c:pt>
+                <c:pt idx="7">
+                  <c:v>0.166667</c:v>
+                </c:pt>
+                <c:pt idx="8">
+                  <c:v>0.190476</c:v>
+                </c:pt>
+                <c:pt idx="9">
+                  <c:v>0.214286</c:v>
+                </c:pt>
+                <c:pt idx="10">
+                  <c:v>0.238095</c:v>
+                </c:pt>
+                <c:pt idx="11">
+                  <c:v>0.261905</c:v>
+                </c:pt>
+                <c:pt idx="12">
+                  <c:v>0.285714</c:v>
+                </c:pt>
+                <c:pt idx="13">
+                  <c:v>0.309524</c:v>
+                </c:pt>
+                <c:pt idx="14">
+                  <c:v>0.333333</c:v>
+                </c:pt>
+                <c:pt idx="15">
+                  <c:v>0.357143</c:v>
+                </c:pt>
+                <c:pt idx="16">
+                  <c:v>0.380952</c:v>
+                </c:pt>
+                <c:pt idx="17">
+                  <c:v>0.404762</c:v>
+                </c:pt>
+                <c:pt idx="18">
+                  <c:v>0.428571</c:v>
+                </c:pt>
+                <c:pt idx="19">
+                  <c:v>0.452381</c:v>
+                </c:pt>
+                <c:pt idx="20">
+                  <c:v>0.47619</c:v>
+                </c:pt>
+                <c:pt idx="21">
+                  <c:v>0.5</c:v>
+                </c:pt>
+                <c:pt idx="22">
+                  <c:v>0.52381</c:v>
+                </c:pt>
+                <c:pt idx="23">
+                  <c:v>0.547619</c:v>
+                </c:pt>
+                <c:pt idx="24">
+                  <c:v>0.571429</c:v>
+                </c:pt>
+                <c:pt idx="25">
+                  <c:v>0.595238</c:v>
+                </c:pt>
+                <c:pt idx="26">
+                  <c:v>0.619048</c:v>
+                </c:pt>
+                <c:pt idx="27">
+                  <c:v>0.642857</c:v>
+                </c:pt>
+                <c:pt idx="28">
+                  <c:v>0.666667</c:v>
+                </c:pt>
+                <c:pt idx="29">
+                  <c:v>0.690476</c:v>
+                </c:pt>
+                <c:pt idx="30">
+                  <c:v>0.714286</c:v>
+                </c:pt>
+                <c:pt idx="31">
+                  <c:v>0.738095</c:v>
+                </c:pt>
+                <c:pt idx="32">
+                  <c:v>0.761905</c:v>
+                </c:pt>
+                <c:pt idx="33">
+                  <c:v>0.785714</c:v>
+                </c:pt>
+                <c:pt idx="34">
+                  <c:v>0.809524</c:v>
+                </c:pt>
+                <c:pt idx="35">
+                  <c:v>0.833333</c:v>
+                </c:pt>
+                <c:pt idx="36">
+                  <c:v>0.857143</c:v>
+                </c:pt>
+                <c:pt idx="37">
+                  <c:v>0.880952</c:v>
+                </c:pt>
+                <c:pt idx="38">
+                  <c:v>0.904762</c:v>
+                </c:pt>
+                <c:pt idx="39">
+                  <c:v>0.928571</c:v>
+                </c:pt>
+                <c:pt idx="40">
+                  <c:v>0.928571</c:v>
+                </c:pt>
+                <c:pt idx="41">
+                  <c:v>0.952381</c:v>
+                </c:pt>
+                <c:pt idx="42">
+                  <c:v>0.97619</c:v>
+                </c:pt>
+                <c:pt idx="43">
+                  <c:v>0.97619</c:v>
+                </c:pt>
+                <c:pt idx="44">
+                  <c:v>0.97619</c:v>
+                </c:pt>
+                <c:pt idx="45">
+                  <c:v>0.97619</c:v>
+                </c:pt>
+                <c:pt idx="46">
+                  <c:v>0.97619</c:v>
+                </c:pt>
+                <c:pt idx="47">
+                  <c:v>0.97619</c:v>
+                </c:pt>
+                <c:pt idx="48">
+                  <c:v>0.97619</c:v>
+                </c:pt>
+                <c:pt idx="49">
+                  <c:v>0.97619</c:v>
+                </c:pt>
+                <c:pt idx="50">
+                  <c:v>0.97619</c:v>
+                </c:pt>
+                <c:pt idx="51">
+                  <c:v>0.97619</c:v>
+                </c:pt>
+                <c:pt idx="52">
+                  <c:v>1</c:v>
+                </c:pt>
+                <c:pt idx="53">
+                  <c:v>1</c:v>
+                </c:pt>
+                <c:pt idx="54">
+                  <c:v>1</c:v>
+                </c:pt>
+                <c:pt idx="55">
+                  <c:v>1</c:v>
+                </c:pt>
+                <c:pt idx="56">
+                  <c:v>1</c:v>
+                </c:pt>
+                <c:pt idx="57">
+                  <c:v>1</c:v>
+                </c:pt>
+                <c:pt idx="58">
+                  <c:v>1</c:v>
+                </c:pt>
+                <c:pt idx="59">
+                  <c:v>1</c:v>
+                </c:pt>
+                <c:pt idx="60">
+                  <c:v>1</c:v>
+                </c:pt>
+                <c:pt idx="61">
+                  <c:v>1</c:v>
+                </c:pt>
+                <c:pt idx="62">
+                  <c:v>1</c:v>
+                </c:pt>
+                <c:pt idx="63">
+                  <c:v>1</c:v>
+                </c:pt>
+                <c:pt idx="64">
+                  <c:v>1</c:v>
+                </c:pt>
+                <c:pt idx="65">
+                  <c:v>1</c:v>
+                </c:pt>
+                <c:pt idx="66">
+                  <c:v>1</c:v>
+                </c:pt>
+                <c:pt idx="67">
+                  <c:v>1</c:v>
+                </c:pt>
+                <c:pt idx="68">
+                  <c:v>1</c:v>
+                </c:pt>
+                <c:pt idx="69">
+                  <c:v>1</c:v>
+                </c:pt>
+                <c:pt idx="70">
+                  <c:v>1</c:v>
+                </c:pt>
+                <c:pt idx="71">
+                  <c:v>1</c:v>
+                </c:pt>
+                <c:pt idx="72">
+                  <c:v>1</c:v>
+                </c:pt>
+                <c:pt idx="73">
+                  <c:v>1</c:v>
+                </c:pt>
+                <c:pt idx="74">
+                  <c:v>1</c:v>
+                </c:pt>
+                <c:pt idx="75">
+                  <c:v>1</c:v>
+                </c:pt>
+                <c:pt idx="76">
+                  <c:v>1</c:v>
+                </c:pt>
+                <c:pt idx="77">
+                  <c:v>1</c:v>
+                </c:pt>
+                <c:pt idx="78">
+                  <c:v>1</c:v>
+                </c:pt>
+                <c:pt idx="79">
+                  <c:v>1</c:v>
+                </c:pt>
+                <c:pt idx="80">
+                  <c:v>1</c:v>
+                </c:pt>
+                <c:pt idx="81">
+                  <c:v>1</c:v>
+                </c:pt>
+                <c:pt idx="82">
+                  <c:v>1</c:v>
+                </c:pt>
+                <c:pt idx="83">
+                  <c:v>1</c:v>
+                </c:pt>
+                <c:pt idx="84">
+                  <c:v>1</c:v>
+                </c:pt>
+                <c:pt idx="85">
+                  <c:v>1</c:v>
+                </c:pt>
+                <c:pt idx="86">
+                  <c:v>1</c:v>
+                </c:pt>
+                <c:pt idx="87">
+                  <c:v>1</c:v>
+                </c:pt>
+                <c:pt idx="88">
+                  <c:v>1</c:v>
+                </c:pt>
+                <c:pt idx="89">
+                  <c:v>1</c:v>
+                </c:pt>
+                <c:pt idx="90">
+                  <c:v>1</c:v>
+                </c:pt>
+                <c:pt idx="91">
+                  <c:v>1</c:v>
+                </c:pt>
+                <c:pt idx="92">
+                  <c:v>1</c:v>
+                </c:pt>
+                <c:pt idx="93">
+                  <c:v>1</c:v>
+                </c:pt>
+                <c:pt idx="94">
+                  <c:v>1</c:v>
+                </c:pt>
+                <c:pt idx="95">
+                  <c:v>1</c:v>
+                </c:pt>
+                <c:pt idx="96">
+                  <c:v>1</c:v>
+                </c:pt>
+                <c:pt idx="97">
+                  <c:v>1</c:v>
+                </c:pt>
+                <c:pt idx="98">
+                  <c:v>1</c:v>
+                </c:pt>
+                <c:pt idx="99">
+                  <c:v>1</c:v>
+                </c:pt>
+                <c:pt idx="100">
+                  <c:v>1</c:v>
+                </c:pt>
+                <c:pt idx="101">
+                  <c:v>1</c:v>
+                </c:pt>
+                <c:pt idx="102">
+                  <c:v>1</c:v>
+                </c:pt>
+                <c:pt idx="103">
+                  <c:v>1</c:v>
+                </c:pt>
+                <c:pt idx="104">
+                  <c:v>1</c:v>
+                </c:pt>
+                <c:pt idx="105">
+                  <c:v>1</c:v>
+                </c:pt>
+                <c:pt idx="106">
+                  <c:v>1</c:v>
+                </c:pt>
+                <c:pt idx="107">
+                  <c:v>1</c:v>
+                </c:pt>
+                <c:pt idx="108">
+                  <c:v>1</c:v>
+                </c:pt>
+                <c:pt idx="109">
+                  <c:v>1</c:v>
+                </c:pt>
+                <c:pt idx="110">
+                  <c:v>1</c:v>
+                </c:pt>
+                <c:pt idx="111">
+                  <c:v>1</c:v>
+                </c:pt>
+                <c:pt idx="112">
+                  <c:v>1</c:v>
+                </c:pt>
+                <c:pt idx="113">
+                  <c:v>1</c:v>
+                </c:pt>
+                <c:pt idx="114">
+                  <c:v>1</c:v>
+                </c:pt>
+              </c:numCache>
+            </c:numRef>
+          </c:yVal>
+        </c:ser>
+        <c:ser>
+          <c:idx val="1"/>
+          <c:order val="1"/>
+          <c:tx>
+            <c:v>Chance</c:v>
+          </c:tx>
+          <c:spPr>
+            <a:ln xmlns:a="http://schemas.openxmlformats.org/drawingml/2006/main" w="14288">
+              <a:solidFill>
+                <a:srgbClr val="88969A"/>
+              </a:solidFill>
+              <a:prstDash val="dash"/>
+            </a:ln>
+          </c:spPr>
+          <c:marker>
+            <c:symbol val="none"/>
+            <c:size val="2"/>
+          </c:marker>
+          <c:xVal>
+            <c:numRef>
+              <c:f>'Chart Data'!$C$2:$C$3</c:f>
+              <c:numCache>
+                <c:formatCode>General</c:formatCode>
+                <c:ptCount val="2"/>
+                <c:pt idx="0">
+                  <c:v>0</c:v>
+                </c:pt>
+                <c:pt idx="1">
+                  <c:v>1</c:v>
+                </c:pt>
+              </c:numCache>
+            </c:numRef>
+          </c:xVal>
+          <c:yVal>
+            <c:numRef>
+              <c:f>'Chart Data'!$D$2:$D$3</c:f>
+              <c:numCache>
+                <c:formatCode>0%</c:formatCode>
+                <c:ptCount val="2"/>
+                <c:pt idx="0">
+                  <c:v>0</c:v>
+                </c:pt>
+                <c:pt idx="1">
+                  <c:v>1</c:v>
+                </c:pt>
+              </c:numCache>
+            </c:numRef>
+          </c:yVal>
+        </c:ser>
+        <c:dLbls>
+          <c:txPr>
+            <a:bodyPr xmlns:a="http://schemas.openxmlformats.org/drawingml/2006/main" anchorCtr="1"/>
+            <a:lstStyle xmlns:a="http://schemas.openxmlformats.org/drawingml/2006/main"/>
+            <a:p xmlns:a="http://schemas.openxmlformats.org/drawingml/2006/main">
+              <a:pPr>
+                <a:defRPr>
+                  <a:latin typeface="Arial"/>
+                  <a:ea typeface="Arial"/>
+                  <a:cs typeface="Arial"/>
+                </a:defRPr>
+              </a:pPr>
+            </a:p>
+          </c:txPr>
+          <c:showLegendKey val="0"/>
+          <c:showVal val="0"/>
+          <c:showCatName val="0"/>
+          <c:showSerName val="0"/>
+          <c:showPercent val="0"/>
+          <c:showBubbleSize val="0"/>
+          <c:showLeaderLines val="0"/>
+        </c:dLbls>
+        <c:axId val="48650112"/>
+        <c:axId val="48672768"/>
+      </c:scatterChart>
+      <c:valAx>
+        <c:axId val="48672768"/>
+        <c:scaling>
+          <c:orientation val="minMax"/>
+          <c:max val="1"/>
+          <c:min val="0"/>
+        </c:scaling>
+        <c:delete val="0"/>
+        <c:axPos val="l"/>
+        <c:majorGridlines>
+          <c:spPr>
+            <a:ln xmlns:a="http://schemas.openxmlformats.org/drawingml/2006/main" w="9525">
+              <a:solidFill>
+                <a:srgbClr val="D6DEDA"/>
+              </a:solidFill>
+              <a:prstDash val="solid"/>
+            </a:ln>
+          </c:spPr>
+        </c:majorGridlines>
+        <c:title>
+          <c:tx>
+            <c:rich>
+              <a:bodyPr xmlns:a="http://schemas.openxmlformats.org/drawingml/2006/main"/>
+              <a:lstStyle xmlns:a="http://schemas.openxmlformats.org/drawingml/2006/main"/>
+              <a:p xmlns:a="http://schemas.openxmlformats.org/drawingml/2006/main">
+                <a:r>
+                  <a:rPr>
+                    <a:latin typeface="Arial"/>
+                    <a:ea typeface="Arial"/>
+                    <a:cs typeface="Arial"/>
+                  </a:rPr>
+                  <a:t>Sensitivity</a:t>
+                </a:r>
+              </a:p>
+            </c:rich>
+          </c:tx>
+          <c:overlay val="0"/>
+          <c:txPr>
+            <a:bodyPr xmlns:a="http://schemas.openxmlformats.org/drawingml/2006/main" anchorCtr="1"/>
+            <a:lstStyle xmlns:a="http://schemas.openxmlformats.org/drawingml/2006/main"/>
+            <a:p xmlns:a="http://schemas.openxmlformats.org/drawingml/2006/main">
+              <a:pPr>
+                <a:defRPr>
+                  <a:latin typeface="Arial"/>
+                  <a:ea typeface="Arial"/>
+                  <a:cs typeface="Arial"/>
+                </a:defRPr>
+              </a:pPr>
+            </a:p>
+          </c:txPr>
+        </c:title>
+        <c:numFmt formatCode="0%"/>
+        <c:majorTickMark val="none"/>
+        <c:minorTickMark val="none"/>
+        <c:spPr>
+          <a:ln xmlns:a="http://schemas.openxmlformats.org/drawingml/2006/main" w="9525">
+            <a:solidFill>
+              <a:srgbClr val="D4D4D4"/>
+            </a:solidFill>
+            <a:prstDash val="solid"/>
+          </a:ln>
+        </c:spPr>
+        <c:txPr>
+          <a:bodyPr xmlns:a="http://schemas.openxmlformats.org/drawingml/2006/main" anchorCtr="1"/>
+          <a:lstStyle xmlns:a="http://schemas.openxmlformats.org/drawingml/2006/main"/>
+          <a:p xmlns:a="http://schemas.openxmlformats.org/drawingml/2006/main">
+            <a:pPr>
+              <a:defRPr sz="1050">
+                <a:solidFill>
+                  <a:srgbClr val="263D4B"/>
+                </a:solidFill>
+                <a:latin typeface="Arial"/>
+                <a:ea typeface="Arial"/>
+                <a:cs typeface="Arial"/>
+              </a:defRPr>
+            </a:pPr>
+          </a:p>
+        </c:txPr>
+        <c:crossAx val="48650112"/>
+        <c:majorUnit val="0.2"/>
+      </c:valAx>
+      <c:valAx>
+        <c:axId val="48650112"/>
+        <c:scaling>
+          <c:orientation val="minMax"/>
+          <c:max val="1"/>
+          <c:min val="0"/>
+        </c:scaling>
+        <c:delete val="0"/>
+        <c:axPos val="b"/>
+        <c:majorGridlines>
+          <c:spPr>
+            <a:ln xmlns:a="http://schemas.openxmlformats.org/drawingml/2006/main" w="9525">
+              <a:solidFill>
+                <a:srgbClr val="D6DEDA"/>
+              </a:solidFill>
+              <a:prstDash val="solid"/>
+            </a:ln>
+          </c:spPr>
+        </c:majorGridlines>
+        <c:title>
+          <c:tx>
+            <c:rich>
+              <a:bodyPr xmlns:a="http://schemas.openxmlformats.org/drawingml/2006/main"/>
+              <a:lstStyle xmlns:a="http://schemas.openxmlformats.org/drawingml/2006/main"/>
+              <a:p xmlns:a="http://schemas.openxmlformats.org/drawingml/2006/main">
+                <a:r>
+                  <a:rPr>
+                    <a:latin typeface="Arial"/>
+                    <a:ea typeface="Arial"/>
+                    <a:cs typeface="Arial"/>
+                  </a:rPr>
+                  <a:t>False-positive rate</a:t>
+                </a:r>
+              </a:p>
+            </c:rich>
+          </c:tx>
+          <c:overlay val="0"/>
+          <c:txPr>
+            <a:bodyPr xmlns:a="http://schemas.openxmlformats.org/drawingml/2006/main" anchorCtr="1"/>
+            <a:lstStyle xmlns:a="http://schemas.openxmlformats.org/drawingml/2006/main"/>
+            <a:p xmlns:a="http://schemas.openxmlformats.org/drawingml/2006/main">
+              <a:pPr>
+                <a:defRPr>
+                  <a:latin typeface="Arial"/>
+                  <a:ea typeface="Arial"/>
+                  <a:cs typeface="Arial"/>
+                </a:defRPr>
+              </a:pPr>
+            </a:p>
+          </c:txPr>
+        </c:title>
+        <c:numFmt formatCode="0%"/>
+        <c:majorTickMark val="none"/>
+        <c:minorTickMark val="none"/>
+        <c:spPr>
+          <a:ln xmlns:a="http://schemas.openxmlformats.org/drawingml/2006/main" w="9525">
+            <a:solidFill>
+              <a:srgbClr val="D4D4D4"/>
+            </a:solidFill>
+            <a:prstDash val="solid"/>
+          </a:ln>
+        </c:spPr>
+        <c:txPr>
+          <a:bodyPr xmlns:a="http://schemas.openxmlformats.org/drawingml/2006/main" anchorCtr="1"/>
+          <a:lstStyle xmlns:a="http://schemas.openxmlformats.org/drawingml/2006/main"/>
+          <a:p xmlns:a="http://schemas.openxmlformats.org/drawingml/2006/main">
+            <a:pPr>
+              <a:defRPr sz="1050">
+                <a:solidFill>
+                  <a:srgbClr val="263D4B"/>
+                </a:solidFill>
+                <a:latin typeface="Arial"/>
+                <a:ea typeface="Arial"/>
+                <a:cs typeface="Arial"/>
+              </a:defRPr>
+            </a:pPr>
+          </a:p>
+        </c:txPr>
+        <c:crossAx val="48672768"/>
+        <c:majorUnit val="0.2"/>
+      </c:valAx>
+      <c:spPr>
+        <a:solidFill xmlns:a="http://schemas.openxmlformats.org/drawingml/2006/main">
+          <a:srgbClr val="F7F8F5"/>
+        </a:solidFill>
+        <a:ln xmlns:a="http://schemas.openxmlformats.org/drawingml/2006/main" w="0">
+          <a:noFill/>
+        </a:ln>
+      </c:spPr>
+    </c:plotArea>
+    <c:legend>
+      <c:legendPos val="b"/>
+      <c:overlay val="0"/>
+      <c:txPr>
+        <a:bodyPr xmlns:a="http://schemas.openxmlformats.org/drawingml/2006/main" anchorCtr="1"/>
+        <a:lstStyle xmlns:a="http://schemas.openxmlformats.org/drawingml/2006/main"/>
+        <a:p xmlns:a="http://schemas.openxmlformats.org/drawingml/2006/main">
+          <a:pPr>
+            <a:defRPr sz="1125">
+              <a:solidFill>
+                <a:srgbClr val="263D4B"/>
+              </a:solidFill>
+              <a:latin typeface="Arial"/>
+              <a:ea typeface="Arial"/>
+              <a:cs typeface="Arial"/>
+            </a:defRPr>
+          </a:pPr>
+        </a:p>
+      </c:txPr>
+    </c:legend>
+    <c:plotVisOnly val="1"/>
+  </c:chart>
+  <c:spPr>
+    <a:solidFill xmlns:a="http://schemas.openxmlformats.org/drawingml/2006/main">
+      <a:srgbClr val="F7F8F5"/>
+    </a:solidFill>
+    <a:ln xmlns:a="http://schemas.openxmlformats.org/drawingml/2006/main" w="0">
+      <a:noFill/>
+    </a:ln>
+  </c:spPr>
+  <c:externalData r:id="rIdChartSnapshot1">
+    <c:autoUpdate val="0"/>
+  </c:externalData>
+</c:chartSpace>
+</file>
+
+<file path=ppt/slides/charts/chart2.xml><?xml version="1.0" encoding="utf-8"?>
+<c:chartSpace xmlns:c="http://schemas.openxmlformats.org/drawingml/2006/chart" xmlns:r="http://schemas.openxmlformats.org/officeDocument/2006/relationships">
+  <c:lang val="en-US"/>
+  <c:chart>
+    <c:plotArea>
+      <c:barChart>
+        <c:barDir val="bar"/>
+        <c:grouping val="clustered"/>
+        <c:varyColors val="0"/>
+        <c:ser>
+          <c:idx val="0"/>
+          <c:order val="0"/>
+          <c:tx>
+            <c:v>Weight</c:v>
+          </c:tx>
+          <c:spPr>
+            <a:solidFill xmlns:a="http://schemas.openxmlformats.org/drawingml/2006/main">
+              <a:srgbClr val="167C80"/>
+            </a:solidFill>
+          </c:spPr>
+          <c:cat>
+            <c:strRef>
+              <c:f>'Chart Data'!$A$2:$A$6</c:f>
+              <c:strCache>
+                <c:ptCount val="5"/>
+                <c:pt idx="0">
+                  <c:v>worst texture</c:v>
+                </c:pt>
+                <c:pt idx="1">
+                  <c:v>radius error</c:v>
+                </c:pt>
+                <c:pt idx="2">
+                  <c:v>worst symmetry</c:v>
+                </c:pt>
+                <c:pt idx="3">
+                  <c:v>mean concave points</c:v>
+                </c:pt>
+                <c:pt idx="4">
+                  <c:v>worst concavity</c:v>
+                </c:pt>
+              </c:strCache>
+            </c:strRef>
+          </c:cat>
+          <c:val>
+            <c:numRef>
+              <c:f>'Chart Data'!$B$2:$B$6</c:f>
+              <c:numCache>
+                <c:formatCode>0.000</c:formatCode>
+                <c:ptCount val="5"/>
+                <c:pt idx="0">
+                  <c:v>1.434</c:v>
+                </c:pt>
+                <c:pt idx="1">
+                  <c:v>1.233</c:v>
+                </c:pt>
+                <c:pt idx="2">
+                  <c:v>1.061</c:v>
+                </c:pt>
+                <c:pt idx="3">
+                  <c:v>0.953</c:v>
+                </c:pt>
+                <c:pt idx="4">
+                  <c:v>0.911</c:v>
+                </c:pt>
+              </c:numCache>
+            </c:numRef>
+          </c:val>
+        </c:ser>
+        <c:dLbls>
+          <c:txPr>
+            <a:bodyPr xmlns:a="http://schemas.openxmlformats.org/drawingml/2006/main" anchorCtr="1"/>
+            <a:lstStyle xmlns:a="http://schemas.openxmlformats.org/drawingml/2006/main"/>
+            <a:p xmlns:a="http://schemas.openxmlformats.org/drawingml/2006/main">
+              <a:pPr>
+                <a:defRPr sz="1050">
+                  <a:solidFill>
+                    <a:srgbClr val="163345"/>
+                  </a:solidFill>
+                  <a:latin typeface="Arial"/>
+                  <a:ea typeface="Arial"/>
+                  <a:cs typeface="Arial"/>
+                </a:defRPr>
+              </a:pPr>
+            </a:p>
+          </c:txPr>
+          <c:dLblPos val="outEnd"/>
+          <c:showLegendKey val="0"/>
+          <c:showVal val="1"/>
+          <c:showCatName val="0"/>
+          <c:showSerName val="0"/>
+          <c:showPercent val="0"/>
+          <c:showBubbleSize val="0"/>
+          <c:showLeaderLines val="0"/>
+        </c:dLbls>
+        <c:gapWidth val="55"/>
+        <c:axId val="48650112"/>
+        <c:axId val="48672768"/>
+      </c:barChart>
+      <c:catAx>
+        <c:axId val="48650112"/>
+        <c:scaling>
+          <c:orientation val="minMax"/>
+        </c:scaling>
+        <c:delete val="0"/>
+        <c:axPos val="l"/>
+        <c:majorGridlines>
+          <c:spPr>
+            <a:ln xmlns:a="http://schemas.openxmlformats.org/drawingml/2006/main" w="9525">
+              <a:solidFill>
+                <a:srgbClr val="D6DEDA"/>
+              </a:solidFill>
+              <a:prstDash val="solid"/>
+            </a:ln>
+          </c:spPr>
+        </c:majorGridlines>
+        <c:title>
+          <c:tx>
+            <c:rich>
+              <a:bodyPr xmlns:a="http://schemas.openxmlformats.org/drawingml/2006/main"/>
+              <a:lstStyle xmlns:a="http://schemas.openxmlformats.org/drawingml/2006/main"/>
+              <a:p xmlns:a="http://schemas.openxmlformats.org/drawingml/2006/main">
+                <a:r>
+                  <a:rPr>
+                    <a:latin typeface="Arial"/>
+                    <a:ea typeface="Arial"/>
+                    <a:cs typeface="Arial"/>
+                  </a:rPr>
+                  <a:t>Standardized coefficient</a:t>
+                </a:r>
+              </a:p>
+            </c:rich>
+          </c:tx>
+          <c:overlay val="0"/>
+          <c:txPr>
+            <a:bodyPr xmlns:a="http://schemas.openxmlformats.org/drawingml/2006/main" anchorCtr="1"/>
+            <a:lstStyle xmlns:a="http://schemas.openxmlformats.org/drawingml/2006/main"/>
+            <a:p xmlns:a="http://schemas.openxmlformats.org/drawingml/2006/main">
+              <a:pPr>
+                <a:defRPr>
+                  <a:latin typeface="Arial"/>
+                  <a:ea typeface="Arial"/>
+                  <a:cs typeface="Arial"/>
+                </a:defRPr>
+              </a:pPr>
+            </a:p>
+          </c:txPr>
+        </c:title>
+        <c:numFmt formatCode="0.0"/>
+        <c:majorTickMark val="none"/>
+        <c:minorTickMark val="none"/>
+        <c:spPr>
+          <a:ln xmlns:a="http://schemas.openxmlformats.org/drawingml/2006/main" w="9525">
+            <a:solidFill>
+              <a:srgbClr val="D4D4D4"/>
+            </a:solidFill>
+            <a:prstDash val="solid"/>
+          </a:ln>
+        </c:spPr>
+        <c:txPr>
+          <a:bodyPr xmlns:a="http://schemas.openxmlformats.org/drawingml/2006/main" anchorCtr="1"/>
+          <a:lstStyle xmlns:a="http://schemas.openxmlformats.org/drawingml/2006/main"/>
+          <a:p xmlns:a="http://schemas.openxmlformats.org/drawingml/2006/main">
+            <a:pPr>
+              <a:defRPr sz="1125">
+                <a:solidFill>
+                  <a:srgbClr val="263D4B"/>
+                </a:solidFill>
+                <a:latin typeface="Arial"/>
+                <a:ea typeface="Arial"/>
+                <a:cs typeface="Arial"/>
+              </a:defRPr>
+            </a:pPr>
+          </a:p>
+        </c:txPr>
+        <c:crossAx val="48672768"/>
+      </c:catAx>
+      <c:valAx>
+        <c:axId val="48672768"/>
+        <c:scaling>
+          <c:orientation val="minMax"/>
+        </c:scaling>
+        <c:delete val="0"/>
+        <c:axPos val="b"/>
+        <c:numFmt formatCode="General"/>
+        <c:majorTickMark val="none"/>
+        <c:minorTickMark val="none"/>
+        <c:spPr>
+          <a:ln xmlns:a="http://schemas.openxmlformats.org/drawingml/2006/main" w="9525">
+            <a:solidFill>
+              <a:srgbClr val="D4D4D4"/>
+            </a:solidFill>
+            <a:prstDash val="solid"/>
+          </a:ln>
+        </c:spPr>
+        <c:txPr>
+          <a:bodyPr xmlns:a="http://schemas.openxmlformats.org/drawingml/2006/main" anchorCtr="1"/>
+          <a:lstStyle xmlns:a="http://schemas.openxmlformats.org/drawingml/2006/main"/>
+          <a:p xmlns:a="http://schemas.openxmlformats.org/drawingml/2006/main">
+            <a:pPr>
+              <a:defRPr sz="1200">
+                <a:solidFill>
+                  <a:srgbClr val="263D4B"/>
+                </a:solidFill>
+                <a:latin typeface="Arial"/>
+                <a:ea typeface="Arial"/>
+                <a:cs typeface="Arial"/>
+              </a:defRPr>
+            </a:pPr>
+          </a:p>
+        </c:txPr>
+        <c:crossAx val="48650112"/>
+        <c:crossBetween val="between"/>
+      </c:valAx>
+      <c:spPr>
+        <a:solidFill xmlns:a="http://schemas.openxmlformats.org/drawingml/2006/main">
+          <a:srgbClr val="F7F8F5"/>
+        </a:solidFill>
+        <a:ln xmlns:a="http://schemas.openxmlformats.org/drawingml/2006/main" w="0">
+          <a:noFill/>
+        </a:ln>
+      </c:spPr>
+    </c:plotArea>
+    <c:plotVisOnly val="1"/>
+  </c:chart>
+  <c:spPr>
+    <a:solidFill xmlns:a="http://schemas.openxmlformats.org/drawingml/2006/main">
+      <a:srgbClr val="F7F8F5"/>
+    </a:solidFill>
+    <a:ln xmlns:a="http://schemas.openxmlformats.org/drawingml/2006/main" w="0">
+      <a:noFill/>
+    </a:ln>
+  </c:spPr>
+  <c:externalData r:id="rIdChartSnapshot1">
+    <c:autoUpdate val="0"/>
+  </c:externalData>
+</c:chartSpace>
+</file>
+
 <file path=ppt/slides/slide1.xml><?xml version="1.0" encoding="utf-8"?>
 <p:sld xmlns:p="http://schemas.openxmlformats.org/presentationml/2006/main">
   <p:cSld>
@@ -1860,6 +3620,7 @@
           <a:lstStyle xmlns:a="http://schemas.openxmlformats.org/drawingml/2006/main"/>
           <a:p xmlns:a="http://schemas.openxmlformats.org/drawingml/2006/main">
             <a:pPr>
+              <a:buNone/>
               <a:defRPr sz="4350" b="1">
                 <a:solidFill>
                   <a:srgbClr val="163345"/>
@@ -1917,6 +3678,7 @@
           <a:lstStyle xmlns:a="http://schemas.openxmlformats.org/drawingml/2006/main"/>
           <a:p xmlns:a="http://schemas.openxmlformats.org/drawingml/2006/main">
             <a:pPr>
+              <a:buNone/>
               <a:defRPr sz="2400" b="0">
                 <a:solidFill>
                   <a:srgbClr val="167C80"/>
@@ -1974,6 +3736,7 @@
           <a:lstStyle xmlns:a="http://schemas.openxmlformats.org/drawingml/2006/main"/>
           <a:p xmlns:a="http://schemas.openxmlformats.org/drawingml/2006/main">
             <a:pPr>
+              <a:buNone/>
               <a:defRPr sz="1875" b="0">
                 <a:solidFill>
                   <a:srgbClr val="536A77"/>
@@ -2031,6 +3794,7 @@
           <a:lstStyle xmlns:a="http://schemas.openxmlformats.org/drawingml/2006/main"/>
           <a:p xmlns:a="http://schemas.openxmlformats.org/drawingml/2006/main">
             <a:pPr>
+              <a:buNone/>
               <a:defRPr sz="1650" b="1">
                 <a:solidFill>
                   <a:srgbClr val="B3543C"/>
@@ -2117,6 +3881,7 @@
           <a:lstStyle xmlns:a="http://schemas.openxmlformats.org/drawingml/2006/main"/>
           <a:p xmlns:a="http://schemas.openxmlformats.org/drawingml/2006/main">
             <a:pPr>
+              <a:buNone/>
               <a:defRPr sz="3300" b="1">
                 <a:solidFill>
                   <a:srgbClr val="163345"/>
@@ -2174,6 +3939,7 @@
           <a:lstStyle xmlns:a="http://schemas.openxmlformats.org/drawingml/2006/main"/>
           <a:p xmlns:a="http://schemas.openxmlformats.org/drawingml/2006/main">
             <a:pPr>
+              <a:buNone/>
               <a:defRPr sz="1350" b="0">
                 <a:solidFill>
                   <a:srgbClr val="536A77"/>
@@ -2231,6 +3997,7 @@
           <a:lstStyle xmlns:a="http://schemas.openxmlformats.org/drawingml/2006/main"/>
           <a:p xmlns:a="http://schemas.openxmlformats.org/drawingml/2006/main">
             <a:pPr>
+              <a:buNone/>
               <a:defRPr sz="2625" b="1">
                 <a:solidFill>
                   <a:srgbClr val="163345"/>
@@ -2288,6 +4055,7 @@
           <a:lstStyle xmlns:a="http://schemas.openxmlformats.org/drawingml/2006/main"/>
           <a:p xmlns:a="http://schemas.openxmlformats.org/drawingml/2006/main">
             <a:pPr>
+              <a:buNone/>
               <a:defRPr sz="2100" b="0">
                 <a:solidFill>
                   <a:srgbClr val="263D4B"/>
@@ -2311,6 +4079,7 @@
           </a:p>
           <a:p xmlns:a="http://schemas.openxmlformats.org/drawingml/2006/main">
             <a:pPr>
+              <a:buNone/>
               <a:defRPr sz="2100" b="0">
                 <a:solidFill>
                   <a:srgbClr val="263D4B"/>
@@ -2334,6 +4103,7 @@
           </a:p>
           <a:p xmlns:a="http://schemas.openxmlformats.org/drawingml/2006/main">
             <a:pPr>
+              <a:buNone/>
               <a:defRPr sz="2100" b="0">
                 <a:solidFill>
                   <a:srgbClr val="263D4B"/>
@@ -2357,6 +4127,7 @@
           </a:p>
           <a:p xmlns:a="http://schemas.openxmlformats.org/drawingml/2006/main">
             <a:pPr>
+              <a:buNone/>
               <a:defRPr sz="2100" b="0">
                 <a:solidFill>
                   <a:srgbClr val="263D4B"/>
@@ -2414,6 +4185,7 @@
           <a:lstStyle xmlns:a="http://schemas.openxmlformats.org/drawingml/2006/main"/>
           <a:p xmlns:a="http://schemas.openxmlformats.org/drawingml/2006/main">
             <a:pPr>
+              <a:buNone/>
               <a:defRPr sz="2025" b="1">
                 <a:solidFill>
                   <a:srgbClr val="B3543C"/>
@@ -2500,6 +4272,7 @@
           <a:lstStyle xmlns:a="http://schemas.openxmlformats.org/drawingml/2006/main"/>
           <a:p xmlns:a="http://schemas.openxmlformats.org/drawingml/2006/main">
             <a:pPr>
+              <a:buNone/>
               <a:defRPr sz="3300" b="1">
                 <a:solidFill>
                   <a:srgbClr val="163345"/>
@@ -2557,6 +4330,7 @@
           <a:lstStyle xmlns:a="http://schemas.openxmlformats.org/drawingml/2006/main"/>
           <a:p xmlns:a="http://schemas.openxmlformats.org/drawingml/2006/main">
             <a:pPr>
+              <a:buNone/>
               <a:defRPr sz="1350" b="0">
                 <a:solidFill>
                   <a:srgbClr val="536A77"/>
@@ -2614,6 +4388,7 @@
           <a:lstStyle xmlns:a="http://schemas.openxmlformats.org/drawingml/2006/main"/>
           <a:p xmlns:a="http://schemas.openxmlformats.org/drawingml/2006/main">
             <a:pPr>
+              <a:buNone/>
               <a:defRPr sz="2100" b="0">
                 <a:solidFill>
                   <a:srgbClr val="263D4B"/>
@@ -2671,6 +4446,7 @@
           <a:lstStyle xmlns:a="http://schemas.openxmlformats.org/drawingml/2006/main"/>
           <a:p xmlns:a="http://schemas.openxmlformats.org/drawingml/2006/main">
             <a:pPr>
+              <a:buNone/>
               <a:defRPr sz="2100" b="0">
                 <a:solidFill>
                   <a:srgbClr val="263D4B"/>
@@ -2728,6 +4504,7 @@
           <a:lstStyle xmlns:a="http://schemas.openxmlformats.org/drawingml/2006/main"/>
           <a:p xmlns:a="http://schemas.openxmlformats.org/drawingml/2006/main">
             <a:pPr>
+              <a:buNone/>
               <a:defRPr sz="2100" b="0">
                 <a:solidFill>
                   <a:srgbClr val="263D4B"/>
@@ -2785,6 +4562,7 @@
           <a:lstStyle xmlns:a="http://schemas.openxmlformats.org/drawingml/2006/main"/>
           <a:p xmlns:a="http://schemas.openxmlformats.org/drawingml/2006/main">
             <a:pPr>
+              <a:buNone/>
               <a:defRPr sz="2100" b="0">
                 <a:solidFill>
                   <a:srgbClr val="263D4B"/>
@@ -2842,6 +4620,7 @@
           <a:lstStyle xmlns:a="http://schemas.openxmlformats.org/drawingml/2006/main"/>
           <a:p xmlns:a="http://schemas.openxmlformats.org/drawingml/2006/main">
             <a:pPr>
+              <a:buNone/>
               <a:defRPr sz="1725" b="1">
                 <a:solidFill>
                   <a:srgbClr val="167C80"/>
@@ -2869,6 +4648,2763 @@
     <p:extLst>
       <p:ext uri="{BB962C8B-B14F-4D97-AF65-F5344CB8AC3E}">
         <p14:creationId xmlns:p14="http://schemas.microsoft.com/office/powerpoint/2010/main" val="716765084"/>
+      </p:ext>
+    </p:extLst>
+  </p:cSld>
+</p:sld>
+</file>
+
+<file path=ppt/slides/slide12.xml><?xml version="1.0" encoding="utf-8"?>
+<p:sld xmlns:p="http://schemas.openxmlformats.org/presentationml/2006/main">
+  <p:cSld>
+    <p:bg>
+      <p:bgPr>
+        <a:solidFill xmlns:a="http://schemas.openxmlformats.org/drawingml/2006/main">
+          <a:srgbClr val="F7F8F5"/>
+        </a:solidFill>
+      </p:bgPr>
+    </p:bg>
+    <p:spTree>
+      <p:nvGrpSpPr>
+        <p:cNvPr id="1" name=""/>
+        <p:cNvGrpSpPr/>
+        <p:nvPr/>
+      </p:nvGrpSpPr>
+      <p:grpSpPr>
+        <a:xfrm xmlns:a="http://schemas.openxmlformats.org/drawingml/2006/main"/>
+      </p:grpSpPr>
+      <p:sp>
+        <p:nvSpPr>
+          <p:cNvPr id="7" name="">
+            <a:extLst xmlns:a="http://schemas.openxmlformats.org/drawingml/2006/main">
+              <a:ext uri="{FF2B5EF4-FFF2-40B4-BE49-F238E27FC236}">
+                <a16:creationId xmlns:a16="http://schemas.microsoft.com/office/drawing/2014/main" id="{CD4C8E90-EAD9-4B2E-ACCF-D3ACD271CD6F}"/>
+              </a:ext>
+            </a:extLst>
+          </p:cNvPr>
+          <p:cNvSpPr>
+            <a:spLocks xmlns:a="http://schemas.openxmlformats.org/drawingml/2006/main" noGrp="1"/>
+          </p:cNvSpPr>
+          <p:nvPr/>
+        </p:nvSpPr>
+        <p:spPr>
+          <a:xfrm xmlns:a="http://schemas.openxmlformats.org/drawingml/2006/main">
+            <a:off x="723900" y="457200"/>
+            <a:ext cx="10744200" cy="685800"/>
+          </a:xfrm>
+          <a:prstGeom xmlns:a="http://schemas.openxmlformats.org/drawingml/2006/main" prst="rect">
+            <a:avLst/>
+          </a:prstGeom>
+          <a:noFill xmlns:a="http://schemas.openxmlformats.org/drawingml/2006/main"/>
+          <a:ln xmlns:a="http://schemas.openxmlformats.org/drawingml/2006/main" w="0">
+            <a:noFill/>
+          </a:ln>
+        </p:spPr>
+        <p:txBody>
+          <a:bodyPr xmlns:a="http://schemas.openxmlformats.org/drawingml/2006/main" anchor="ctr">
+            <a:normAutofit fontScale="100000"/>
+          </a:bodyPr>
+          <a:lstStyle xmlns:a="http://schemas.openxmlformats.org/drawingml/2006/main"/>
+          <a:p xmlns:a="http://schemas.openxmlformats.org/drawingml/2006/main">
+            <a:pPr>
+              <a:defRPr sz="3300" b="1">
+                <a:solidFill>
+                  <a:srgbClr val="163345"/>
+                </a:solidFill>
+                <a:latin typeface="Arial"/>
+                <a:ea typeface="Arial"/>
+                <a:cs typeface="Arial"/>
+              </a:defRPr>
+            </a:pPr>
+            <a:r>
+              <a:rPr sz="3300" b="1">
+                <a:solidFill>
+                  <a:srgbClr val="163345"/>
+                </a:solidFill>
+                <a:latin typeface="Arial"/>
+                <a:ea typeface="Arial"/>
+                <a:cs typeface="Arial"/>
+              </a:rPr>
+              <a:t>What the 30 measurements describe</a:t>
+            </a:r>
+          </a:p>
+        </p:txBody>
+      </p:sp>
+      <p:sp>
+        <p:nvSpPr>
+          <p:cNvPr id="2" name="">
+            <a:extLst xmlns:a="http://schemas.openxmlformats.org/drawingml/2006/main">
+              <a:ext uri="{FF2B5EF4-FFF2-40B4-BE49-F238E27FC236}">
+                <a16:creationId xmlns:a16="http://schemas.microsoft.com/office/drawing/2014/main" id="{39B2AF81-F0C3-4F57-9A73-61FA9EB5710C}"/>
+              </a:ext>
+            </a:extLst>
+          </p:cNvPr>
+          <p:cNvSpPr>
+            <a:spLocks xmlns:a="http://schemas.openxmlformats.org/drawingml/2006/main" noGrp="1"/>
+          </p:cNvSpPr>
+          <p:nvPr/>
+        </p:nvSpPr>
+        <p:spPr>
+          <a:xfrm xmlns:a="http://schemas.openxmlformats.org/drawingml/2006/main">
+            <a:off x="11049000" y="5953125"/>
+            <a:ext cx="514350" cy="361950"/>
+          </a:xfrm>
+          <a:prstGeom xmlns:a="http://schemas.openxmlformats.org/drawingml/2006/main" prst="rect">
+            <a:avLst/>
+          </a:prstGeom>
+          <a:noFill xmlns:a="http://schemas.openxmlformats.org/drawingml/2006/main"/>
+          <a:ln xmlns:a="http://schemas.openxmlformats.org/drawingml/2006/main" w="0">
+            <a:noFill/>
+          </a:ln>
+        </p:spPr>
+        <p:txBody>
+          <a:bodyPr xmlns:a="http://schemas.openxmlformats.org/drawingml/2006/main" anchor="ctr">
+            <a:normAutofit fontScale="100000"/>
+          </a:bodyPr>
+          <a:lstStyle xmlns:a="http://schemas.openxmlformats.org/drawingml/2006/main"/>
+          <a:p xmlns:a="http://schemas.openxmlformats.org/drawingml/2006/main">
+            <a:pPr>
+              <a:defRPr sz="1350" b="0">
+                <a:solidFill>
+                  <a:srgbClr val="536A77"/>
+                </a:solidFill>
+                <a:latin typeface="Arial"/>
+                <a:ea typeface="Arial"/>
+                <a:cs typeface="Arial"/>
+              </a:defRPr>
+            </a:pPr>
+            <a:r>
+              <a:rPr sz="1350" b="0">
+                <a:solidFill>
+                  <a:srgbClr val="536A77"/>
+                </a:solidFill>
+                <a:latin typeface="Arial"/>
+                <a:ea typeface="Arial"/>
+                <a:cs typeface="Arial"/>
+              </a:rPr>
+              <a:t>12</a:t>
+            </a:r>
+          </a:p>
+        </p:txBody>
+      </p:sp>
+      <p:sp>
+        <p:nvSpPr>
+          <p:cNvPr id="3" name="">
+            <a:extLst xmlns:a="http://schemas.openxmlformats.org/drawingml/2006/main">
+              <a:ext uri="{FF2B5EF4-FFF2-40B4-BE49-F238E27FC236}">
+                <a16:creationId xmlns:a16="http://schemas.microsoft.com/office/drawing/2014/main" id="{C7F7E17E-EEC8-46E0-889E-D03DAB934F0B}"/>
+              </a:ext>
+            </a:extLst>
+          </p:cNvPr>
+          <p:cNvSpPr>
+            <a:spLocks xmlns:a="http://schemas.openxmlformats.org/drawingml/2006/main" noGrp="1"/>
+          </p:cNvSpPr>
+          <p:nvPr/>
+        </p:nvSpPr>
+        <p:spPr>
+          <a:xfrm xmlns:a="http://schemas.openxmlformats.org/drawingml/2006/main">
+            <a:off x="971550" y="1476375"/>
+            <a:ext cx="9525000" cy="495300"/>
+          </a:xfrm>
+          <a:prstGeom xmlns:a="http://schemas.openxmlformats.org/drawingml/2006/main" prst="rect">
+            <a:avLst/>
+          </a:prstGeom>
+          <a:noFill xmlns:a="http://schemas.openxmlformats.org/drawingml/2006/main"/>
+          <a:ln xmlns:a="http://schemas.openxmlformats.org/drawingml/2006/main" w="0">
+            <a:noFill/>
+          </a:ln>
+        </p:spPr>
+        <p:txBody>
+          <a:bodyPr xmlns:a="http://schemas.openxmlformats.org/drawingml/2006/main" anchor="ctr">
+            <a:normAutofit fontScale="100000"/>
+          </a:bodyPr>
+          <a:lstStyle xmlns:a="http://schemas.openxmlformats.org/drawingml/2006/main"/>
+          <a:p xmlns:a="http://schemas.openxmlformats.org/drawingml/2006/main">
+            <a:pPr>
+              <a:defRPr sz="2250" b="1">
+                <a:solidFill>
+                  <a:srgbClr val="167C80"/>
+                </a:solidFill>
+                <a:latin typeface="Arial"/>
+                <a:ea typeface="Arial"/>
+                <a:cs typeface="Arial"/>
+              </a:defRPr>
+            </a:pPr>
+            <a:r>
+              <a:rPr sz="2250" b="1">
+                <a:solidFill>
+                  <a:srgbClr val="167C80"/>
+                </a:solidFill>
+                <a:latin typeface="Arial"/>
+                <a:ea typeface="Arial"/>
+                <a:cs typeface="Arial"/>
+              </a:rPr>
+              <a:t>Examples from the feature table</a:t>
+            </a:r>
+          </a:p>
+        </p:txBody>
+      </p:sp>
+      <p:sp>
+        <p:nvSpPr>
+          <p:cNvPr id="4" name="">
+            <a:extLst xmlns:a="http://schemas.openxmlformats.org/drawingml/2006/main">
+              <a:ext uri="{FF2B5EF4-FFF2-40B4-BE49-F238E27FC236}">
+                <a16:creationId xmlns:a16="http://schemas.microsoft.com/office/drawing/2014/main" id="{66CAAA7D-ED24-497F-8256-472EFE69A5B8}"/>
+              </a:ext>
+            </a:extLst>
+          </p:cNvPr>
+          <p:cNvSpPr>
+            <a:spLocks xmlns:a="http://schemas.openxmlformats.org/drawingml/2006/main" noGrp="1"/>
+          </p:cNvSpPr>
+          <p:nvPr/>
+        </p:nvSpPr>
+        <p:spPr>
+          <a:xfrm xmlns:a="http://schemas.openxmlformats.org/drawingml/2006/main">
+            <a:off x="1047750" y="2190750"/>
+            <a:ext cx="10001250" cy="1809750"/>
+          </a:xfrm>
+          <a:prstGeom xmlns:a="http://schemas.openxmlformats.org/drawingml/2006/main" prst="rect">
+            <a:avLst/>
+          </a:prstGeom>
+          <a:noFill xmlns:a="http://schemas.openxmlformats.org/drawingml/2006/main"/>
+          <a:ln xmlns:a="http://schemas.openxmlformats.org/drawingml/2006/main" w="0">
+            <a:noFill/>
+          </a:ln>
+        </p:spPr>
+        <p:txBody>
+          <a:bodyPr xmlns:a="http://schemas.openxmlformats.org/drawingml/2006/main" anchor="ctr">
+            <a:normAutofit fontScale="100000"/>
+          </a:bodyPr>
+          <a:lstStyle xmlns:a="http://schemas.openxmlformats.org/drawingml/2006/main"/>
+          <a:p xmlns:a="http://schemas.openxmlformats.org/drawingml/2006/main">
+            <a:pPr>
+              <a:defRPr sz="2025" b="0">
+                <a:solidFill>
+                  <a:srgbClr val="263D4B"/>
+                </a:solidFill>
+                <a:latin typeface="Arial"/>
+                <a:ea typeface="Arial"/>
+                <a:cs typeface="Arial"/>
+              </a:defRPr>
+            </a:pPr>
+            <a:r>
+              <a:rPr sz="2025" b="0">
+                <a:solidFill>
+                  <a:srgbClr val="263D4B"/>
+                </a:solidFill>
+                <a:latin typeface="Arial"/>
+                <a:ea typeface="Arial"/>
+                <a:cs typeface="Arial"/>
+              </a:rPr>
+              <a:t>mean radius   average center-to-edge distance</a:t>
+            </a:r>
+          </a:p>
+          <a:p xmlns:a="http://schemas.openxmlformats.org/drawingml/2006/main">
+            <a:pPr>
+              <a:defRPr sz="2025" b="0">
+                <a:solidFill>
+                  <a:srgbClr val="263D4B"/>
+                </a:solidFill>
+                <a:latin typeface="Arial"/>
+                <a:ea typeface="Arial"/>
+                <a:cs typeface="Arial"/>
+              </a:defRPr>
+            </a:pPr>
+            <a:r>
+              <a:rPr sz="2025" b="0">
+                <a:solidFill>
+                  <a:srgbClr val="263D4B"/>
+                </a:solidFill>
+                <a:latin typeface="Arial"/>
+                <a:ea typeface="Arial"/>
+                <a:cs typeface="Arial"/>
+              </a:rPr>
+              <a:t>mean texture  variation in grayscale intensity</a:t>
+            </a:r>
+          </a:p>
+          <a:p xmlns:a="http://schemas.openxmlformats.org/drawingml/2006/main">
+            <a:pPr>
+              <a:defRPr sz="2025" b="0">
+                <a:solidFill>
+                  <a:srgbClr val="263D4B"/>
+                </a:solidFill>
+                <a:latin typeface="Arial"/>
+                <a:ea typeface="Arial"/>
+                <a:cs typeface="Arial"/>
+              </a:defRPr>
+            </a:pPr>
+            <a:r>
+              <a:rPr sz="2025" b="0">
+                <a:solidFill>
+                  <a:srgbClr val="263D4B"/>
+                </a:solidFill>
+                <a:latin typeface="Arial"/>
+                <a:ea typeface="Arial"/>
+                <a:cs typeface="Arial"/>
+              </a:rPr>
+              <a:t>worst area    extreme area measurement for the sample</a:t>
+            </a:r>
+          </a:p>
+        </p:txBody>
+      </p:sp>
+      <p:sp>
+        <p:nvSpPr>
+          <p:cNvPr id="5" name="">
+            <a:extLst xmlns:a="http://schemas.openxmlformats.org/drawingml/2006/main">
+              <a:ext uri="{FF2B5EF4-FFF2-40B4-BE49-F238E27FC236}">
+                <a16:creationId xmlns:a16="http://schemas.microsoft.com/office/drawing/2014/main" id="{70BBAB56-B6A1-42B7-9EE4-08AB14851893}"/>
+              </a:ext>
+            </a:extLst>
+          </p:cNvPr>
+          <p:cNvSpPr>
+            <a:spLocks xmlns:a="http://schemas.openxmlformats.org/drawingml/2006/main" noGrp="1"/>
+          </p:cNvSpPr>
+          <p:nvPr/>
+        </p:nvSpPr>
+        <p:spPr>
+          <a:xfrm xmlns:a="http://schemas.openxmlformats.org/drawingml/2006/main">
+            <a:off x="1047750" y="4524375"/>
+            <a:ext cx="10096500" cy="666750"/>
+          </a:xfrm>
+          <a:prstGeom xmlns:a="http://schemas.openxmlformats.org/drawingml/2006/main" prst="rect">
+            <a:avLst/>
+          </a:prstGeom>
+          <a:noFill xmlns:a="http://schemas.openxmlformats.org/drawingml/2006/main"/>
+          <a:ln xmlns:a="http://schemas.openxmlformats.org/drawingml/2006/main" w="0">
+            <a:noFill/>
+          </a:ln>
+        </p:spPr>
+        <p:txBody>
+          <a:bodyPr xmlns:a="http://schemas.openxmlformats.org/drawingml/2006/main" anchor="ctr">
+            <a:normAutofit fontScale="100000"/>
+          </a:bodyPr>
+          <a:lstStyle xmlns:a="http://schemas.openxmlformats.org/drawingml/2006/main"/>
+          <a:p xmlns:a="http://schemas.openxmlformats.org/drawingml/2006/main">
+            <a:pPr>
+              <a:defRPr sz="2025" b="1">
+                <a:solidFill>
+                  <a:srgbClr val="163345"/>
+                </a:solidFill>
+                <a:latin typeface="Arial"/>
+                <a:ea typeface="Arial"/>
+                <a:cs typeface="Arial"/>
+              </a:defRPr>
+            </a:pPr>
+            <a:r>
+              <a:rPr sz="2025" b="1">
+                <a:solidFill>
+                  <a:srgbClr val="163345"/>
+                </a:solidFill>
+                <a:latin typeface="Arial"/>
+                <a:ea typeface="Arial"/>
+                <a:cs typeface="Arial"/>
+              </a:rPr>
+              <a:t>10 base measurements × mean, standard error, and worst = 30 features</a:t>
+            </a:r>
+          </a:p>
+        </p:txBody>
+      </p:sp>
+      <p:sp>
+        <p:nvSpPr>
+          <p:cNvPr id="6" name="">
+            <a:extLst xmlns:a="http://schemas.openxmlformats.org/drawingml/2006/main">
+              <a:ext uri="{FF2B5EF4-FFF2-40B4-BE49-F238E27FC236}">
+                <a16:creationId xmlns:a16="http://schemas.microsoft.com/office/drawing/2014/main" id="{67425FBA-CAFC-4CBE-A4E3-FACA0C8BB75B}"/>
+              </a:ext>
+            </a:extLst>
+          </p:cNvPr>
+          <p:cNvSpPr>
+            <a:spLocks xmlns:a="http://schemas.openxmlformats.org/drawingml/2006/main" noGrp="1"/>
+          </p:cNvSpPr>
+          <p:nvPr/>
+        </p:nvSpPr>
+        <p:spPr>
+          <a:xfrm xmlns:a="http://schemas.openxmlformats.org/drawingml/2006/main">
+            <a:off x="1047750" y="5286375"/>
+            <a:ext cx="10096500" cy="457200"/>
+          </a:xfrm>
+          <a:prstGeom xmlns:a="http://schemas.openxmlformats.org/drawingml/2006/main" prst="rect">
+            <a:avLst/>
+          </a:prstGeom>
+          <a:noFill xmlns:a="http://schemas.openxmlformats.org/drawingml/2006/main"/>
+          <a:ln xmlns:a="http://schemas.openxmlformats.org/drawingml/2006/main" w="0">
+            <a:noFill/>
+          </a:ln>
+        </p:spPr>
+        <p:txBody>
+          <a:bodyPr xmlns:a="http://schemas.openxmlformats.org/drawingml/2006/main" anchor="ctr">
+            <a:normAutofit fontScale="100000"/>
+          </a:bodyPr>
+          <a:lstStyle xmlns:a="http://schemas.openxmlformats.org/drawingml/2006/main"/>
+          <a:p xmlns:a="http://schemas.openxmlformats.org/drawingml/2006/main">
+            <a:pPr>
+              <a:defRPr sz="1725" b="0">
+                <a:solidFill>
+                  <a:srgbClr val="B3543C"/>
+                </a:solidFill>
+                <a:latin typeface="Arial"/>
+                <a:ea typeface="Arial"/>
+                <a:cs typeface="Arial"/>
+              </a:defRPr>
+            </a:pPr>
+            <a:r>
+              <a:rPr sz="1725" b="0">
+                <a:solidFill>
+                  <a:srgbClr val="B3543C"/>
+                </a:solidFill>
+                <a:latin typeface="Arial"/>
+                <a:ea typeface="Arial"/>
+                <a:cs typeface="Arial"/>
+              </a:rPr>
+              <a:t>‘Worst’ describes an extreme feature value, not a patient outcome.</a:t>
+            </a:r>
+          </a:p>
+        </p:txBody>
+      </p:sp>
+    </p:spTree>
+    <p:extLst>
+      <p:ext uri="{BB962C8B-B14F-4D97-AF65-F5344CB8AC3E}">
+        <p14:creationId xmlns:p14="http://schemas.microsoft.com/office/powerpoint/2010/main" val="315066381"/>
+      </p:ext>
+    </p:extLst>
+  </p:cSld>
+</p:sld>
+</file>
+
+<file path=ppt/slides/slide13.xml><?xml version="1.0" encoding="utf-8"?>
+<p:sld xmlns:p="http://schemas.openxmlformats.org/presentationml/2006/main">
+  <p:cSld>
+    <p:bg>
+      <p:bgPr>
+        <a:solidFill xmlns:a="http://schemas.openxmlformats.org/drawingml/2006/main">
+          <a:srgbClr val="F7F8F5"/>
+        </a:solidFill>
+      </p:bgPr>
+    </p:bg>
+    <p:spTree>
+      <p:nvGrpSpPr>
+        <p:cNvPr id="1" name=""/>
+        <p:cNvGrpSpPr/>
+        <p:nvPr/>
+      </p:nvGrpSpPr>
+      <p:grpSpPr>
+        <a:xfrm xmlns:a="http://schemas.openxmlformats.org/drawingml/2006/main"/>
+      </p:grpSpPr>
+      <p:sp>
+        <p:nvSpPr>
+          <p:cNvPr id="5" name="">
+            <a:extLst xmlns:a="http://schemas.openxmlformats.org/drawingml/2006/main">
+              <a:ext uri="{FF2B5EF4-FFF2-40B4-BE49-F238E27FC236}">
+                <a16:creationId xmlns:a16="http://schemas.microsoft.com/office/drawing/2014/main" id="{4F73807F-A22F-42C9-9B7A-0E0CEB1D5EB8}"/>
+              </a:ext>
+            </a:extLst>
+          </p:cNvPr>
+          <p:cNvSpPr>
+            <a:spLocks xmlns:a="http://schemas.openxmlformats.org/drawingml/2006/main" noGrp="1"/>
+          </p:cNvSpPr>
+          <p:nvPr/>
+        </p:nvSpPr>
+        <p:spPr>
+          <a:xfrm xmlns:a="http://schemas.openxmlformats.org/drawingml/2006/main">
+            <a:off x="723900" y="457200"/>
+            <a:ext cx="10744200" cy="685800"/>
+          </a:xfrm>
+          <a:prstGeom xmlns:a="http://schemas.openxmlformats.org/drawingml/2006/main" prst="rect">
+            <a:avLst/>
+          </a:prstGeom>
+          <a:noFill xmlns:a="http://schemas.openxmlformats.org/drawingml/2006/main"/>
+          <a:ln xmlns:a="http://schemas.openxmlformats.org/drawingml/2006/main" w="0">
+            <a:noFill/>
+          </a:ln>
+        </p:spPr>
+        <p:txBody>
+          <a:bodyPr xmlns:a="http://schemas.openxmlformats.org/drawingml/2006/main" anchor="ctr">
+            <a:normAutofit fontScale="100000"/>
+          </a:bodyPr>
+          <a:lstStyle xmlns:a="http://schemas.openxmlformats.org/drawingml/2006/main"/>
+          <a:p xmlns:a="http://schemas.openxmlformats.org/drawingml/2006/main">
+            <a:pPr>
+              <a:defRPr sz="3300" b="1">
+                <a:solidFill>
+                  <a:srgbClr val="163345"/>
+                </a:solidFill>
+                <a:latin typeface="Arial"/>
+                <a:ea typeface="Arial"/>
+                <a:cs typeface="Arial"/>
+              </a:defRPr>
+            </a:pPr>
+            <a:r>
+              <a:rPr sz="3300" b="1">
+                <a:solidFill>
+                  <a:srgbClr val="163345"/>
+                </a:solidFill>
+                <a:latin typeface="Arial"/>
+                <a:ea typeface="Arial"/>
+                <a:cs typeface="Arial"/>
+              </a:rPr>
+              <a:t>Code step 1 · load data and define the label</a:t>
+            </a:r>
+          </a:p>
+        </p:txBody>
+      </p:sp>
+      <p:sp>
+        <p:nvSpPr>
+          <p:cNvPr id="2" name="">
+            <a:extLst xmlns:a="http://schemas.openxmlformats.org/drawingml/2006/main">
+              <a:ext uri="{FF2B5EF4-FFF2-40B4-BE49-F238E27FC236}">
+                <a16:creationId xmlns:a16="http://schemas.microsoft.com/office/drawing/2014/main" id="{DB3B4A75-F4F9-42A8-A0A2-C2A825B2ADF3}"/>
+              </a:ext>
+            </a:extLst>
+          </p:cNvPr>
+          <p:cNvSpPr>
+            <a:spLocks xmlns:a="http://schemas.openxmlformats.org/drawingml/2006/main" noGrp="1"/>
+          </p:cNvSpPr>
+          <p:nvPr/>
+        </p:nvSpPr>
+        <p:spPr>
+          <a:xfrm xmlns:a="http://schemas.openxmlformats.org/drawingml/2006/main">
+            <a:off x="11049000" y="5953125"/>
+            <a:ext cx="514350" cy="361950"/>
+          </a:xfrm>
+          <a:prstGeom xmlns:a="http://schemas.openxmlformats.org/drawingml/2006/main" prst="rect">
+            <a:avLst/>
+          </a:prstGeom>
+          <a:noFill xmlns:a="http://schemas.openxmlformats.org/drawingml/2006/main"/>
+          <a:ln xmlns:a="http://schemas.openxmlformats.org/drawingml/2006/main" w="0">
+            <a:noFill/>
+          </a:ln>
+        </p:spPr>
+        <p:txBody>
+          <a:bodyPr xmlns:a="http://schemas.openxmlformats.org/drawingml/2006/main" anchor="ctr">
+            <a:normAutofit fontScale="100000"/>
+          </a:bodyPr>
+          <a:lstStyle xmlns:a="http://schemas.openxmlformats.org/drawingml/2006/main"/>
+          <a:p xmlns:a="http://schemas.openxmlformats.org/drawingml/2006/main">
+            <a:pPr>
+              <a:defRPr sz="1350" b="0">
+                <a:solidFill>
+                  <a:srgbClr val="536A77"/>
+                </a:solidFill>
+                <a:latin typeface="Arial"/>
+                <a:ea typeface="Arial"/>
+                <a:cs typeface="Arial"/>
+              </a:defRPr>
+            </a:pPr>
+            <a:r>
+              <a:rPr sz="1350" b="0">
+                <a:solidFill>
+                  <a:srgbClr val="536A77"/>
+                </a:solidFill>
+                <a:latin typeface="Arial"/>
+                <a:ea typeface="Arial"/>
+                <a:cs typeface="Arial"/>
+              </a:rPr>
+              <a:t>13</a:t>
+            </a:r>
+          </a:p>
+        </p:txBody>
+      </p:sp>
+      <p:sp>
+        <p:nvSpPr>
+          <p:cNvPr id="3" name="">
+            <a:extLst xmlns:a="http://schemas.openxmlformats.org/drawingml/2006/main">
+              <a:ext uri="{FF2B5EF4-FFF2-40B4-BE49-F238E27FC236}">
+                <a16:creationId xmlns:a16="http://schemas.microsoft.com/office/drawing/2014/main" id="{9F26D7E6-474D-461B-B2EE-85554235EBA7}"/>
+              </a:ext>
+            </a:extLst>
+          </p:cNvPr>
+          <p:cNvSpPr>
+            <a:spLocks xmlns:a="http://schemas.openxmlformats.org/drawingml/2006/main" noGrp="1"/>
+          </p:cNvSpPr>
+          <p:nvPr/>
+        </p:nvSpPr>
+        <p:spPr>
+          <a:xfrm xmlns:a="http://schemas.openxmlformats.org/drawingml/2006/main">
+            <a:off x="933450" y="1762125"/>
+            <a:ext cx="10144125" cy="2667000"/>
+          </a:xfrm>
+          <a:prstGeom xmlns:a="http://schemas.openxmlformats.org/drawingml/2006/main" prst="rect">
+            <a:avLst/>
+          </a:prstGeom>
+          <a:solidFill xmlns:a="http://schemas.openxmlformats.org/drawingml/2006/main">
+            <a:srgbClr val="EAF1EF"/>
+          </a:solidFill>
+          <a:ln xmlns:a="http://schemas.openxmlformats.org/drawingml/2006/main" w="0">
+            <a:noFill/>
+          </a:ln>
+        </p:spPr>
+        <p:txBody>
+          <a:bodyPr xmlns:a="http://schemas.openxmlformats.org/drawingml/2006/main" anchor="ctr">
+            <a:normAutofit fontScale="100000"/>
+          </a:bodyPr>
+          <a:lstStyle xmlns:a="http://schemas.openxmlformats.org/drawingml/2006/main"/>
+          <a:p xmlns:a="http://schemas.openxmlformats.org/drawingml/2006/main">
+            <a:pPr>
+              <a:defRPr sz="1650" b="0">
+                <a:solidFill>
+                  <a:srgbClr val="183A43"/>
+                </a:solidFill>
+                <a:latin typeface="Courier New"/>
+                <a:ea typeface="Courier New"/>
+                <a:cs typeface="Courier New"/>
+              </a:defRPr>
+            </a:pPr>
+            <a:r>
+              <a:rPr sz="1650" b="0">
+                <a:solidFill>
+                  <a:srgbClr val="183A43"/>
+                </a:solidFill>
+                <a:latin typeface="Courier New"/>
+                <a:ea typeface="Courier New"/>
+                <a:cs typeface="Courier New"/>
+              </a:rPr>
+              <a:t>data = load_breast_cancer(as_frame=True)</a:t>
+            </a:r>
+          </a:p>
+          <a:p xmlns:a="http://schemas.openxmlformats.org/drawingml/2006/main">
+            <a:pPr>
+              <a:defRPr sz="1650" b="0">
+                <a:solidFill>
+                  <a:srgbClr val="183A43"/>
+                </a:solidFill>
+                <a:latin typeface="Courier New"/>
+                <a:ea typeface="Courier New"/>
+                <a:cs typeface="Courier New"/>
+              </a:defRPr>
+            </a:pPr>
+            <a:r>
+              <a:rPr sz="1650" b="0">
+                <a:solidFill>
+                  <a:srgbClr val="183A43"/>
+                </a:solidFill>
+                <a:latin typeface="Courier New"/>
+                <a:ea typeface="Courier New"/>
+                <a:cs typeface="Courier New"/>
+              </a:rPr>
+              <a:t>X = data.data</a:t>
+            </a:r>
+          </a:p>
+          <a:p xmlns:a="http://schemas.openxmlformats.org/drawingml/2006/main">
+            <a:r>
+              <a:t/>
+            </a:r>
+          </a:p>
+          <a:p xmlns:a="http://schemas.openxmlformats.org/drawingml/2006/main">
+            <a:pPr>
+              <a:defRPr sz="1650" b="0">
+                <a:solidFill>
+                  <a:srgbClr val="183A43"/>
+                </a:solidFill>
+                <a:latin typeface="Courier New"/>
+                <a:ea typeface="Courier New"/>
+                <a:cs typeface="Courier New"/>
+              </a:defRPr>
+            </a:pPr>
+            <a:r>
+              <a:rPr sz="1650" b="0">
+                <a:solidFill>
+                  <a:srgbClr val="183A43"/>
+                </a:solidFill>
+                <a:latin typeface="Courier New"/>
+                <a:ea typeface="Courier New"/>
+                <a:cs typeface="Courier New"/>
+              </a:rPr>
+              <a:t>malignant = list(data.target_names).index("malignant")</a:t>
+            </a:r>
+          </a:p>
+          <a:p xmlns:a="http://schemas.openxmlformats.org/drawingml/2006/main">
+            <a:pPr>
+              <a:defRPr sz="1650" b="0">
+                <a:solidFill>
+                  <a:srgbClr val="183A43"/>
+                </a:solidFill>
+                <a:latin typeface="Courier New"/>
+                <a:ea typeface="Courier New"/>
+                <a:cs typeface="Courier New"/>
+              </a:defRPr>
+            </a:pPr>
+            <a:r>
+              <a:rPr sz="1650" b="0">
+                <a:solidFill>
+                  <a:srgbClr val="183A43"/>
+                </a:solidFill>
+                <a:latin typeface="Courier New"/>
+                <a:ea typeface="Courier New"/>
+                <a:cs typeface="Courier New"/>
+              </a:rPr>
+              <a:t>y = (data.target == malignant).astype(int)</a:t>
+            </a:r>
+          </a:p>
+        </p:txBody>
+      </p:sp>
+      <p:sp>
+        <p:nvSpPr>
+          <p:cNvPr id="4" name="">
+            <a:extLst xmlns:a="http://schemas.openxmlformats.org/drawingml/2006/main">
+              <a:ext uri="{FF2B5EF4-FFF2-40B4-BE49-F238E27FC236}">
+                <a16:creationId xmlns:a16="http://schemas.microsoft.com/office/drawing/2014/main" id="{E4C1725C-A08D-4F55-8B00-D0E0C4245A07}"/>
+              </a:ext>
+            </a:extLst>
+          </p:cNvPr>
+          <p:cNvSpPr>
+            <a:spLocks xmlns:a="http://schemas.openxmlformats.org/drawingml/2006/main" noGrp="1"/>
+          </p:cNvSpPr>
+          <p:nvPr/>
+        </p:nvSpPr>
+        <p:spPr>
+          <a:xfrm xmlns:a="http://schemas.openxmlformats.org/drawingml/2006/main">
+            <a:off x="990600" y="4857750"/>
+            <a:ext cx="10001250" cy="552450"/>
+          </a:xfrm>
+          <a:prstGeom xmlns:a="http://schemas.openxmlformats.org/drawingml/2006/main" prst="rect">
+            <a:avLst/>
+          </a:prstGeom>
+          <a:noFill xmlns:a="http://schemas.openxmlformats.org/drawingml/2006/main"/>
+          <a:ln xmlns:a="http://schemas.openxmlformats.org/drawingml/2006/main" w="0">
+            <a:noFill/>
+          </a:ln>
+        </p:spPr>
+        <p:txBody>
+          <a:bodyPr xmlns:a="http://schemas.openxmlformats.org/drawingml/2006/main" anchor="ctr">
+            <a:normAutofit fontScale="100000"/>
+          </a:bodyPr>
+          <a:lstStyle xmlns:a="http://schemas.openxmlformats.org/drawingml/2006/main"/>
+          <a:p xmlns:a="http://schemas.openxmlformats.org/drawingml/2006/main">
+            <a:pPr>
+              <a:defRPr sz="1875" b="1">
+                <a:solidFill>
+                  <a:srgbClr val="167C80"/>
+                </a:solidFill>
+                <a:latin typeface="Arial"/>
+                <a:ea typeface="Arial"/>
+                <a:cs typeface="Arial"/>
+              </a:defRPr>
+            </a:pPr>
+            <a:r>
+              <a:rPr sz="1875" b="1">
+                <a:solidFill>
+                  <a:srgbClr val="167C80"/>
+                </a:solidFill>
+                <a:latin typeface="Arial"/>
+                <a:ea typeface="Arial"/>
+                <a:cs typeface="Arial"/>
+              </a:rPr>
+              <a:t>X contains 569 rows × 30 features     y = 1 means malignant</a:t>
+            </a:r>
+          </a:p>
+        </p:txBody>
+      </p:sp>
+    </p:spTree>
+    <p:extLst>
+      <p:ext uri="{BB962C8B-B14F-4D97-AF65-F5344CB8AC3E}">
+        <p14:creationId xmlns:p14="http://schemas.microsoft.com/office/powerpoint/2010/main" val="1375952902"/>
+      </p:ext>
+    </p:extLst>
+  </p:cSld>
+</p:sld>
+</file>
+
+<file path=ppt/slides/slide14.xml><?xml version="1.0" encoding="utf-8"?>
+<p:sld xmlns:p="http://schemas.openxmlformats.org/presentationml/2006/main">
+  <p:cSld>
+    <p:bg>
+      <p:bgPr>
+        <a:solidFill xmlns:a="http://schemas.openxmlformats.org/drawingml/2006/main">
+          <a:srgbClr val="F7F8F5"/>
+        </a:solidFill>
+      </p:bgPr>
+    </p:bg>
+    <p:spTree>
+      <p:nvGrpSpPr>
+        <p:cNvPr id="1" name=""/>
+        <p:cNvGrpSpPr/>
+        <p:nvPr/>
+      </p:nvGrpSpPr>
+      <p:grpSpPr>
+        <a:xfrm xmlns:a="http://schemas.openxmlformats.org/drawingml/2006/main"/>
+      </p:grpSpPr>
+      <p:sp>
+        <p:nvSpPr>
+          <p:cNvPr id="5" name="">
+            <a:extLst xmlns:a="http://schemas.openxmlformats.org/drawingml/2006/main">
+              <a:ext uri="{FF2B5EF4-FFF2-40B4-BE49-F238E27FC236}">
+                <a16:creationId xmlns:a16="http://schemas.microsoft.com/office/drawing/2014/main" id="{7759F609-3661-4627-8BF9-D0A7D6700139}"/>
+              </a:ext>
+            </a:extLst>
+          </p:cNvPr>
+          <p:cNvSpPr>
+            <a:spLocks xmlns:a="http://schemas.openxmlformats.org/drawingml/2006/main" noGrp="1"/>
+          </p:cNvSpPr>
+          <p:nvPr/>
+        </p:nvSpPr>
+        <p:spPr>
+          <a:xfrm xmlns:a="http://schemas.openxmlformats.org/drawingml/2006/main">
+            <a:off x="723900" y="457200"/>
+            <a:ext cx="10744200" cy="685800"/>
+          </a:xfrm>
+          <a:prstGeom xmlns:a="http://schemas.openxmlformats.org/drawingml/2006/main" prst="rect">
+            <a:avLst/>
+          </a:prstGeom>
+          <a:noFill xmlns:a="http://schemas.openxmlformats.org/drawingml/2006/main"/>
+          <a:ln xmlns:a="http://schemas.openxmlformats.org/drawingml/2006/main" w="0">
+            <a:noFill/>
+          </a:ln>
+        </p:spPr>
+        <p:txBody>
+          <a:bodyPr xmlns:a="http://schemas.openxmlformats.org/drawingml/2006/main" anchor="ctr">
+            <a:normAutofit fontScale="100000"/>
+          </a:bodyPr>
+          <a:lstStyle xmlns:a="http://schemas.openxmlformats.org/drawingml/2006/main"/>
+          <a:p xmlns:a="http://schemas.openxmlformats.org/drawingml/2006/main">
+            <a:pPr>
+              <a:defRPr sz="3300" b="1">
+                <a:solidFill>
+                  <a:srgbClr val="163345"/>
+                </a:solidFill>
+                <a:latin typeface="Arial"/>
+                <a:ea typeface="Arial"/>
+                <a:cs typeface="Arial"/>
+              </a:defRPr>
+            </a:pPr>
+            <a:r>
+              <a:rPr sz="3300" b="1">
+                <a:solidFill>
+                  <a:srgbClr val="163345"/>
+                </a:solidFill>
+                <a:latin typeface="Arial"/>
+                <a:ea typeface="Arial"/>
+                <a:cs typeface="Arial"/>
+              </a:rPr>
+              <a:t>Code step 2 · split, scale, and fit</a:t>
+            </a:r>
+          </a:p>
+        </p:txBody>
+      </p:sp>
+      <p:sp>
+        <p:nvSpPr>
+          <p:cNvPr id="2" name="">
+            <a:extLst xmlns:a="http://schemas.openxmlformats.org/drawingml/2006/main">
+              <a:ext uri="{FF2B5EF4-FFF2-40B4-BE49-F238E27FC236}">
+                <a16:creationId xmlns:a16="http://schemas.microsoft.com/office/drawing/2014/main" id="{3023DE70-1E2D-4457-A5CA-53A01B7B24A4}"/>
+              </a:ext>
+            </a:extLst>
+          </p:cNvPr>
+          <p:cNvSpPr>
+            <a:spLocks xmlns:a="http://schemas.openxmlformats.org/drawingml/2006/main" noGrp="1"/>
+          </p:cNvSpPr>
+          <p:nvPr/>
+        </p:nvSpPr>
+        <p:spPr>
+          <a:xfrm xmlns:a="http://schemas.openxmlformats.org/drawingml/2006/main">
+            <a:off x="11049000" y="5953125"/>
+            <a:ext cx="514350" cy="361950"/>
+          </a:xfrm>
+          <a:prstGeom xmlns:a="http://schemas.openxmlformats.org/drawingml/2006/main" prst="rect">
+            <a:avLst/>
+          </a:prstGeom>
+          <a:noFill xmlns:a="http://schemas.openxmlformats.org/drawingml/2006/main"/>
+          <a:ln xmlns:a="http://schemas.openxmlformats.org/drawingml/2006/main" w="0">
+            <a:noFill/>
+          </a:ln>
+        </p:spPr>
+        <p:txBody>
+          <a:bodyPr xmlns:a="http://schemas.openxmlformats.org/drawingml/2006/main" anchor="ctr">
+            <a:normAutofit fontScale="100000"/>
+          </a:bodyPr>
+          <a:lstStyle xmlns:a="http://schemas.openxmlformats.org/drawingml/2006/main"/>
+          <a:p xmlns:a="http://schemas.openxmlformats.org/drawingml/2006/main">
+            <a:pPr>
+              <a:defRPr sz="1350" b="0">
+                <a:solidFill>
+                  <a:srgbClr val="536A77"/>
+                </a:solidFill>
+                <a:latin typeface="Arial"/>
+                <a:ea typeface="Arial"/>
+                <a:cs typeface="Arial"/>
+              </a:defRPr>
+            </a:pPr>
+            <a:r>
+              <a:rPr sz="1350" b="0">
+                <a:solidFill>
+                  <a:srgbClr val="536A77"/>
+                </a:solidFill>
+                <a:latin typeface="Arial"/>
+                <a:ea typeface="Arial"/>
+                <a:cs typeface="Arial"/>
+              </a:rPr>
+              <a:t>14</a:t>
+            </a:r>
+          </a:p>
+        </p:txBody>
+      </p:sp>
+      <p:sp>
+        <p:nvSpPr>
+          <p:cNvPr id="3" name="">
+            <a:extLst xmlns:a="http://schemas.openxmlformats.org/drawingml/2006/main">
+              <a:ext uri="{FF2B5EF4-FFF2-40B4-BE49-F238E27FC236}">
+                <a16:creationId xmlns:a16="http://schemas.microsoft.com/office/drawing/2014/main" id="{CE39FFE2-5315-4D84-8B73-FE39AB36C5A9}"/>
+              </a:ext>
+            </a:extLst>
+          </p:cNvPr>
+          <p:cNvSpPr>
+            <a:spLocks xmlns:a="http://schemas.openxmlformats.org/drawingml/2006/main" noGrp="1"/>
+          </p:cNvSpPr>
+          <p:nvPr/>
+        </p:nvSpPr>
+        <p:spPr>
+          <a:xfrm xmlns:a="http://schemas.openxmlformats.org/drawingml/2006/main">
+            <a:off x="933450" y="1476375"/>
+            <a:ext cx="10144125" cy="3762375"/>
+          </a:xfrm>
+          <a:prstGeom xmlns:a="http://schemas.openxmlformats.org/drawingml/2006/main" prst="rect">
+            <a:avLst/>
+          </a:prstGeom>
+          <a:solidFill xmlns:a="http://schemas.openxmlformats.org/drawingml/2006/main">
+            <a:srgbClr val="EAF1EF"/>
+          </a:solidFill>
+          <a:ln xmlns:a="http://schemas.openxmlformats.org/drawingml/2006/main" w="0">
+            <a:noFill/>
+          </a:ln>
+        </p:spPr>
+        <p:txBody>
+          <a:bodyPr xmlns:a="http://schemas.openxmlformats.org/drawingml/2006/main" anchor="ctr">
+            <a:normAutofit fontScale="100000"/>
+          </a:bodyPr>
+          <a:lstStyle xmlns:a="http://schemas.openxmlformats.org/drawingml/2006/main"/>
+          <a:p xmlns:a="http://schemas.openxmlformats.org/drawingml/2006/main">
+            <a:pPr>
+              <a:defRPr sz="1650" b="0">
+                <a:solidFill>
+                  <a:srgbClr val="183A43"/>
+                </a:solidFill>
+                <a:latin typeface="Courier New"/>
+                <a:ea typeface="Courier New"/>
+                <a:cs typeface="Courier New"/>
+              </a:defRPr>
+            </a:pPr>
+            <a:r>
+              <a:rPr sz="1650" b="0">
+                <a:solidFill>
+                  <a:srgbClr val="183A43"/>
+                </a:solidFill>
+                <a:latin typeface="Courier New"/>
+                <a:ea typeface="Courier New"/>
+                <a:cs typeface="Courier New"/>
+              </a:rPr>
+              <a:t>X_train, X_test, y_train, y_test = train_test_split(</a:t>
+            </a:r>
+          </a:p>
+          <a:p xmlns:a="http://schemas.openxmlformats.org/drawingml/2006/main">
+            <a:pPr>
+              <a:defRPr sz="1650" b="0">
+                <a:solidFill>
+                  <a:srgbClr val="183A43"/>
+                </a:solidFill>
+                <a:latin typeface="Courier New"/>
+                <a:ea typeface="Courier New"/>
+                <a:cs typeface="Courier New"/>
+              </a:defRPr>
+            </a:pPr>
+            <a:r>
+              <a:rPr sz="1650" b="0">
+                <a:solidFill>
+                  <a:srgbClr val="183A43"/>
+                </a:solidFill>
+                <a:latin typeface="Courier New"/>
+                <a:ea typeface="Courier New"/>
+                <a:cs typeface="Courier New"/>
+              </a:rPr>
+              <a:t>    X, y, test_size=0.20, stratify=y, random_state=42</a:t>
+            </a:r>
+          </a:p>
+          <a:p xmlns:a="http://schemas.openxmlformats.org/drawingml/2006/main">
+            <a:pPr>
+              <a:defRPr sz="1650" b="0">
+                <a:solidFill>
+                  <a:srgbClr val="183A43"/>
+                </a:solidFill>
+                <a:latin typeface="Courier New"/>
+                <a:ea typeface="Courier New"/>
+                <a:cs typeface="Courier New"/>
+              </a:defRPr>
+            </a:pPr>
+            <a:r>
+              <a:rPr sz="1650" b="0">
+                <a:solidFill>
+                  <a:srgbClr val="183A43"/>
+                </a:solidFill>
+                <a:latin typeface="Courier New"/>
+                <a:ea typeface="Courier New"/>
+                <a:cs typeface="Courier New"/>
+              </a:rPr>
+              <a:t>)</a:t>
+            </a:r>
+          </a:p>
+          <a:p xmlns:a="http://schemas.openxmlformats.org/drawingml/2006/main">
+            <a:r>
+              <a:t/>
+            </a:r>
+          </a:p>
+          <a:p xmlns:a="http://schemas.openxmlformats.org/drawingml/2006/main">
+            <a:pPr>
+              <a:defRPr sz="1650" b="0">
+                <a:solidFill>
+                  <a:srgbClr val="183A43"/>
+                </a:solidFill>
+                <a:latin typeface="Courier New"/>
+                <a:ea typeface="Courier New"/>
+                <a:cs typeface="Courier New"/>
+              </a:defRPr>
+            </a:pPr>
+            <a:r>
+              <a:rPr sz="1650" b="0">
+                <a:solidFill>
+                  <a:srgbClr val="183A43"/>
+                </a:solidFill>
+                <a:latin typeface="Courier New"/>
+                <a:ea typeface="Courier New"/>
+                <a:cs typeface="Courier New"/>
+              </a:rPr>
+              <a:t>model = Pipeline([</a:t>
+            </a:r>
+          </a:p>
+          <a:p xmlns:a="http://schemas.openxmlformats.org/drawingml/2006/main">
+            <a:pPr>
+              <a:defRPr sz="1650" b="0">
+                <a:solidFill>
+                  <a:srgbClr val="183A43"/>
+                </a:solidFill>
+                <a:latin typeface="Courier New"/>
+                <a:ea typeface="Courier New"/>
+                <a:cs typeface="Courier New"/>
+              </a:defRPr>
+            </a:pPr>
+            <a:r>
+              <a:rPr sz="1650" b="0">
+                <a:solidFill>
+                  <a:srgbClr val="183A43"/>
+                </a:solidFill>
+                <a:latin typeface="Courier New"/>
+                <a:ea typeface="Courier New"/>
+                <a:cs typeface="Courier New"/>
+              </a:rPr>
+              <a:t>    ("scale", StandardScaler()),</a:t>
+            </a:r>
+          </a:p>
+          <a:p xmlns:a="http://schemas.openxmlformats.org/drawingml/2006/main">
+            <a:pPr>
+              <a:defRPr sz="1650" b="0">
+                <a:solidFill>
+                  <a:srgbClr val="183A43"/>
+                </a:solidFill>
+                <a:latin typeface="Courier New"/>
+                <a:ea typeface="Courier New"/>
+                <a:cs typeface="Courier New"/>
+              </a:defRPr>
+            </a:pPr>
+            <a:r>
+              <a:rPr sz="1650" b="0">
+                <a:solidFill>
+                  <a:srgbClr val="183A43"/>
+                </a:solidFill>
+                <a:latin typeface="Courier New"/>
+                <a:ea typeface="Courier New"/>
+                <a:cs typeface="Courier New"/>
+              </a:rPr>
+              <a:t>    ("classifier", LogisticRegression(max_iter=5000))</a:t>
+            </a:r>
+          </a:p>
+          <a:p xmlns:a="http://schemas.openxmlformats.org/drawingml/2006/main">
+            <a:pPr>
+              <a:defRPr sz="1650" b="0">
+                <a:solidFill>
+                  <a:srgbClr val="183A43"/>
+                </a:solidFill>
+                <a:latin typeface="Courier New"/>
+                <a:ea typeface="Courier New"/>
+                <a:cs typeface="Courier New"/>
+              </a:defRPr>
+            </a:pPr>
+            <a:r>
+              <a:rPr sz="1650" b="0">
+                <a:solidFill>
+                  <a:srgbClr val="183A43"/>
+                </a:solidFill>
+                <a:latin typeface="Courier New"/>
+                <a:ea typeface="Courier New"/>
+                <a:cs typeface="Courier New"/>
+              </a:rPr>
+              <a:t>])</a:t>
+            </a:r>
+          </a:p>
+          <a:p xmlns:a="http://schemas.openxmlformats.org/drawingml/2006/main">
+            <a:pPr>
+              <a:defRPr sz="1650" b="0">
+                <a:solidFill>
+                  <a:srgbClr val="183A43"/>
+                </a:solidFill>
+                <a:latin typeface="Courier New"/>
+                <a:ea typeface="Courier New"/>
+                <a:cs typeface="Courier New"/>
+              </a:defRPr>
+            </a:pPr>
+            <a:r>
+              <a:rPr sz="1650" b="0">
+                <a:solidFill>
+                  <a:srgbClr val="183A43"/>
+                </a:solidFill>
+                <a:latin typeface="Courier New"/>
+                <a:ea typeface="Courier New"/>
+                <a:cs typeface="Courier New"/>
+              </a:rPr>
+              <a:t>model.fit(X_train, y_train)</a:t>
+            </a:r>
+          </a:p>
+        </p:txBody>
+      </p:sp>
+      <p:sp>
+        <p:nvSpPr>
+          <p:cNvPr id="4" name="">
+            <a:extLst xmlns:a="http://schemas.openxmlformats.org/drawingml/2006/main">
+              <a:ext uri="{FF2B5EF4-FFF2-40B4-BE49-F238E27FC236}">
+                <a16:creationId xmlns:a16="http://schemas.microsoft.com/office/drawing/2014/main" id="{61B6D314-42CD-4F45-8B30-DD1677766F4E}"/>
+              </a:ext>
+            </a:extLst>
+          </p:cNvPr>
+          <p:cNvSpPr>
+            <a:spLocks xmlns:a="http://schemas.openxmlformats.org/drawingml/2006/main" noGrp="1"/>
+          </p:cNvSpPr>
+          <p:nvPr/>
+        </p:nvSpPr>
+        <p:spPr>
+          <a:xfrm xmlns:a="http://schemas.openxmlformats.org/drawingml/2006/main">
+            <a:off x="990600" y="5410200"/>
+            <a:ext cx="10191750" cy="457200"/>
+          </a:xfrm>
+          <a:prstGeom xmlns:a="http://schemas.openxmlformats.org/drawingml/2006/main" prst="rect">
+            <a:avLst/>
+          </a:prstGeom>
+          <a:noFill xmlns:a="http://schemas.openxmlformats.org/drawingml/2006/main"/>
+          <a:ln xmlns:a="http://schemas.openxmlformats.org/drawingml/2006/main" w="0">
+            <a:noFill/>
+          </a:ln>
+        </p:spPr>
+        <p:txBody>
+          <a:bodyPr xmlns:a="http://schemas.openxmlformats.org/drawingml/2006/main" anchor="ctr">
+            <a:normAutofit fontScale="100000"/>
+          </a:bodyPr>
+          <a:lstStyle xmlns:a="http://schemas.openxmlformats.org/drawingml/2006/main"/>
+          <a:p xmlns:a="http://schemas.openxmlformats.org/drawingml/2006/main">
+            <a:pPr>
+              <a:defRPr sz="1650" b="1">
+                <a:solidFill>
+                  <a:srgbClr val="167C80"/>
+                </a:solidFill>
+                <a:latin typeface="Arial"/>
+                <a:ea typeface="Arial"/>
+                <a:cs typeface="Arial"/>
+              </a:defRPr>
+            </a:pPr>
+            <a:r>
+              <a:rPr sz="1650" b="1">
+                <a:solidFill>
+                  <a:srgbClr val="167C80"/>
+                </a:solidFill>
+                <a:latin typeface="Arial"/>
+                <a:ea typeface="Arial"/>
+                <a:cs typeface="Arial"/>
+              </a:rPr>
+              <a:t>455 training samples  ·  114 test samples  ·  preprocessing is learned on train only</a:t>
+            </a:r>
+          </a:p>
+        </p:txBody>
+      </p:sp>
+    </p:spTree>
+    <p:extLst>
+      <p:ext uri="{BB962C8B-B14F-4D97-AF65-F5344CB8AC3E}">
+        <p14:creationId xmlns:p14="http://schemas.microsoft.com/office/powerpoint/2010/main" val="1541283381"/>
+      </p:ext>
+    </p:extLst>
+  </p:cSld>
+</p:sld>
+</file>
+
+<file path=ppt/slides/slide15.xml><?xml version="1.0" encoding="utf-8"?>
+<p:sld xmlns:p="http://schemas.openxmlformats.org/presentationml/2006/main">
+  <p:cSld>
+    <p:bg>
+      <p:bgPr>
+        <a:solidFill xmlns:a="http://schemas.openxmlformats.org/drawingml/2006/main">
+          <a:srgbClr val="F7F8F5"/>
+        </a:solidFill>
+      </p:bgPr>
+    </p:bg>
+    <p:spTree>
+      <p:nvGrpSpPr>
+        <p:cNvPr id="1" name=""/>
+        <p:cNvGrpSpPr/>
+        <p:nvPr/>
+      </p:nvGrpSpPr>
+      <p:grpSpPr>
+        <a:xfrm xmlns:a="http://schemas.openxmlformats.org/drawingml/2006/main"/>
+      </p:grpSpPr>
+      <p:sp>
+        <p:nvSpPr>
+          <p:cNvPr id="5" name="">
+            <a:extLst xmlns:a="http://schemas.openxmlformats.org/drawingml/2006/main">
+              <a:ext uri="{FF2B5EF4-FFF2-40B4-BE49-F238E27FC236}">
+                <a16:creationId xmlns:a16="http://schemas.microsoft.com/office/drawing/2014/main" id="{8C679447-6423-4D24-96BE-D66B8C812484}"/>
+              </a:ext>
+            </a:extLst>
+          </p:cNvPr>
+          <p:cNvSpPr>
+            <a:spLocks xmlns:a="http://schemas.openxmlformats.org/drawingml/2006/main" noGrp="1"/>
+          </p:cNvSpPr>
+          <p:nvPr/>
+        </p:nvSpPr>
+        <p:spPr>
+          <a:xfrm xmlns:a="http://schemas.openxmlformats.org/drawingml/2006/main">
+            <a:off x="723900" y="457200"/>
+            <a:ext cx="10744200" cy="685800"/>
+          </a:xfrm>
+          <a:prstGeom xmlns:a="http://schemas.openxmlformats.org/drawingml/2006/main" prst="rect">
+            <a:avLst/>
+          </a:prstGeom>
+          <a:noFill xmlns:a="http://schemas.openxmlformats.org/drawingml/2006/main"/>
+          <a:ln xmlns:a="http://schemas.openxmlformats.org/drawingml/2006/main" w="0">
+            <a:noFill/>
+          </a:ln>
+        </p:spPr>
+        <p:txBody>
+          <a:bodyPr xmlns:a="http://schemas.openxmlformats.org/drawingml/2006/main" anchor="ctr">
+            <a:normAutofit fontScale="100000"/>
+          </a:bodyPr>
+          <a:lstStyle xmlns:a="http://schemas.openxmlformats.org/drawingml/2006/main"/>
+          <a:p xmlns:a="http://schemas.openxmlformats.org/drawingml/2006/main">
+            <a:pPr>
+              <a:defRPr sz="3300" b="1">
+                <a:solidFill>
+                  <a:srgbClr val="163345"/>
+                </a:solidFill>
+                <a:latin typeface="Arial"/>
+                <a:ea typeface="Arial"/>
+                <a:cs typeface="Arial"/>
+              </a:defRPr>
+            </a:pPr>
+            <a:r>
+              <a:rPr sz="3300" b="1">
+                <a:solidFill>
+                  <a:srgbClr val="163345"/>
+                </a:solidFill>
+                <a:latin typeface="Arial"/>
+                <a:ea typeface="Arial"/>
+                <a:cs typeface="Arial"/>
+              </a:rPr>
+              <a:t>Code step 3 · score and count errors</a:t>
+            </a:r>
+          </a:p>
+        </p:txBody>
+      </p:sp>
+      <p:sp>
+        <p:nvSpPr>
+          <p:cNvPr id="2" name="">
+            <a:extLst xmlns:a="http://schemas.openxmlformats.org/drawingml/2006/main">
+              <a:ext uri="{FF2B5EF4-FFF2-40B4-BE49-F238E27FC236}">
+                <a16:creationId xmlns:a16="http://schemas.microsoft.com/office/drawing/2014/main" id="{399E1AD2-CF07-444C-B8B1-BF29AECCB30B}"/>
+              </a:ext>
+            </a:extLst>
+          </p:cNvPr>
+          <p:cNvSpPr>
+            <a:spLocks xmlns:a="http://schemas.openxmlformats.org/drawingml/2006/main" noGrp="1"/>
+          </p:cNvSpPr>
+          <p:nvPr/>
+        </p:nvSpPr>
+        <p:spPr>
+          <a:xfrm xmlns:a="http://schemas.openxmlformats.org/drawingml/2006/main">
+            <a:off x="11049000" y="5953125"/>
+            <a:ext cx="514350" cy="361950"/>
+          </a:xfrm>
+          <a:prstGeom xmlns:a="http://schemas.openxmlformats.org/drawingml/2006/main" prst="rect">
+            <a:avLst/>
+          </a:prstGeom>
+          <a:noFill xmlns:a="http://schemas.openxmlformats.org/drawingml/2006/main"/>
+          <a:ln xmlns:a="http://schemas.openxmlformats.org/drawingml/2006/main" w="0">
+            <a:noFill/>
+          </a:ln>
+        </p:spPr>
+        <p:txBody>
+          <a:bodyPr xmlns:a="http://schemas.openxmlformats.org/drawingml/2006/main" anchor="ctr">
+            <a:normAutofit fontScale="100000"/>
+          </a:bodyPr>
+          <a:lstStyle xmlns:a="http://schemas.openxmlformats.org/drawingml/2006/main"/>
+          <a:p xmlns:a="http://schemas.openxmlformats.org/drawingml/2006/main">
+            <a:pPr>
+              <a:defRPr sz="1350" b="0">
+                <a:solidFill>
+                  <a:srgbClr val="536A77"/>
+                </a:solidFill>
+                <a:latin typeface="Arial"/>
+                <a:ea typeface="Arial"/>
+                <a:cs typeface="Arial"/>
+              </a:defRPr>
+            </a:pPr>
+            <a:r>
+              <a:rPr sz="1350" b="0">
+                <a:solidFill>
+                  <a:srgbClr val="536A77"/>
+                </a:solidFill>
+                <a:latin typeface="Arial"/>
+                <a:ea typeface="Arial"/>
+                <a:cs typeface="Arial"/>
+              </a:rPr>
+              <a:t>15</a:t>
+            </a:r>
+          </a:p>
+        </p:txBody>
+      </p:sp>
+      <p:sp>
+        <p:nvSpPr>
+          <p:cNvPr id="3" name="">
+            <a:extLst xmlns:a="http://schemas.openxmlformats.org/drawingml/2006/main">
+              <a:ext uri="{FF2B5EF4-FFF2-40B4-BE49-F238E27FC236}">
+                <a16:creationId xmlns:a16="http://schemas.microsoft.com/office/drawing/2014/main" id="{E16B5D8C-25D9-43FF-92F5-EC977F21496E}"/>
+              </a:ext>
+            </a:extLst>
+          </p:cNvPr>
+          <p:cNvSpPr>
+            <a:spLocks xmlns:a="http://schemas.openxmlformats.org/drawingml/2006/main" noGrp="1"/>
+          </p:cNvSpPr>
+          <p:nvPr/>
+        </p:nvSpPr>
+        <p:spPr>
+          <a:xfrm xmlns:a="http://schemas.openxmlformats.org/drawingml/2006/main">
+            <a:off x="933450" y="1666875"/>
+            <a:ext cx="10144125" cy="2857500"/>
+          </a:xfrm>
+          <a:prstGeom xmlns:a="http://schemas.openxmlformats.org/drawingml/2006/main" prst="rect">
+            <a:avLst/>
+          </a:prstGeom>
+          <a:solidFill xmlns:a="http://schemas.openxmlformats.org/drawingml/2006/main">
+            <a:srgbClr val="EAF1EF"/>
+          </a:solidFill>
+          <a:ln xmlns:a="http://schemas.openxmlformats.org/drawingml/2006/main" w="0">
+            <a:noFill/>
+          </a:ln>
+        </p:spPr>
+        <p:txBody>
+          <a:bodyPr xmlns:a="http://schemas.openxmlformats.org/drawingml/2006/main" anchor="ctr">
+            <a:normAutofit fontScale="100000"/>
+          </a:bodyPr>
+          <a:lstStyle xmlns:a="http://schemas.openxmlformats.org/drawingml/2006/main"/>
+          <a:p xmlns:a="http://schemas.openxmlformats.org/drawingml/2006/main">
+            <a:pPr>
+              <a:defRPr sz="1650" b="0">
+                <a:solidFill>
+                  <a:srgbClr val="183A43"/>
+                </a:solidFill>
+                <a:latin typeface="Courier New"/>
+                <a:ea typeface="Courier New"/>
+                <a:cs typeface="Courier New"/>
+              </a:defRPr>
+            </a:pPr>
+            <a:r>
+              <a:rPr sz="1650" b="0">
+                <a:solidFill>
+                  <a:srgbClr val="183A43"/>
+                </a:solidFill>
+                <a:latin typeface="Courier New"/>
+                <a:ea typeface="Courier New"/>
+                <a:cs typeface="Courier New"/>
+              </a:rPr>
+              <a:t>p_malignant = model.predict_proba(X_test)[:, 1]</a:t>
+            </a:r>
+          </a:p>
+          <a:p xmlns:a="http://schemas.openxmlformats.org/drawingml/2006/main">
+            <a:pPr>
+              <a:defRPr sz="1650" b="0">
+                <a:solidFill>
+                  <a:srgbClr val="183A43"/>
+                </a:solidFill>
+                <a:latin typeface="Courier New"/>
+                <a:ea typeface="Courier New"/>
+                <a:cs typeface="Courier New"/>
+              </a:defRPr>
+            </a:pPr>
+            <a:r>
+              <a:rPr sz="1650" b="0">
+                <a:solidFill>
+                  <a:srgbClr val="183A43"/>
+                </a:solidFill>
+                <a:latin typeface="Courier New"/>
+                <a:ea typeface="Courier New"/>
+                <a:cs typeface="Courier New"/>
+              </a:rPr>
+              <a:t>predicted = (p_malignant &gt;= 0.50).astype(int)</a:t>
+            </a:r>
+          </a:p>
+          <a:p xmlns:a="http://schemas.openxmlformats.org/drawingml/2006/main">
+            <a:r>
+              <a:t/>
+            </a:r>
+          </a:p>
+          <a:p xmlns:a="http://schemas.openxmlformats.org/drawingml/2006/main">
+            <a:pPr>
+              <a:defRPr sz="1650" b="0">
+                <a:solidFill>
+                  <a:srgbClr val="183A43"/>
+                </a:solidFill>
+                <a:latin typeface="Courier New"/>
+                <a:ea typeface="Courier New"/>
+                <a:cs typeface="Courier New"/>
+              </a:defRPr>
+            </a:pPr>
+            <a:r>
+              <a:rPr sz="1650" b="0">
+                <a:solidFill>
+                  <a:srgbClr val="183A43"/>
+                </a:solidFill>
+                <a:latin typeface="Courier New"/>
+                <a:ea typeface="Courier New"/>
+                <a:cs typeface="Courier New"/>
+              </a:rPr>
+              <a:t>tn, fp, fn, tp = confusion_matrix(</a:t>
+            </a:r>
+          </a:p>
+          <a:p xmlns:a="http://schemas.openxmlformats.org/drawingml/2006/main">
+            <a:pPr>
+              <a:defRPr sz="1650" b="0">
+                <a:solidFill>
+                  <a:srgbClr val="183A43"/>
+                </a:solidFill>
+                <a:latin typeface="Courier New"/>
+                <a:ea typeface="Courier New"/>
+                <a:cs typeface="Courier New"/>
+              </a:defRPr>
+            </a:pPr>
+            <a:r>
+              <a:rPr sz="1650" b="0">
+                <a:solidFill>
+                  <a:srgbClr val="183A43"/>
+                </a:solidFill>
+                <a:latin typeface="Courier New"/>
+                <a:ea typeface="Courier New"/>
+                <a:cs typeface="Courier New"/>
+              </a:rPr>
+              <a:t>    y_test, predicted, labels=[0, 1]</a:t>
+            </a:r>
+          </a:p>
+          <a:p xmlns:a="http://schemas.openxmlformats.org/drawingml/2006/main">
+            <a:pPr>
+              <a:defRPr sz="1650" b="0">
+                <a:solidFill>
+                  <a:srgbClr val="183A43"/>
+                </a:solidFill>
+                <a:latin typeface="Courier New"/>
+                <a:ea typeface="Courier New"/>
+                <a:cs typeface="Courier New"/>
+              </a:defRPr>
+            </a:pPr>
+            <a:r>
+              <a:rPr sz="1650" b="0">
+                <a:solidFill>
+                  <a:srgbClr val="183A43"/>
+                </a:solidFill>
+                <a:latin typeface="Courier New"/>
+                <a:ea typeface="Courier New"/>
+                <a:cs typeface="Courier New"/>
+              </a:rPr>
+              <a:t>).ravel()</a:t>
+            </a:r>
+          </a:p>
+        </p:txBody>
+      </p:sp>
+      <p:sp>
+        <p:nvSpPr>
+          <p:cNvPr id="4" name="">
+            <a:extLst xmlns:a="http://schemas.openxmlformats.org/drawingml/2006/main">
+              <a:ext uri="{FF2B5EF4-FFF2-40B4-BE49-F238E27FC236}">
+                <a16:creationId xmlns:a16="http://schemas.microsoft.com/office/drawing/2014/main" id="{E65C3324-1E76-4CE6-8FE9-DB0CDCCD0940}"/>
+              </a:ext>
+            </a:extLst>
+          </p:cNvPr>
+          <p:cNvSpPr>
+            <a:spLocks xmlns:a="http://schemas.openxmlformats.org/drawingml/2006/main" noGrp="1"/>
+          </p:cNvSpPr>
+          <p:nvPr/>
+        </p:nvSpPr>
+        <p:spPr>
+          <a:xfrm xmlns:a="http://schemas.openxmlformats.org/drawingml/2006/main">
+            <a:off x="1047750" y="4857750"/>
+            <a:ext cx="10001250" cy="619125"/>
+          </a:xfrm>
+          <a:prstGeom xmlns:a="http://schemas.openxmlformats.org/drawingml/2006/main" prst="rect">
+            <a:avLst/>
+          </a:prstGeom>
+          <a:noFill xmlns:a="http://schemas.openxmlformats.org/drawingml/2006/main"/>
+          <a:ln xmlns:a="http://schemas.openxmlformats.org/drawingml/2006/main" w="0">
+            <a:noFill/>
+          </a:ln>
+        </p:spPr>
+        <p:txBody>
+          <a:bodyPr xmlns:a="http://schemas.openxmlformats.org/drawingml/2006/main" anchor="ctr">
+            <a:normAutofit fontScale="100000"/>
+          </a:bodyPr>
+          <a:lstStyle xmlns:a="http://schemas.openxmlformats.org/drawingml/2006/main"/>
+          <a:p xmlns:a="http://schemas.openxmlformats.org/drawingml/2006/main">
+            <a:pPr>
+              <a:defRPr sz="2025" b="1">
+                <a:solidFill>
+                  <a:srgbClr val="167C80"/>
+                </a:solidFill>
+                <a:latin typeface="Arial"/>
+                <a:ea typeface="Arial"/>
+                <a:cs typeface="Arial"/>
+              </a:defRPr>
+            </a:pPr>
+            <a:r>
+              <a:rPr sz="2025" b="1">
+                <a:solidFill>
+                  <a:srgbClr val="167C80"/>
+                </a:solidFill>
+                <a:latin typeface="Arial"/>
+                <a:ea typeface="Arial"/>
+                <a:cs typeface="Arial"/>
+              </a:rPr>
+              <a:t>Sensitivity = TP / (TP + FN)       Specificity = TN / (TN + FP)</a:t>
+            </a:r>
+          </a:p>
+        </p:txBody>
+      </p:sp>
+    </p:spTree>
+    <p:extLst>
+      <p:ext uri="{BB962C8B-B14F-4D97-AF65-F5344CB8AC3E}">
+        <p14:creationId xmlns:p14="http://schemas.microsoft.com/office/powerpoint/2010/main" val="904014200"/>
+      </p:ext>
+    </p:extLst>
+  </p:cSld>
+</p:sld>
+</file>
+
+<file path=ppt/slides/slide16.xml><?xml version="1.0" encoding="utf-8"?>
+<p:sld xmlns:p="http://schemas.openxmlformats.org/presentationml/2006/main">
+  <p:cSld>
+    <p:bg>
+      <p:bgPr>
+        <a:solidFill xmlns:a="http://schemas.openxmlformats.org/drawingml/2006/main">
+          <a:srgbClr val="F7F8F5"/>
+        </a:solidFill>
+      </p:bgPr>
+    </p:bg>
+    <p:spTree>
+      <p:nvGrpSpPr>
+        <p:cNvPr id="1" name=""/>
+        <p:cNvGrpSpPr/>
+        <p:nvPr/>
+      </p:nvGrpSpPr>
+      <p:grpSpPr>
+        <a:xfrm xmlns:a="http://schemas.openxmlformats.org/drawingml/2006/main"/>
+      </p:grpSpPr>
+      <p:sp>
+        <p:nvSpPr>
+          <p:cNvPr id="8" name="">
+            <a:extLst xmlns:a="http://schemas.openxmlformats.org/drawingml/2006/main">
+              <a:ext uri="{FF2B5EF4-FFF2-40B4-BE49-F238E27FC236}">
+                <a16:creationId xmlns:a16="http://schemas.microsoft.com/office/drawing/2014/main" id="{A06B7B47-F037-4BED-AB17-2EAB796AFD9A}"/>
+              </a:ext>
+            </a:extLst>
+          </p:cNvPr>
+          <p:cNvSpPr>
+            <a:spLocks xmlns:a="http://schemas.openxmlformats.org/drawingml/2006/main" noGrp="1"/>
+          </p:cNvSpPr>
+          <p:nvPr/>
+        </p:nvSpPr>
+        <p:spPr>
+          <a:xfrm xmlns:a="http://schemas.openxmlformats.org/drawingml/2006/main">
+            <a:off x="723900" y="457200"/>
+            <a:ext cx="10744200" cy="685800"/>
+          </a:xfrm>
+          <a:prstGeom xmlns:a="http://schemas.openxmlformats.org/drawingml/2006/main" prst="rect">
+            <a:avLst/>
+          </a:prstGeom>
+          <a:noFill xmlns:a="http://schemas.openxmlformats.org/drawingml/2006/main"/>
+          <a:ln xmlns:a="http://schemas.openxmlformats.org/drawingml/2006/main" w="0">
+            <a:noFill/>
+          </a:ln>
+        </p:spPr>
+        <p:txBody>
+          <a:bodyPr xmlns:a="http://schemas.openxmlformats.org/drawingml/2006/main" anchor="ctr">
+            <a:normAutofit fontScale="100000"/>
+          </a:bodyPr>
+          <a:lstStyle xmlns:a="http://schemas.openxmlformats.org/drawingml/2006/main"/>
+          <a:p xmlns:a="http://schemas.openxmlformats.org/drawingml/2006/main">
+            <a:pPr>
+              <a:defRPr sz="3300" b="1">
+                <a:solidFill>
+                  <a:srgbClr val="163345"/>
+                </a:solidFill>
+                <a:latin typeface="Arial"/>
+                <a:ea typeface="Arial"/>
+                <a:cs typeface="Arial"/>
+              </a:defRPr>
+            </a:pPr>
+            <a:r>
+              <a:rPr sz="3300" b="1">
+                <a:solidFill>
+                  <a:srgbClr val="163345"/>
+                </a:solidFill>
+                <a:latin typeface="Arial"/>
+                <a:ea typeface="Arial"/>
+                <a:cs typeface="Arial"/>
+              </a:rPr>
+              <a:t>Held-out results · counts and ranking</a:t>
+            </a:r>
+          </a:p>
+        </p:txBody>
+      </p:sp>
+      <p:sp>
+        <p:nvSpPr>
+          <p:cNvPr id="2" name="">
+            <a:extLst xmlns:a="http://schemas.openxmlformats.org/drawingml/2006/main">
+              <a:ext uri="{FF2B5EF4-FFF2-40B4-BE49-F238E27FC236}">
+                <a16:creationId xmlns:a16="http://schemas.microsoft.com/office/drawing/2014/main" id="{ABA3DE95-4AA8-429F-9538-B859E169F424}"/>
+              </a:ext>
+            </a:extLst>
+          </p:cNvPr>
+          <p:cNvSpPr>
+            <a:spLocks xmlns:a="http://schemas.openxmlformats.org/drawingml/2006/main" noGrp="1"/>
+          </p:cNvSpPr>
+          <p:nvPr/>
+        </p:nvSpPr>
+        <p:spPr>
+          <a:xfrm xmlns:a="http://schemas.openxmlformats.org/drawingml/2006/main">
+            <a:off x="11049000" y="5953125"/>
+            <a:ext cx="514350" cy="361950"/>
+          </a:xfrm>
+          <a:prstGeom xmlns:a="http://schemas.openxmlformats.org/drawingml/2006/main" prst="rect">
+            <a:avLst/>
+          </a:prstGeom>
+          <a:noFill xmlns:a="http://schemas.openxmlformats.org/drawingml/2006/main"/>
+          <a:ln xmlns:a="http://schemas.openxmlformats.org/drawingml/2006/main" w="0">
+            <a:noFill/>
+          </a:ln>
+        </p:spPr>
+        <p:txBody>
+          <a:bodyPr xmlns:a="http://schemas.openxmlformats.org/drawingml/2006/main" anchor="ctr">
+            <a:normAutofit fontScale="100000"/>
+          </a:bodyPr>
+          <a:lstStyle xmlns:a="http://schemas.openxmlformats.org/drawingml/2006/main"/>
+          <a:p xmlns:a="http://schemas.openxmlformats.org/drawingml/2006/main">
+            <a:pPr>
+              <a:defRPr sz="1350" b="0">
+                <a:solidFill>
+                  <a:srgbClr val="536A77"/>
+                </a:solidFill>
+                <a:latin typeface="Arial"/>
+                <a:ea typeface="Arial"/>
+                <a:cs typeface="Arial"/>
+              </a:defRPr>
+            </a:pPr>
+            <a:r>
+              <a:rPr sz="1350" b="0">
+                <a:solidFill>
+                  <a:srgbClr val="536A77"/>
+                </a:solidFill>
+                <a:latin typeface="Arial"/>
+                <a:ea typeface="Arial"/>
+                <a:cs typeface="Arial"/>
+              </a:rPr>
+              <a:t>16</a:t>
+            </a:r>
+          </a:p>
+        </p:txBody>
+      </p:sp>
+      <p:sp>
+        <p:nvSpPr>
+          <p:cNvPr id="3" name="">
+            <a:extLst xmlns:a="http://schemas.openxmlformats.org/drawingml/2006/main">
+              <a:ext uri="{FF2B5EF4-FFF2-40B4-BE49-F238E27FC236}">
+                <a16:creationId xmlns:a16="http://schemas.microsoft.com/office/drawing/2014/main" id="{BA06092D-6D2A-4762-957E-937DC8A105B1}"/>
+              </a:ext>
+            </a:extLst>
+          </p:cNvPr>
+          <p:cNvSpPr>
+            <a:spLocks xmlns:a="http://schemas.openxmlformats.org/drawingml/2006/main" noGrp="1"/>
+          </p:cNvSpPr>
+          <p:nvPr/>
+        </p:nvSpPr>
+        <p:spPr>
+          <a:xfrm xmlns:a="http://schemas.openxmlformats.org/drawingml/2006/main">
+            <a:off x="838200" y="1381125"/>
+            <a:ext cx="6381750" cy="400050"/>
+          </a:xfrm>
+          <a:prstGeom xmlns:a="http://schemas.openxmlformats.org/drawingml/2006/main" prst="rect">
+            <a:avLst/>
+          </a:prstGeom>
+          <a:noFill xmlns:a="http://schemas.openxmlformats.org/drawingml/2006/main"/>
+          <a:ln xmlns:a="http://schemas.openxmlformats.org/drawingml/2006/main" w="0">
+            <a:noFill/>
+          </a:ln>
+        </p:spPr>
+        <p:txBody>
+          <a:bodyPr xmlns:a="http://schemas.openxmlformats.org/drawingml/2006/main" anchor="ctr">
+            <a:normAutofit fontScale="100000"/>
+          </a:bodyPr>
+          <a:lstStyle xmlns:a="http://schemas.openxmlformats.org/drawingml/2006/main"/>
+          <a:p xmlns:a="http://schemas.openxmlformats.org/drawingml/2006/main">
+            <a:pPr>
+              <a:defRPr sz="1950" b="1">
+                <a:solidFill>
+                  <a:srgbClr val="163345"/>
+                </a:solidFill>
+                <a:latin typeface="Arial"/>
+                <a:ea typeface="Arial"/>
+                <a:cs typeface="Arial"/>
+              </a:defRPr>
+            </a:pPr>
+            <a:r>
+              <a:rPr sz="1950" b="1">
+                <a:solidFill>
+                  <a:srgbClr val="163345"/>
+                </a:solidFill>
+                <a:latin typeface="Arial"/>
+                <a:ea typeface="Arial"/>
+                <a:cs typeface="Arial"/>
+              </a:rPr>
+              <a:t>ROC curve · test-set AUC = 0.996</a:t>
+            </a:r>
+          </a:p>
+        </p:txBody>
+      </p:sp>
+      <p:graphicFrame>
+        <p:nvGraphicFramePr>
+          <p:cNvPr id="11" name="Chart"/>
+          <p:cNvGraphicFramePr/>
+          <p:nvPr/>
+        </p:nvGraphicFramePr>
+        <p:xfrm>
+          <a:off xmlns:a="http://schemas.openxmlformats.org/drawingml/2006/main" x="762000" y="1809750"/>
+          <a:ext xmlns:a="http://schemas.openxmlformats.org/drawingml/2006/main" cx="6477000" cy="3714750"/>
+        </p:xfrm>
+        <a:graphic xmlns:a="http://schemas.openxmlformats.org/drawingml/2006/main">
+          <a:graphicData uri="http://schemas.openxmlformats.org/drawingml/2006/chart">
+            <c:chart xmlns:r="http://schemas.openxmlformats.org/officeDocument/2006/relationships" xmlns:c="http://schemas.openxmlformats.org/drawingml/2006/chart" r:id="R684d15370806498f"/>
+          </a:graphicData>
+        </a:graphic>
+      </p:graphicFrame>
+      <p:sp>
+        <p:nvSpPr>
+          <p:cNvPr id="5" name="">
+            <a:extLst xmlns:a="http://schemas.openxmlformats.org/drawingml/2006/main">
+              <a:ext uri="{FF2B5EF4-FFF2-40B4-BE49-F238E27FC236}">
+                <a16:creationId xmlns:a16="http://schemas.microsoft.com/office/drawing/2014/main" id="{A7D3A2B3-2051-411A-ADBB-DBCF347375B0}"/>
+              </a:ext>
+            </a:extLst>
+          </p:cNvPr>
+          <p:cNvSpPr>
+            <a:spLocks xmlns:a="http://schemas.openxmlformats.org/drawingml/2006/main" noGrp="1"/>
+          </p:cNvSpPr>
+          <p:nvPr/>
+        </p:nvSpPr>
+        <p:spPr>
+          <a:xfrm xmlns:a="http://schemas.openxmlformats.org/drawingml/2006/main">
+            <a:off x="7667625" y="1571625"/>
+            <a:ext cx="3524250" cy="419100"/>
+          </a:xfrm>
+          <a:prstGeom xmlns:a="http://schemas.openxmlformats.org/drawingml/2006/main" prst="rect">
+            <a:avLst/>
+          </a:prstGeom>
+          <a:noFill xmlns:a="http://schemas.openxmlformats.org/drawingml/2006/main"/>
+          <a:ln xmlns:a="http://schemas.openxmlformats.org/drawingml/2006/main" w="0">
+            <a:noFill/>
+          </a:ln>
+        </p:spPr>
+        <p:txBody>
+          <a:bodyPr xmlns:a="http://schemas.openxmlformats.org/drawingml/2006/main" anchor="ctr">
+            <a:normAutofit fontScale="91740"/>
+          </a:bodyPr>
+          <a:lstStyle xmlns:a="http://schemas.openxmlformats.org/drawingml/2006/main"/>
+          <a:p xmlns:a="http://schemas.openxmlformats.org/drawingml/2006/main">
+            <a:pPr>
+              <a:defRPr sz="1800" b="1">
+                <a:solidFill>
+                  <a:srgbClr val="163345"/>
+                </a:solidFill>
+                <a:latin typeface="Arial"/>
+                <a:ea typeface="Arial"/>
+                <a:cs typeface="Arial"/>
+              </a:defRPr>
+            </a:pPr>
+            <a:r>
+              <a:rPr sz="1800" b="1">
+                <a:solidFill>
+                  <a:srgbClr val="163345"/>
+                </a:solidFill>
+                <a:latin typeface="Arial"/>
+                <a:ea typeface="Arial"/>
+                <a:cs typeface="Arial"/>
+              </a:rPr>
+              <a:t>Confusion matrix · threshold 0.50</a:t>
+            </a:r>
+          </a:p>
+        </p:txBody>
+      </p:sp>
+      <p:graphicFrame>
+        <p:nvGraphicFramePr>
+          <p:cNvPr id="13" name=""/>
+          <p:cNvGraphicFramePr/>
+          <p:nvPr/>
+        </p:nvGraphicFramePr>
+        <p:xfrm>
+          <a:off xmlns:a="http://schemas.openxmlformats.org/drawingml/2006/main" x="7524750" y="2095500"/>
+          <a:ext xmlns:a="http://schemas.openxmlformats.org/drawingml/2006/main" cx="3857625" cy="2047875"/>
+        </p:xfrm>
+        <a:graphic xmlns:a="http://schemas.openxmlformats.org/drawingml/2006/main">
+          <a:graphicData uri="http://schemas.openxmlformats.org/drawingml/2006/table">
+            <a:tbl>
+              <a:tblPr firstRow="1" bandRow="1"/>
+              <a:tblGrid>
+                <a:gridCol w="1238250"/>
+                <a:gridCol w="1285875"/>
+                <a:gridCol w="1333500"/>
+              </a:tblGrid>
+              <a:tr h="682625">
+                <a:tc>
+                  <a:txBody>
+                    <a:bodyPr/>
+                    <a:lstStyle/>
+                    <a:p>
+                      <a:r>
+                        <a:rPr sz="1125" b="1">
+                          <a:solidFill>
+                            <a:srgbClr val="FFFFFF"/>
+                          </a:solidFill>
+                        </a:rPr>
+                        <a:t>Actual</a:t>
+                      </a:r>
+                    </a:p>
+                  </a:txBody>
+                  <a:tcPr marL="91440" marR="91440" marT="45720" marB="45720">
+                    <a:solidFill>
+                      <a:srgbClr val="163345"/>
+                    </a:solidFill>
+                  </a:tcPr>
+                </a:tc>
+                <a:tc>
+                  <a:txBody>
+                    <a:bodyPr/>
+                    <a:lstStyle/>
+                    <a:p>
+                      <a:r>
+                        <a:rPr sz="1125" b="1">
+                          <a:solidFill>
+                            <a:srgbClr val="FFFFFF"/>
+                          </a:solidFill>
+                        </a:rPr>
+                        <a:t>Pred. benign</a:t>
+                      </a:r>
+                    </a:p>
+                  </a:txBody>
+                  <a:tcPr marL="91440" marR="91440" marT="45720" marB="45720">
+                    <a:solidFill>
+                      <a:srgbClr val="163345"/>
+                    </a:solidFill>
+                  </a:tcPr>
+                </a:tc>
+                <a:tc>
+                  <a:txBody>
+                    <a:bodyPr/>
+                    <a:lstStyle/>
+                    <a:p>
+                      <a:r>
+                        <a:rPr sz="1125" b="1">
+                          <a:solidFill>
+                            <a:srgbClr val="FFFFFF"/>
+                          </a:solidFill>
+                        </a:rPr>
+                        <a:t>Pred. malignant</a:t>
+                      </a:r>
+                    </a:p>
+                  </a:txBody>
+                  <a:tcPr marL="91440" marR="91440" marT="45720" marB="45720">
+                    <a:solidFill>
+                      <a:srgbClr val="163345"/>
+                    </a:solidFill>
+                  </a:tcPr>
+                </a:tc>
+              </a:tr>
+              <a:tr h="682625">
+                <a:tc>
+                  <a:txBody>
+                    <a:bodyPr/>
+                    <a:lstStyle/>
+                    <a:p>
+                      <a:r>
+                        <a:rPr sz="1275">
+                          <a:solidFill>
+                            <a:srgbClr val="263D4B"/>
+                          </a:solidFill>
+                        </a:rPr>
+                        <a:t>Benign</a:t>
+                      </a:r>
+                    </a:p>
+                  </a:txBody>
+                  <a:tcPr marL="91440" marR="91440" marT="45720" marB="45720"/>
+                </a:tc>
+                <a:tc>
+                  <a:txBody>
+                    <a:bodyPr/>
+                    <a:lstStyle/>
+                    <a:p>
+                      <a:r>
+                        <a:rPr sz="1275">
+                          <a:solidFill>
+                            <a:srgbClr val="263D4B"/>
+                          </a:solidFill>
+                        </a:rPr>
+                        <a:t>71</a:t>
+                      </a:r>
+                    </a:p>
+                  </a:txBody>
+                  <a:tcPr marL="91440" marR="91440" marT="45720" marB="45720"/>
+                </a:tc>
+                <a:tc>
+                  <a:txBody>
+                    <a:bodyPr/>
+                    <a:lstStyle/>
+                    <a:p>
+                      <a:r>
+                        <a:rPr sz="1275">
+                          <a:solidFill>
+                            <a:srgbClr val="263D4B"/>
+                          </a:solidFill>
+                        </a:rPr>
+                        <a:t>1</a:t>
+                      </a:r>
+                    </a:p>
+                  </a:txBody>
+                  <a:tcPr marL="91440" marR="91440" marT="45720" marB="45720"/>
+                </a:tc>
+              </a:tr>
+              <a:tr h="682625">
+                <a:tc>
+                  <a:txBody>
+                    <a:bodyPr/>
+                    <a:lstStyle/>
+                    <a:p>
+                      <a:r>
+                        <a:rPr sz="1275">
+                          <a:solidFill>
+                            <a:srgbClr val="263D4B"/>
+                          </a:solidFill>
+                        </a:rPr>
+                        <a:t>Malignant</a:t>
+                      </a:r>
+                    </a:p>
+                  </a:txBody>
+                  <a:tcPr marL="91440" marR="91440" marT="45720" marB="45720"/>
+                </a:tc>
+                <a:tc>
+                  <a:txBody>
+                    <a:bodyPr/>
+                    <a:lstStyle/>
+                    <a:p>
+                      <a:r>
+                        <a:rPr sz="1275">
+                          <a:solidFill>
+                            <a:srgbClr val="263D4B"/>
+                          </a:solidFill>
+                        </a:rPr>
+                        <a:t>3</a:t>
+                      </a:r>
+                    </a:p>
+                  </a:txBody>
+                  <a:tcPr marL="91440" marR="91440" marT="45720" marB="45720"/>
+                </a:tc>
+                <a:tc>
+                  <a:txBody>
+                    <a:bodyPr/>
+                    <a:lstStyle/>
+                    <a:p>
+                      <a:r>
+                        <a:rPr sz="1275">
+                          <a:solidFill>
+                            <a:srgbClr val="263D4B"/>
+                          </a:solidFill>
+                        </a:rPr>
+                        <a:t>39</a:t>
+                      </a:r>
+                    </a:p>
+                  </a:txBody>
+                  <a:tcPr marL="91440" marR="91440" marT="45720" marB="45720"/>
+                </a:tc>
+              </a:tr>
+            </a:tbl>
+          </a:graphicData>
+        </a:graphic>
+      </p:graphicFrame>
+      <p:sp>
+        <p:nvSpPr>
+          <p:cNvPr id="7" name="">
+            <a:extLst xmlns:a="http://schemas.openxmlformats.org/drawingml/2006/main">
+              <a:ext uri="{FF2B5EF4-FFF2-40B4-BE49-F238E27FC236}">
+                <a16:creationId xmlns:a16="http://schemas.microsoft.com/office/drawing/2014/main" id="{EE36D074-F048-43AF-BDB1-AA7AF8F1854D}"/>
+              </a:ext>
+            </a:extLst>
+          </p:cNvPr>
+          <p:cNvSpPr>
+            <a:spLocks xmlns:a="http://schemas.openxmlformats.org/drawingml/2006/main" noGrp="1"/>
+          </p:cNvSpPr>
+          <p:nvPr/>
+        </p:nvSpPr>
+        <p:spPr>
+          <a:xfrm xmlns:a="http://schemas.openxmlformats.org/drawingml/2006/main">
+            <a:off x="7667625" y="4476750"/>
+            <a:ext cx="3524250" cy="1200150"/>
+          </a:xfrm>
+          <a:prstGeom xmlns:a="http://schemas.openxmlformats.org/drawingml/2006/main" prst="rect">
+            <a:avLst/>
+          </a:prstGeom>
+          <a:noFill xmlns:a="http://schemas.openxmlformats.org/drawingml/2006/main"/>
+          <a:ln xmlns:a="http://schemas.openxmlformats.org/drawingml/2006/main" w="0">
+            <a:noFill/>
+          </a:ln>
+        </p:spPr>
+        <p:txBody>
+          <a:bodyPr xmlns:a="http://schemas.openxmlformats.org/drawingml/2006/main" anchor="ctr">
+            <a:normAutofit fontScale="100000"/>
+          </a:bodyPr>
+          <a:lstStyle xmlns:a="http://schemas.openxmlformats.org/drawingml/2006/main"/>
+          <a:p xmlns:a="http://schemas.openxmlformats.org/drawingml/2006/main">
+            <a:pPr>
+              <a:defRPr sz="1650" b="0">
+                <a:solidFill>
+                  <a:srgbClr val="263D4B"/>
+                </a:solidFill>
+                <a:latin typeface="Arial"/>
+                <a:ea typeface="Arial"/>
+                <a:cs typeface="Arial"/>
+              </a:defRPr>
+            </a:pPr>
+            <a:r>
+              <a:rPr sz="1650" b="0">
+                <a:solidFill>
+                  <a:srgbClr val="263D4B"/>
+                </a:solidFill>
+                <a:latin typeface="Arial"/>
+                <a:ea typeface="Arial"/>
+                <a:cs typeface="Arial"/>
+              </a:rPr>
+              <a:t>Sensitivity  39 / 42 = 92.9%</a:t>
+            </a:r>
+          </a:p>
+          <a:p xmlns:a="http://schemas.openxmlformats.org/drawingml/2006/main">
+            <a:pPr>
+              <a:defRPr sz="1650" b="0">
+                <a:solidFill>
+                  <a:srgbClr val="263D4B"/>
+                </a:solidFill>
+                <a:latin typeface="Arial"/>
+                <a:ea typeface="Arial"/>
+                <a:cs typeface="Arial"/>
+              </a:defRPr>
+            </a:pPr>
+            <a:r>
+              <a:rPr sz="1650" b="0">
+                <a:solidFill>
+                  <a:srgbClr val="263D4B"/>
+                </a:solidFill>
+                <a:latin typeface="Arial"/>
+                <a:ea typeface="Arial"/>
+                <a:cs typeface="Arial"/>
+              </a:rPr>
+              <a:t>Specificity   71 / 72 = 98.6%</a:t>
+            </a:r>
+          </a:p>
+          <a:p xmlns:a="http://schemas.openxmlformats.org/drawingml/2006/main">
+            <a:pPr>
+              <a:defRPr sz="1650" b="0">
+                <a:solidFill>
+                  <a:srgbClr val="263D4B"/>
+                </a:solidFill>
+                <a:latin typeface="Arial"/>
+                <a:ea typeface="Arial"/>
+                <a:cs typeface="Arial"/>
+              </a:defRPr>
+            </a:pPr>
+            <a:r>
+              <a:rPr sz="1650" b="0">
+                <a:solidFill>
+                  <a:srgbClr val="263D4B"/>
+                </a:solidFill>
+                <a:latin typeface="Arial"/>
+                <a:ea typeface="Arial"/>
+                <a:cs typeface="Arial"/>
+              </a:rPr>
+              <a:t>Accuracy      110 / 114 = 96.5%</a:t>
+            </a:r>
+          </a:p>
+        </p:txBody>
+      </p:sp>
+    </p:spTree>
+    <p:extLst>
+      <p:ext uri="{BB962C8B-B14F-4D97-AF65-F5344CB8AC3E}">
+        <p14:creationId xmlns:p14="http://schemas.microsoft.com/office/powerpoint/2010/main" val="212694981"/>
+      </p:ext>
+    </p:extLst>
+  </p:cSld>
+</p:sld>
+</file>
+
+<file path=ppt/slides/slide17.xml><?xml version="1.0" encoding="utf-8"?>
+<p:sld xmlns:p="http://schemas.openxmlformats.org/presentationml/2006/main">
+  <p:cSld>
+    <p:bg>
+      <p:bgPr>
+        <a:solidFill xmlns:a="http://schemas.openxmlformats.org/drawingml/2006/main">
+          <a:srgbClr val="F7F8F5"/>
+        </a:solidFill>
+      </p:bgPr>
+    </p:bg>
+    <p:spTree>
+      <p:nvGrpSpPr>
+        <p:cNvPr id="1" name=""/>
+        <p:cNvGrpSpPr/>
+        <p:nvPr/>
+      </p:nvGrpSpPr>
+      <p:grpSpPr>
+        <a:xfrm xmlns:a="http://schemas.openxmlformats.org/drawingml/2006/main"/>
+      </p:grpSpPr>
+      <p:sp>
+        <p:nvSpPr>
+          <p:cNvPr id="6" name="">
+            <a:extLst xmlns:a="http://schemas.openxmlformats.org/drawingml/2006/main">
+              <a:ext uri="{FF2B5EF4-FFF2-40B4-BE49-F238E27FC236}">
+                <a16:creationId xmlns:a16="http://schemas.microsoft.com/office/drawing/2014/main" id="{55900D82-78F4-4720-90EF-DC7407387FAF}"/>
+              </a:ext>
+            </a:extLst>
+          </p:cNvPr>
+          <p:cNvSpPr>
+            <a:spLocks xmlns:a="http://schemas.openxmlformats.org/drawingml/2006/main" noGrp="1"/>
+          </p:cNvSpPr>
+          <p:nvPr/>
+        </p:nvSpPr>
+        <p:spPr>
+          <a:xfrm xmlns:a="http://schemas.openxmlformats.org/drawingml/2006/main">
+            <a:off x="723900" y="457200"/>
+            <a:ext cx="10744200" cy="685800"/>
+          </a:xfrm>
+          <a:prstGeom xmlns:a="http://schemas.openxmlformats.org/drawingml/2006/main" prst="rect">
+            <a:avLst/>
+          </a:prstGeom>
+          <a:noFill xmlns:a="http://schemas.openxmlformats.org/drawingml/2006/main"/>
+          <a:ln xmlns:a="http://schemas.openxmlformats.org/drawingml/2006/main" w="0">
+            <a:noFill/>
+          </a:ln>
+        </p:spPr>
+        <p:txBody>
+          <a:bodyPr xmlns:a="http://schemas.openxmlformats.org/drawingml/2006/main" anchor="ctr">
+            <a:normAutofit fontScale="100000"/>
+          </a:bodyPr>
+          <a:lstStyle xmlns:a="http://schemas.openxmlformats.org/drawingml/2006/main"/>
+          <a:p xmlns:a="http://schemas.openxmlformats.org/drawingml/2006/main">
+            <a:pPr>
+              <a:defRPr sz="3300" b="1">
+                <a:solidFill>
+                  <a:srgbClr val="163345"/>
+                </a:solidFill>
+                <a:latin typeface="Arial"/>
+                <a:ea typeface="Arial"/>
+                <a:cs typeface="Arial"/>
+              </a:defRPr>
+            </a:pPr>
+            <a:r>
+              <a:rPr sz="3300" b="1">
+                <a:solidFill>
+                  <a:srgbClr val="163345"/>
+                </a:solidFill>
+                <a:latin typeface="Arial"/>
+                <a:ea typeface="Arial"/>
+                <a:cs typeface="Arial"/>
+              </a:rPr>
+              <a:t>Coefficient view · useful, with limits</a:t>
+            </a:r>
+          </a:p>
+        </p:txBody>
+      </p:sp>
+      <p:sp>
+        <p:nvSpPr>
+          <p:cNvPr id="2" name="">
+            <a:extLst xmlns:a="http://schemas.openxmlformats.org/drawingml/2006/main">
+              <a:ext uri="{FF2B5EF4-FFF2-40B4-BE49-F238E27FC236}">
+                <a16:creationId xmlns:a16="http://schemas.microsoft.com/office/drawing/2014/main" id="{C0977E58-2991-4B9E-B085-BB905D7840B2}"/>
+              </a:ext>
+            </a:extLst>
+          </p:cNvPr>
+          <p:cNvSpPr>
+            <a:spLocks xmlns:a="http://schemas.openxmlformats.org/drawingml/2006/main" noGrp="1"/>
+          </p:cNvSpPr>
+          <p:nvPr/>
+        </p:nvSpPr>
+        <p:spPr>
+          <a:xfrm xmlns:a="http://schemas.openxmlformats.org/drawingml/2006/main">
+            <a:off x="11049000" y="5953125"/>
+            <a:ext cx="514350" cy="361950"/>
+          </a:xfrm>
+          <a:prstGeom xmlns:a="http://schemas.openxmlformats.org/drawingml/2006/main" prst="rect">
+            <a:avLst/>
+          </a:prstGeom>
+          <a:noFill xmlns:a="http://schemas.openxmlformats.org/drawingml/2006/main"/>
+          <a:ln xmlns:a="http://schemas.openxmlformats.org/drawingml/2006/main" w="0">
+            <a:noFill/>
+          </a:ln>
+        </p:spPr>
+        <p:txBody>
+          <a:bodyPr xmlns:a="http://schemas.openxmlformats.org/drawingml/2006/main" anchor="ctr">
+            <a:normAutofit fontScale="100000"/>
+          </a:bodyPr>
+          <a:lstStyle xmlns:a="http://schemas.openxmlformats.org/drawingml/2006/main"/>
+          <a:p xmlns:a="http://schemas.openxmlformats.org/drawingml/2006/main">
+            <a:pPr>
+              <a:defRPr sz="1350" b="0">
+                <a:solidFill>
+                  <a:srgbClr val="536A77"/>
+                </a:solidFill>
+                <a:latin typeface="Arial"/>
+                <a:ea typeface="Arial"/>
+                <a:cs typeface="Arial"/>
+              </a:defRPr>
+            </a:pPr>
+            <a:r>
+              <a:rPr sz="1350" b="0">
+                <a:solidFill>
+                  <a:srgbClr val="536A77"/>
+                </a:solidFill>
+                <a:latin typeface="Arial"/>
+                <a:ea typeface="Arial"/>
+                <a:cs typeface="Arial"/>
+              </a:rPr>
+              <a:t>17</a:t>
+            </a:r>
+          </a:p>
+        </p:txBody>
+      </p:sp>
+      <p:sp>
+        <p:nvSpPr>
+          <p:cNvPr id="3" name="">
+            <a:extLst xmlns:a="http://schemas.openxmlformats.org/drawingml/2006/main">
+              <a:ext uri="{FF2B5EF4-FFF2-40B4-BE49-F238E27FC236}">
+                <a16:creationId xmlns:a16="http://schemas.microsoft.com/office/drawing/2014/main" id="{8A229636-FEFD-4869-A384-8EB5482F8DBE}"/>
+              </a:ext>
+            </a:extLst>
+          </p:cNvPr>
+          <p:cNvSpPr>
+            <a:spLocks xmlns:a="http://schemas.openxmlformats.org/drawingml/2006/main" noGrp="1"/>
+          </p:cNvSpPr>
+          <p:nvPr/>
+        </p:nvSpPr>
+        <p:spPr>
+          <a:xfrm xmlns:a="http://schemas.openxmlformats.org/drawingml/2006/main">
+            <a:off x="952500" y="1381125"/>
+            <a:ext cx="10096500" cy="457200"/>
+          </a:xfrm>
+          <a:prstGeom xmlns:a="http://schemas.openxmlformats.org/drawingml/2006/main" prst="rect">
+            <a:avLst/>
+          </a:prstGeom>
+          <a:noFill xmlns:a="http://schemas.openxmlformats.org/drawingml/2006/main"/>
+          <a:ln xmlns:a="http://schemas.openxmlformats.org/drawingml/2006/main" w="0">
+            <a:noFill/>
+          </a:ln>
+        </p:spPr>
+        <p:txBody>
+          <a:bodyPr xmlns:a="http://schemas.openxmlformats.org/drawingml/2006/main" anchor="ctr">
+            <a:normAutofit fontScale="100000"/>
+          </a:bodyPr>
+          <a:lstStyle xmlns:a="http://schemas.openxmlformats.org/drawingml/2006/main"/>
+          <a:p xmlns:a="http://schemas.openxmlformats.org/drawingml/2006/main">
+            <a:pPr>
+              <a:defRPr sz="2100" b="1">
+                <a:solidFill>
+                  <a:srgbClr val="163345"/>
+                </a:solidFill>
+                <a:latin typeface="Arial"/>
+                <a:ea typeface="Arial"/>
+                <a:cs typeface="Arial"/>
+              </a:defRPr>
+            </a:pPr>
+            <a:r>
+              <a:rPr sz="2100" b="1">
+                <a:solidFill>
+                  <a:srgbClr val="163345"/>
+                </a:solidFill>
+                <a:latin typeface="Arial"/>
+                <a:ea typeface="Arial"/>
+                <a:cs typeface="Arial"/>
+              </a:rPr>
+              <a:t>Largest absolute standardized coefficients</a:t>
+            </a:r>
+          </a:p>
+        </p:txBody>
+      </p:sp>
+      <p:graphicFrame>
+        <p:nvGraphicFramePr>
+          <p:cNvPr id="9" name="Chart"/>
+          <p:cNvGraphicFramePr/>
+          <p:nvPr/>
+        </p:nvGraphicFramePr>
+        <p:xfrm>
+          <a:off xmlns:a="http://schemas.openxmlformats.org/drawingml/2006/main" x="952500" y="1857375"/>
+          <a:ext xmlns:a="http://schemas.openxmlformats.org/drawingml/2006/main" cx="10001250" cy="3333750"/>
+        </p:xfrm>
+        <a:graphic xmlns:a="http://schemas.openxmlformats.org/drawingml/2006/main">
+          <a:graphicData uri="http://schemas.openxmlformats.org/drawingml/2006/chart">
+            <c:chart xmlns:r="http://schemas.openxmlformats.org/officeDocument/2006/relationships" xmlns:c="http://schemas.openxmlformats.org/drawingml/2006/chart" r:id="R6e0810a9d0b3422f"/>
+          </a:graphicData>
+        </a:graphic>
+      </p:graphicFrame>
+      <p:sp>
+        <p:nvSpPr>
+          <p:cNvPr id="5" name="">
+            <a:extLst xmlns:a="http://schemas.openxmlformats.org/drawingml/2006/main">
+              <a:ext uri="{FF2B5EF4-FFF2-40B4-BE49-F238E27FC236}">
+                <a16:creationId xmlns:a16="http://schemas.microsoft.com/office/drawing/2014/main" id="{C23D7AE2-C15C-4E25-B6AB-290C5AAD8B01}"/>
+              </a:ext>
+            </a:extLst>
+          </p:cNvPr>
+          <p:cNvSpPr>
+            <a:spLocks xmlns:a="http://schemas.openxmlformats.org/drawingml/2006/main" noGrp="1"/>
+          </p:cNvSpPr>
+          <p:nvPr/>
+        </p:nvSpPr>
+        <p:spPr>
+          <a:xfrm xmlns:a="http://schemas.openxmlformats.org/drawingml/2006/main">
+            <a:off x="1000125" y="5381625"/>
+            <a:ext cx="9906000" cy="438150"/>
+          </a:xfrm>
+          <a:prstGeom xmlns:a="http://schemas.openxmlformats.org/drawingml/2006/main" prst="rect">
+            <a:avLst/>
+          </a:prstGeom>
+          <a:noFill xmlns:a="http://schemas.openxmlformats.org/drawingml/2006/main"/>
+          <a:ln xmlns:a="http://schemas.openxmlformats.org/drawingml/2006/main" w="0">
+            <a:noFill/>
+          </a:ln>
+        </p:spPr>
+        <p:txBody>
+          <a:bodyPr xmlns:a="http://schemas.openxmlformats.org/drawingml/2006/main" anchor="ctr">
+            <a:normAutofit fontScale="100000"/>
+          </a:bodyPr>
+          <a:lstStyle xmlns:a="http://schemas.openxmlformats.org/drawingml/2006/main"/>
+          <a:p xmlns:a="http://schemas.openxmlformats.org/drawingml/2006/main">
+            <a:pPr>
+              <a:defRPr sz="1800" b="1">
+                <a:solidFill>
+                  <a:srgbClr val="B3543C"/>
+                </a:solidFill>
+                <a:latin typeface="Arial"/>
+                <a:ea typeface="Arial"/>
+                <a:cs typeface="Arial"/>
+              </a:defRPr>
+            </a:pPr>
+            <a:r>
+              <a:rPr sz="1800" b="1">
+                <a:solidFill>
+                  <a:srgbClr val="B3543C"/>
+                </a:solidFill>
+                <a:latin typeface="Arial"/>
+                <a:ea typeface="Arial"/>
+                <a:cs typeface="Arial"/>
+              </a:rPr>
+              <a:t>A coefficient is a model weight, not a causal effect.</a:t>
+            </a:r>
+          </a:p>
+        </p:txBody>
+      </p:sp>
+    </p:spTree>
+    <p:extLst>
+      <p:ext uri="{BB962C8B-B14F-4D97-AF65-F5344CB8AC3E}">
+        <p14:creationId xmlns:p14="http://schemas.microsoft.com/office/powerpoint/2010/main" val="1735093947"/>
+      </p:ext>
+    </p:extLst>
+  </p:cSld>
+</p:sld>
+</file>
+
+<file path=ppt/slides/slide18.xml><?xml version="1.0" encoding="utf-8"?>
+<p:sld xmlns:p="http://schemas.openxmlformats.org/presentationml/2006/main">
+  <p:cSld>
+    <p:bg>
+      <p:bgPr>
+        <a:solidFill xmlns:a="http://schemas.openxmlformats.org/drawingml/2006/main">
+          <a:srgbClr val="F7F8F5"/>
+        </a:solidFill>
+      </p:bgPr>
+    </p:bg>
+    <p:spTree>
+      <p:nvGrpSpPr>
+        <p:cNvPr id="1" name=""/>
+        <p:cNvGrpSpPr/>
+        <p:nvPr/>
+      </p:nvGrpSpPr>
+      <p:grpSpPr>
+        <a:xfrm xmlns:a="http://schemas.openxmlformats.org/drawingml/2006/main"/>
+      </p:grpSpPr>
+      <p:sp>
+        <p:nvSpPr>
+          <p:cNvPr id="6" name="">
+            <a:extLst xmlns:a="http://schemas.openxmlformats.org/drawingml/2006/main">
+              <a:ext uri="{FF2B5EF4-FFF2-40B4-BE49-F238E27FC236}">
+                <a16:creationId xmlns:a16="http://schemas.microsoft.com/office/drawing/2014/main" id="{783B268B-3F3A-4AA4-A1F6-5079C27DF8EC}"/>
+              </a:ext>
+            </a:extLst>
+          </p:cNvPr>
+          <p:cNvSpPr>
+            <a:spLocks xmlns:a="http://schemas.openxmlformats.org/drawingml/2006/main" noGrp="1"/>
+          </p:cNvSpPr>
+          <p:nvPr/>
+        </p:nvSpPr>
+        <p:spPr>
+          <a:xfrm xmlns:a="http://schemas.openxmlformats.org/drawingml/2006/main">
+            <a:off x="723900" y="457200"/>
+            <a:ext cx="10744200" cy="685800"/>
+          </a:xfrm>
+          <a:prstGeom xmlns:a="http://schemas.openxmlformats.org/drawingml/2006/main" prst="rect">
+            <a:avLst/>
+          </a:prstGeom>
+          <a:noFill xmlns:a="http://schemas.openxmlformats.org/drawingml/2006/main"/>
+          <a:ln xmlns:a="http://schemas.openxmlformats.org/drawingml/2006/main" w="0">
+            <a:noFill/>
+          </a:ln>
+        </p:spPr>
+        <p:txBody>
+          <a:bodyPr xmlns:a="http://schemas.openxmlformats.org/drawingml/2006/main" anchor="ctr">
+            <a:normAutofit fontScale="100000"/>
+          </a:bodyPr>
+          <a:lstStyle xmlns:a="http://schemas.openxmlformats.org/drawingml/2006/main"/>
+          <a:p xmlns:a="http://schemas.openxmlformats.org/drawingml/2006/main">
+            <a:pPr>
+              <a:defRPr sz="3300" b="1">
+                <a:solidFill>
+                  <a:srgbClr val="163345"/>
+                </a:solidFill>
+                <a:latin typeface="Arial"/>
+                <a:ea typeface="Arial"/>
+                <a:cs typeface="Arial"/>
+              </a:defRPr>
+            </a:pPr>
+            <a:r>
+              <a:rPr sz="3300" b="1">
+                <a:solidFill>
+                  <a:srgbClr val="163345"/>
+                </a:solidFill>
+                <a:latin typeface="Arial"/>
+                <a:ea typeface="Arial"/>
+                <a:cs typeface="Arial"/>
+              </a:rPr>
+              <a:t>Practice · change the decision threshold</a:t>
+            </a:r>
+          </a:p>
+        </p:txBody>
+      </p:sp>
+      <p:sp>
+        <p:nvSpPr>
+          <p:cNvPr id="2" name="">
+            <a:extLst xmlns:a="http://schemas.openxmlformats.org/drawingml/2006/main">
+              <a:ext uri="{FF2B5EF4-FFF2-40B4-BE49-F238E27FC236}">
+                <a16:creationId xmlns:a16="http://schemas.microsoft.com/office/drawing/2014/main" id="{A96FC82D-B6D3-40E2-92F4-8195AFCAF40A}"/>
+              </a:ext>
+            </a:extLst>
+          </p:cNvPr>
+          <p:cNvSpPr>
+            <a:spLocks xmlns:a="http://schemas.openxmlformats.org/drawingml/2006/main" noGrp="1"/>
+          </p:cNvSpPr>
+          <p:nvPr/>
+        </p:nvSpPr>
+        <p:spPr>
+          <a:xfrm xmlns:a="http://schemas.openxmlformats.org/drawingml/2006/main">
+            <a:off x="11049000" y="5953125"/>
+            <a:ext cx="514350" cy="361950"/>
+          </a:xfrm>
+          <a:prstGeom xmlns:a="http://schemas.openxmlformats.org/drawingml/2006/main" prst="rect">
+            <a:avLst/>
+          </a:prstGeom>
+          <a:noFill xmlns:a="http://schemas.openxmlformats.org/drawingml/2006/main"/>
+          <a:ln xmlns:a="http://schemas.openxmlformats.org/drawingml/2006/main" w="0">
+            <a:noFill/>
+          </a:ln>
+        </p:spPr>
+        <p:txBody>
+          <a:bodyPr xmlns:a="http://schemas.openxmlformats.org/drawingml/2006/main" anchor="ctr">
+            <a:normAutofit fontScale="100000"/>
+          </a:bodyPr>
+          <a:lstStyle xmlns:a="http://schemas.openxmlformats.org/drawingml/2006/main"/>
+          <a:p xmlns:a="http://schemas.openxmlformats.org/drawingml/2006/main">
+            <a:pPr>
+              <a:defRPr sz="1350" b="0">
+                <a:solidFill>
+                  <a:srgbClr val="536A77"/>
+                </a:solidFill>
+                <a:latin typeface="Arial"/>
+                <a:ea typeface="Arial"/>
+                <a:cs typeface="Arial"/>
+              </a:defRPr>
+            </a:pPr>
+            <a:r>
+              <a:rPr sz="1350" b="0">
+                <a:solidFill>
+                  <a:srgbClr val="536A77"/>
+                </a:solidFill>
+                <a:latin typeface="Arial"/>
+                <a:ea typeface="Arial"/>
+                <a:cs typeface="Arial"/>
+              </a:rPr>
+              <a:t>18</a:t>
+            </a:r>
+          </a:p>
+        </p:txBody>
+      </p:sp>
+      <p:sp>
+        <p:nvSpPr>
+          <p:cNvPr id="3" name="">
+            <a:extLst xmlns:a="http://schemas.openxmlformats.org/drawingml/2006/main">
+              <a:ext uri="{FF2B5EF4-FFF2-40B4-BE49-F238E27FC236}">
+                <a16:creationId xmlns:a16="http://schemas.microsoft.com/office/drawing/2014/main" id="{9D5B3253-7992-4893-8CDC-71708C38D637}"/>
+              </a:ext>
+            </a:extLst>
+          </p:cNvPr>
+          <p:cNvSpPr>
+            <a:spLocks xmlns:a="http://schemas.openxmlformats.org/drawingml/2006/main" noGrp="1"/>
+          </p:cNvSpPr>
+          <p:nvPr/>
+        </p:nvSpPr>
+        <p:spPr>
+          <a:xfrm xmlns:a="http://schemas.openxmlformats.org/drawingml/2006/main">
+            <a:off x="952500" y="1381125"/>
+            <a:ext cx="10001250" cy="476250"/>
+          </a:xfrm>
+          <a:prstGeom xmlns:a="http://schemas.openxmlformats.org/drawingml/2006/main" prst="rect">
+            <a:avLst/>
+          </a:prstGeom>
+          <a:noFill xmlns:a="http://schemas.openxmlformats.org/drawingml/2006/main"/>
+          <a:ln xmlns:a="http://schemas.openxmlformats.org/drawingml/2006/main" w="0">
+            <a:noFill/>
+          </a:ln>
+        </p:spPr>
+        <p:txBody>
+          <a:bodyPr xmlns:a="http://schemas.openxmlformats.org/drawingml/2006/main" anchor="ctr">
+            <a:normAutofit fontScale="100000"/>
+          </a:bodyPr>
+          <a:lstStyle xmlns:a="http://schemas.openxmlformats.org/drawingml/2006/main"/>
+          <a:p xmlns:a="http://schemas.openxmlformats.org/drawingml/2006/main">
+            <a:pPr>
+              <a:defRPr sz="2100" b="1">
+                <a:solidFill>
+                  <a:srgbClr val="163345"/>
+                </a:solidFill>
+                <a:latin typeface="Arial"/>
+                <a:ea typeface="Arial"/>
+                <a:cs typeface="Arial"/>
+              </a:defRPr>
+            </a:pPr>
+            <a:r>
+              <a:rPr sz="2100" b="1">
+                <a:solidFill>
+                  <a:srgbClr val="163345"/>
+                </a:solidFill>
+                <a:latin typeface="Arial"/>
+                <a:ea typeface="Arial"/>
+                <a:cs typeface="Arial"/>
+              </a:rPr>
+              <a:t>Use outputs/predictions.csv; do not refit the model.</a:t>
+            </a:r>
+          </a:p>
+        </p:txBody>
+      </p:sp>
+      <p:sp>
+        <p:nvSpPr>
+          <p:cNvPr id="4" name="">
+            <a:extLst xmlns:a="http://schemas.openxmlformats.org/drawingml/2006/main">
+              <a:ext uri="{FF2B5EF4-FFF2-40B4-BE49-F238E27FC236}">
+                <a16:creationId xmlns:a16="http://schemas.microsoft.com/office/drawing/2014/main" id="{C5A6AD58-74FC-4BBB-A9DC-CE78DF55C5FA}"/>
+              </a:ext>
+            </a:extLst>
+          </p:cNvPr>
+          <p:cNvSpPr>
+            <a:spLocks xmlns:a="http://schemas.openxmlformats.org/drawingml/2006/main" noGrp="1"/>
+          </p:cNvSpPr>
+          <p:nvPr/>
+        </p:nvSpPr>
+        <p:spPr>
+          <a:xfrm xmlns:a="http://schemas.openxmlformats.org/drawingml/2006/main">
+            <a:off x="1066800" y="2143125"/>
+            <a:ext cx="10001250" cy="2333625"/>
+          </a:xfrm>
+          <a:prstGeom xmlns:a="http://schemas.openxmlformats.org/drawingml/2006/main" prst="rect">
+            <a:avLst/>
+          </a:prstGeom>
+          <a:noFill xmlns:a="http://schemas.openxmlformats.org/drawingml/2006/main"/>
+          <a:ln xmlns:a="http://schemas.openxmlformats.org/drawingml/2006/main" w="0">
+            <a:noFill/>
+          </a:ln>
+        </p:spPr>
+        <p:txBody>
+          <a:bodyPr xmlns:a="http://schemas.openxmlformats.org/drawingml/2006/main" anchor="ctr">
+            <a:normAutofit fontScale="100000"/>
+          </a:bodyPr>
+          <a:lstStyle xmlns:a="http://schemas.openxmlformats.org/drawingml/2006/main"/>
+          <a:p xmlns:a="http://schemas.openxmlformats.org/drawingml/2006/main">
+            <a:pPr>
+              <a:defRPr sz="2025" b="0">
+                <a:solidFill>
+                  <a:srgbClr val="263D4B"/>
+                </a:solidFill>
+                <a:latin typeface="Arial"/>
+                <a:ea typeface="Arial"/>
+                <a:cs typeface="Arial"/>
+              </a:defRPr>
+            </a:pPr>
+            <a:r>
+              <a:rPr sz="2025" b="0">
+                <a:solidFill>
+                  <a:srgbClr val="263D4B"/>
+                </a:solidFill>
+                <a:latin typeface="Arial"/>
+                <a:ea typeface="Arial"/>
+                <a:cs typeface="Arial"/>
+              </a:rPr>
+              <a:t>1  Recompute predictions at 0.25 and 0.75</a:t>
+            </a:r>
+          </a:p>
+          <a:p xmlns:a="http://schemas.openxmlformats.org/drawingml/2006/main">
+            <a:pPr>
+              <a:defRPr sz="2025" b="0">
+                <a:solidFill>
+                  <a:srgbClr val="263D4B"/>
+                </a:solidFill>
+                <a:latin typeface="Arial"/>
+                <a:ea typeface="Arial"/>
+                <a:cs typeface="Arial"/>
+              </a:defRPr>
+            </a:pPr>
+            <a:r>
+              <a:rPr sz="2025" b="0">
+                <a:solidFill>
+                  <a:srgbClr val="263D4B"/>
+                </a:solidFill>
+                <a:latin typeface="Arial"/>
+                <a:ea typeface="Arial"/>
+                <a:cs typeface="Arial"/>
+              </a:rPr>
+              <a:t>2  Count false positives and false negatives</a:t>
+            </a:r>
+          </a:p>
+          <a:p xmlns:a="http://schemas.openxmlformats.org/drawingml/2006/main">
+            <a:pPr>
+              <a:defRPr sz="2025" b="0">
+                <a:solidFill>
+                  <a:srgbClr val="263D4B"/>
+                </a:solidFill>
+                <a:latin typeface="Arial"/>
+                <a:ea typeface="Arial"/>
+                <a:cs typeface="Arial"/>
+              </a:defRPr>
+            </a:pPr>
+            <a:r>
+              <a:rPr sz="2025" b="0">
+                <a:solidFill>
+                  <a:srgbClr val="263D4B"/>
+                </a:solidFill>
+                <a:latin typeface="Arial"/>
+                <a:ea typeface="Arial"/>
+                <a:cs typeface="Arial"/>
+              </a:rPr>
+              <a:t>3  Explain the trade-off in plain language</a:t>
+            </a:r>
+          </a:p>
+          <a:p xmlns:a="http://schemas.openxmlformats.org/drawingml/2006/main">
+            <a:pPr>
+              <a:defRPr sz="2025" b="0">
+                <a:solidFill>
+                  <a:srgbClr val="263D4B"/>
+                </a:solidFill>
+                <a:latin typeface="Arial"/>
+                <a:ea typeface="Arial"/>
+                <a:cs typeface="Arial"/>
+              </a:defRPr>
+            </a:pPr>
+            <a:r>
+              <a:rPr sz="2025" b="0">
+                <a:solidFill>
+                  <a:srgbClr val="263D4B"/>
+                </a:solidFill>
+                <a:latin typeface="Arial"/>
+                <a:ea typeface="Arial"/>
+                <a:cs typeface="Arial"/>
+              </a:rPr>
+              <a:t>4  Say what evidence is still missing before clinical use</a:t>
+            </a:r>
+          </a:p>
+        </p:txBody>
+      </p:sp>
+      <p:sp>
+        <p:nvSpPr>
+          <p:cNvPr id="5" name="">
+            <a:extLst xmlns:a="http://schemas.openxmlformats.org/drawingml/2006/main">
+              <a:ext uri="{FF2B5EF4-FFF2-40B4-BE49-F238E27FC236}">
+                <a16:creationId xmlns:a16="http://schemas.microsoft.com/office/drawing/2014/main" id="{9A05B833-E608-44D4-8DAC-3109B3F40014}"/>
+              </a:ext>
+            </a:extLst>
+          </p:cNvPr>
+          <p:cNvSpPr>
+            <a:spLocks xmlns:a="http://schemas.openxmlformats.org/drawingml/2006/main" noGrp="1"/>
+          </p:cNvSpPr>
+          <p:nvPr/>
+        </p:nvSpPr>
+        <p:spPr>
+          <a:xfrm xmlns:a="http://schemas.openxmlformats.org/drawingml/2006/main">
+            <a:off x="1047750" y="4953000"/>
+            <a:ext cx="10048875" cy="590550"/>
+          </a:xfrm>
+          <a:prstGeom xmlns:a="http://schemas.openxmlformats.org/drawingml/2006/main" prst="rect">
+            <a:avLst/>
+          </a:prstGeom>
+          <a:noFill xmlns:a="http://schemas.openxmlformats.org/drawingml/2006/main"/>
+          <a:ln xmlns:a="http://schemas.openxmlformats.org/drawingml/2006/main" w="0">
+            <a:noFill/>
+          </a:ln>
+        </p:spPr>
+        <p:txBody>
+          <a:bodyPr xmlns:a="http://schemas.openxmlformats.org/drawingml/2006/main" anchor="ctr">
+            <a:normAutofit fontScale="100000"/>
+          </a:bodyPr>
+          <a:lstStyle xmlns:a="http://schemas.openxmlformats.org/drawingml/2006/main"/>
+          <a:p xmlns:a="http://schemas.openxmlformats.org/drawingml/2006/main">
+            <a:pPr>
+              <a:defRPr sz="1875" b="1">
+                <a:solidFill>
+                  <a:srgbClr val="167C80"/>
+                </a:solidFill>
+                <a:latin typeface="Arial"/>
+                <a:ea typeface="Arial"/>
+                <a:cs typeface="Arial"/>
+              </a:defRPr>
+            </a:pPr>
+            <a:r>
+              <a:rPr sz="1875" b="1">
+                <a:solidFill>
+                  <a:srgbClr val="167C80"/>
+                </a:solidFill>
+                <a:latin typeface="Arial"/>
+                <a:ea typeface="Arial"/>
+                <a:cs typeface="Arial"/>
+              </a:rPr>
+              <a:t>Discuss: who chooses an acceptable trade-off, and using what evidence?</a:t>
+            </a:r>
+          </a:p>
+        </p:txBody>
+      </p:sp>
+    </p:spTree>
+    <p:extLst>
+      <p:ext uri="{BB962C8B-B14F-4D97-AF65-F5344CB8AC3E}">
+        <p14:creationId xmlns:p14="http://schemas.microsoft.com/office/powerpoint/2010/main" val="735296127"/>
       </p:ext>
     </p:extLst>
   </p:cSld>
@@ -2928,6 +7464,7 @@
           <a:lstStyle xmlns:a="http://schemas.openxmlformats.org/drawingml/2006/main"/>
           <a:p xmlns:a="http://schemas.openxmlformats.org/drawingml/2006/main">
             <a:pPr>
+              <a:buNone/>
               <a:defRPr sz="3300" b="1">
                 <a:solidFill>
                   <a:srgbClr val="163345"/>
@@ -2985,6 +7522,7 @@
           <a:lstStyle xmlns:a="http://schemas.openxmlformats.org/drawingml/2006/main"/>
           <a:p xmlns:a="http://schemas.openxmlformats.org/drawingml/2006/main">
             <a:pPr>
+              <a:buNone/>
               <a:defRPr sz="1350" b="0">
                 <a:solidFill>
                   <a:srgbClr val="536A77"/>
@@ -3042,6 +7580,7 @@
           <a:lstStyle xmlns:a="http://schemas.openxmlformats.org/drawingml/2006/main"/>
           <a:p xmlns:a="http://schemas.openxmlformats.org/drawingml/2006/main">
             <a:pPr>
+              <a:buNone/>
               <a:defRPr sz="2625" b="1">
                 <a:solidFill>
                   <a:srgbClr val="163345"/>
@@ -3099,6 +7638,7 @@
           <a:lstStyle xmlns:a="http://schemas.openxmlformats.org/drawingml/2006/main"/>
           <a:p xmlns:a="http://schemas.openxmlformats.org/drawingml/2006/main">
             <a:pPr>
+              <a:buNone/>
               <a:defRPr sz="2025" b="0">
                 <a:solidFill>
                   <a:srgbClr val="263D4B"/>
@@ -3122,6 +7662,7 @@
           </a:p>
           <a:p xmlns:a="http://schemas.openxmlformats.org/drawingml/2006/main">
             <a:pPr>
+              <a:buNone/>
               <a:defRPr sz="2025" b="0">
                 <a:solidFill>
                   <a:srgbClr val="263D4B"/>
@@ -3145,6 +7686,7 @@
           </a:p>
           <a:p xmlns:a="http://schemas.openxmlformats.org/drawingml/2006/main">
             <a:pPr>
+              <a:buNone/>
               <a:defRPr sz="2025" b="0">
                 <a:solidFill>
                   <a:srgbClr val="263D4B"/>
@@ -3231,6 +7773,7 @@
           <a:lstStyle xmlns:a="http://schemas.openxmlformats.org/drawingml/2006/main"/>
           <a:p xmlns:a="http://schemas.openxmlformats.org/drawingml/2006/main">
             <a:pPr>
+              <a:buNone/>
               <a:defRPr sz="3300" b="1">
                 <a:solidFill>
                   <a:srgbClr val="163345"/>
@@ -3288,6 +7831,7 @@
           <a:lstStyle xmlns:a="http://schemas.openxmlformats.org/drawingml/2006/main"/>
           <a:p xmlns:a="http://schemas.openxmlformats.org/drawingml/2006/main">
             <a:pPr>
+              <a:buNone/>
               <a:defRPr sz="1350" b="0">
                 <a:solidFill>
                   <a:srgbClr val="536A77"/>
@@ -3345,6 +7889,7 @@
           <a:lstStyle xmlns:a="http://schemas.openxmlformats.org/drawingml/2006/main"/>
           <a:p xmlns:a="http://schemas.openxmlformats.org/drawingml/2006/main">
             <a:pPr>
+              <a:buNone/>
               <a:defRPr sz="5400" b="1">
                 <a:solidFill>
                   <a:srgbClr val="167C80"/>
@@ -3402,6 +7947,7 @@
           <a:lstStyle xmlns:a="http://schemas.openxmlformats.org/drawingml/2006/main"/>
           <a:p xmlns:a="http://schemas.openxmlformats.org/drawingml/2006/main">
             <a:pPr>
+              <a:buNone/>
               <a:defRPr sz="1875" b="0">
                 <a:solidFill>
                   <a:srgbClr val="536A77"/>
@@ -3459,6 +8005,7 @@
           <a:lstStyle xmlns:a="http://schemas.openxmlformats.org/drawingml/2006/main"/>
           <a:p xmlns:a="http://schemas.openxmlformats.org/drawingml/2006/main">
             <a:pPr>
+              <a:buNone/>
               <a:defRPr sz="5400" b="1">
                 <a:solidFill>
                   <a:srgbClr val="167C80"/>
@@ -3516,6 +8063,7 @@
           <a:lstStyle xmlns:a="http://schemas.openxmlformats.org/drawingml/2006/main"/>
           <a:p xmlns:a="http://schemas.openxmlformats.org/drawingml/2006/main">
             <a:pPr>
+              <a:buNone/>
               <a:defRPr sz="1875" b="0">
                 <a:solidFill>
                   <a:srgbClr val="536A77"/>
@@ -3573,6 +8121,7 @@
           <a:lstStyle xmlns:a="http://schemas.openxmlformats.org/drawingml/2006/main"/>
           <a:p xmlns:a="http://schemas.openxmlformats.org/drawingml/2006/main">
             <a:pPr>
+              <a:buNone/>
               <a:defRPr sz="2400" b="1">
                 <a:solidFill>
                   <a:srgbClr val="163345"/>
@@ -3596,6 +8145,7 @@
           </a:p>
           <a:p xmlns:a="http://schemas.openxmlformats.org/drawingml/2006/main">
             <a:pPr>
+              <a:buNone/>
               <a:defRPr sz="2400" b="1">
                 <a:solidFill>
                   <a:srgbClr val="163345"/>
@@ -3653,6 +8203,7 @@
           <a:lstStyle xmlns:a="http://schemas.openxmlformats.org/drawingml/2006/main"/>
           <a:p xmlns:a="http://schemas.openxmlformats.org/drawingml/2006/main">
             <a:pPr>
+              <a:buNone/>
               <a:defRPr sz="2025" b="0">
                 <a:solidFill>
                   <a:srgbClr val="263D4B"/>
@@ -3739,6 +8290,7 @@
           <a:lstStyle xmlns:a="http://schemas.openxmlformats.org/drawingml/2006/main"/>
           <a:p xmlns:a="http://schemas.openxmlformats.org/drawingml/2006/main">
             <a:pPr>
+              <a:buNone/>
               <a:defRPr sz="3300" b="1">
                 <a:solidFill>
                   <a:srgbClr val="163345"/>
@@ -3796,6 +8348,7 @@
           <a:lstStyle xmlns:a="http://schemas.openxmlformats.org/drawingml/2006/main"/>
           <a:p xmlns:a="http://schemas.openxmlformats.org/drawingml/2006/main">
             <a:pPr>
+              <a:buNone/>
               <a:defRPr sz="1350" b="0">
                 <a:solidFill>
                   <a:srgbClr val="536A77"/>
@@ -3853,6 +8406,7 @@
           <a:lstStyle xmlns:a="http://schemas.openxmlformats.org/drawingml/2006/main"/>
           <a:p xmlns:a="http://schemas.openxmlformats.org/drawingml/2006/main">
             <a:pPr>
+              <a:buNone/>
               <a:defRPr sz="3450" b="1">
                 <a:solidFill>
                   <a:srgbClr val="167C80"/>
@@ -3910,6 +8464,7 @@
           <a:lstStyle xmlns:a="http://schemas.openxmlformats.org/drawingml/2006/main"/>
           <a:p xmlns:a="http://schemas.openxmlformats.org/drawingml/2006/main">
             <a:pPr>
+              <a:buNone/>
               <a:defRPr sz="2100" b="0">
                 <a:solidFill>
                   <a:srgbClr val="263D4B"/>
@@ -3933,6 +8488,7 @@
           </a:p>
           <a:p xmlns:a="http://schemas.openxmlformats.org/drawingml/2006/main">
             <a:pPr>
+              <a:buNone/>
               <a:defRPr sz="2100" b="0">
                 <a:solidFill>
                   <a:srgbClr val="263D4B"/>
@@ -3956,6 +8512,7 @@
           </a:p>
           <a:p xmlns:a="http://schemas.openxmlformats.org/drawingml/2006/main">
             <a:pPr>
+              <a:buNone/>
               <a:defRPr sz="2100" b="0">
                 <a:solidFill>
                   <a:srgbClr val="263D4B"/>
@@ -4042,6 +8599,7 @@
           <a:lstStyle xmlns:a="http://schemas.openxmlformats.org/drawingml/2006/main"/>
           <a:p xmlns:a="http://schemas.openxmlformats.org/drawingml/2006/main">
             <a:pPr>
+              <a:buNone/>
               <a:defRPr sz="3300" b="1">
                 <a:solidFill>
                   <a:srgbClr val="163345"/>
@@ -4099,6 +8657,7 @@
           <a:lstStyle xmlns:a="http://schemas.openxmlformats.org/drawingml/2006/main"/>
           <a:p xmlns:a="http://schemas.openxmlformats.org/drawingml/2006/main">
             <a:pPr>
+              <a:buNone/>
               <a:defRPr sz="1350" b="0">
                 <a:solidFill>
                   <a:srgbClr val="536A77"/>
@@ -4156,6 +8715,7 @@
           <a:lstStyle xmlns:a="http://schemas.openxmlformats.org/drawingml/2006/main"/>
           <a:p xmlns:a="http://schemas.openxmlformats.org/drawingml/2006/main">
             <a:pPr>
+              <a:buNone/>
               <a:defRPr sz="2700" b="1">
                 <a:solidFill>
                   <a:srgbClr val="163345"/>
@@ -4213,6 +8773,7 @@
           <a:lstStyle xmlns:a="http://schemas.openxmlformats.org/drawingml/2006/main"/>
           <a:p xmlns:a="http://schemas.openxmlformats.org/drawingml/2006/main">
             <a:pPr>
+              <a:buNone/>
               <a:defRPr sz="2325" b="1">
                 <a:solidFill>
                   <a:srgbClr val="167C80"/>
@@ -4270,6 +8831,7 @@
           <a:lstStyle xmlns:a="http://schemas.openxmlformats.org/drawingml/2006/main"/>
           <a:p xmlns:a="http://schemas.openxmlformats.org/drawingml/2006/main">
             <a:pPr>
+              <a:buNone/>
               <a:defRPr sz="2325" b="1">
                 <a:solidFill>
                   <a:srgbClr val="167C80"/>
@@ -4327,6 +8889,7 @@
           <a:lstStyle xmlns:a="http://schemas.openxmlformats.org/drawingml/2006/main"/>
           <a:p xmlns:a="http://schemas.openxmlformats.org/drawingml/2006/main">
             <a:pPr>
+              <a:buNone/>
               <a:defRPr sz="2025" b="0">
                 <a:solidFill>
                   <a:srgbClr val="263D4B"/>
@@ -4413,6 +8976,7 @@
           <a:lstStyle xmlns:a="http://schemas.openxmlformats.org/drawingml/2006/main"/>
           <a:p xmlns:a="http://schemas.openxmlformats.org/drawingml/2006/main">
             <a:pPr>
+              <a:buNone/>
               <a:defRPr sz="3300" b="1">
                 <a:solidFill>
                   <a:srgbClr val="163345"/>
@@ -4470,6 +9034,7 @@
           <a:lstStyle xmlns:a="http://schemas.openxmlformats.org/drawingml/2006/main"/>
           <a:p xmlns:a="http://schemas.openxmlformats.org/drawingml/2006/main">
             <a:pPr>
+              <a:buNone/>
               <a:defRPr sz="1350" b="0">
                 <a:solidFill>
                   <a:srgbClr val="536A77"/>
@@ -4527,6 +9092,7 @@
           <a:lstStyle xmlns:a="http://schemas.openxmlformats.org/drawingml/2006/main"/>
           <a:p xmlns:a="http://schemas.openxmlformats.org/drawingml/2006/main">
             <a:pPr>
+              <a:buNone/>
               <a:defRPr sz="2250" b="1">
                 <a:solidFill>
                   <a:srgbClr val="163345"/>
@@ -4584,6 +9150,7 @@
           <a:lstStyle xmlns:a="http://schemas.openxmlformats.org/drawingml/2006/main"/>
           <a:p xmlns:a="http://schemas.openxmlformats.org/drawingml/2006/main">
             <a:pPr>
+              <a:buNone/>
               <a:defRPr sz="3300" b="1">
                 <a:solidFill>
                   <a:srgbClr val="167C80"/>
@@ -4641,6 +9208,7 @@
           <a:lstStyle xmlns:a="http://schemas.openxmlformats.org/drawingml/2006/main"/>
           <a:p xmlns:a="http://schemas.openxmlformats.org/drawingml/2006/main">
             <a:pPr>
+              <a:buNone/>
               <a:defRPr sz="2250" b="1">
                 <a:solidFill>
                   <a:srgbClr val="163345"/>
@@ -4698,6 +9266,7 @@
           <a:lstStyle xmlns:a="http://schemas.openxmlformats.org/drawingml/2006/main"/>
           <a:p xmlns:a="http://schemas.openxmlformats.org/drawingml/2006/main">
             <a:pPr>
+              <a:buNone/>
               <a:defRPr sz="3300" b="1">
                 <a:solidFill>
                   <a:srgbClr val="167C80"/>
@@ -4755,6 +9324,7 @@
           <a:lstStyle xmlns:a="http://schemas.openxmlformats.org/drawingml/2006/main"/>
           <a:p xmlns:a="http://schemas.openxmlformats.org/drawingml/2006/main">
             <a:pPr>
+              <a:buNone/>
               <a:defRPr sz="2250" b="1">
                 <a:solidFill>
                   <a:srgbClr val="163345"/>
@@ -4812,6 +9382,7 @@
           <a:lstStyle xmlns:a="http://schemas.openxmlformats.org/drawingml/2006/main"/>
           <a:p xmlns:a="http://schemas.openxmlformats.org/drawingml/2006/main">
             <a:pPr>
+              <a:buNone/>
               <a:defRPr sz="2250" b="0">
                 <a:solidFill>
                   <a:srgbClr val="263D4B"/>
@@ -4898,6 +9469,7 @@
           <a:lstStyle xmlns:a="http://schemas.openxmlformats.org/drawingml/2006/main"/>
           <a:p xmlns:a="http://schemas.openxmlformats.org/drawingml/2006/main">
             <a:pPr>
+              <a:buNone/>
               <a:defRPr sz="3300" b="1">
                 <a:solidFill>
                   <a:srgbClr val="163345"/>
@@ -4955,6 +9527,7 @@
           <a:lstStyle xmlns:a="http://schemas.openxmlformats.org/drawingml/2006/main"/>
           <a:p xmlns:a="http://schemas.openxmlformats.org/drawingml/2006/main">
             <a:pPr>
+              <a:buNone/>
               <a:defRPr sz="1350" b="0">
                 <a:solidFill>
                   <a:srgbClr val="536A77"/>
@@ -5012,6 +9585,7 @@
           <a:lstStyle xmlns:a="http://schemas.openxmlformats.org/drawingml/2006/main"/>
           <a:p xmlns:a="http://schemas.openxmlformats.org/drawingml/2006/main">
             <a:pPr>
+              <a:buNone/>
               <a:defRPr sz="2025" b="0">
                 <a:solidFill>
                   <a:srgbClr val="536A77"/>
@@ -5069,6 +9643,7 @@
           <a:lstStyle xmlns:a="http://schemas.openxmlformats.org/drawingml/2006/main"/>
           <a:p xmlns:a="http://schemas.openxmlformats.org/drawingml/2006/main">
             <a:pPr>
+              <a:buNone/>
               <a:defRPr sz="3150" b="1">
                 <a:solidFill>
                   <a:srgbClr val="163345"/>
@@ -5126,6 +9701,7 @@
           <a:lstStyle xmlns:a="http://schemas.openxmlformats.org/drawingml/2006/main"/>
           <a:p xmlns:a="http://schemas.openxmlformats.org/drawingml/2006/main">
             <a:pPr>
+              <a:buNone/>
               <a:defRPr sz="2025" b="0">
                 <a:solidFill>
                   <a:srgbClr val="536A77"/>
@@ -5183,6 +9759,7 @@
           <a:lstStyle xmlns:a="http://schemas.openxmlformats.org/drawingml/2006/main"/>
           <a:p xmlns:a="http://schemas.openxmlformats.org/drawingml/2006/main">
             <a:pPr>
+              <a:buNone/>
               <a:defRPr sz="2550" b="1">
                 <a:solidFill>
                   <a:srgbClr val="167C80"/>
@@ -5240,6 +9817,7 @@
           <a:lstStyle xmlns:a="http://schemas.openxmlformats.org/drawingml/2006/main"/>
           <a:p xmlns:a="http://schemas.openxmlformats.org/drawingml/2006/main">
             <a:pPr>
+              <a:buNone/>
               <a:defRPr sz="2025" b="0">
                 <a:solidFill>
                   <a:srgbClr val="536A77"/>
@@ -5297,6 +9875,7 @@
           <a:lstStyle xmlns:a="http://schemas.openxmlformats.org/drawingml/2006/main"/>
           <a:p xmlns:a="http://schemas.openxmlformats.org/drawingml/2006/main">
             <a:pPr>
+              <a:buNone/>
               <a:defRPr sz="2550" b="1">
                 <a:solidFill>
                   <a:srgbClr val="167C80"/>
@@ -5354,6 +9933,7 @@
           <a:lstStyle xmlns:a="http://schemas.openxmlformats.org/drawingml/2006/main"/>
           <a:p xmlns:a="http://schemas.openxmlformats.org/drawingml/2006/main">
             <a:pPr>
+              <a:buNone/>
               <a:defRPr sz="1950" b="0">
                 <a:solidFill>
                   <a:srgbClr val="263D4B"/>
@@ -5440,6 +10020,7 @@
           <a:lstStyle xmlns:a="http://schemas.openxmlformats.org/drawingml/2006/main"/>
           <a:p xmlns:a="http://schemas.openxmlformats.org/drawingml/2006/main">
             <a:pPr>
+              <a:buNone/>
               <a:defRPr sz="3300" b="1">
                 <a:solidFill>
                   <a:srgbClr val="163345"/>
@@ -5497,6 +10078,7 @@
           <a:lstStyle xmlns:a="http://schemas.openxmlformats.org/drawingml/2006/main"/>
           <a:p xmlns:a="http://schemas.openxmlformats.org/drawingml/2006/main">
             <a:pPr>
+              <a:buNone/>
               <a:defRPr sz="1350" b="0">
                 <a:solidFill>
                   <a:srgbClr val="536A77"/>
@@ -5554,6 +10136,7 @@
           <a:lstStyle xmlns:a="http://schemas.openxmlformats.org/drawingml/2006/main"/>
           <a:p xmlns:a="http://schemas.openxmlformats.org/drawingml/2006/main">
             <a:pPr>
+              <a:buNone/>
               <a:defRPr sz="1800" b="1">
                 <a:solidFill>
                   <a:srgbClr val="536A77"/>
@@ -5611,6 +10194,7 @@
           <a:lstStyle xmlns:a="http://schemas.openxmlformats.org/drawingml/2006/main"/>
           <a:p xmlns:a="http://schemas.openxmlformats.org/drawingml/2006/main">
             <a:pPr>
+              <a:buNone/>
               <a:defRPr sz="1800" b="1">
                 <a:solidFill>
                   <a:srgbClr val="536A77"/>
@@ -5668,6 +10252,7 @@
           <a:lstStyle xmlns:a="http://schemas.openxmlformats.org/drawingml/2006/main"/>
           <a:p xmlns:a="http://schemas.openxmlformats.org/drawingml/2006/main">
             <a:pPr>
+              <a:buNone/>
               <a:defRPr sz="1800" b="1">
                 <a:solidFill>
                   <a:srgbClr val="536A77"/>
@@ -5725,6 +10310,7 @@
           <a:lstStyle xmlns:a="http://schemas.openxmlformats.org/drawingml/2006/main"/>
           <a:p xmlns:a="http://schemas.openxmlformats.org/drawingml/2006/main">
             <a:pPr>
+              <a:buNone/>
               <a:defRPr sz="2400" b="1">
                 <a:solidFill>
                   <a:srgbClr val="163345"/>
@@ -5782,6 +10368,7 @@
           <a:lstStyle xmlns:a="http://schemas.openxmlformats.org/drawingml/2006/main"/>
           <a:p xmlns:a="http://schemas.openxmlformats.org/drawingml/2006/main">
             <a:pPr>
+              <a:buNone/>
               <a:defRPr sz="3450" b="1">
                 <a:solidFill>
                   <a:srgbClr val="167C80"/>
@@ -5839,6 +10426,7 @@
           <a:lstStyle xmlns:a="http://schemas.openxmlformats.org/drawingml/2006/main"/>
           <a:p xmlns:a="http://schemas.openxmlformats.org/drawingml/2006/main">
             <a:pPr>
+              <a:buNone/>
               <a:defRPr sz="2025" b="0">
                 <a:solidFill>
                   <a:srgbClr val="B3543C"/>
@@ -5896,6 +10484,7 @@
           <a:lstStyle xmlns:a="http://schemas.openxmlformats.org/drawingml/2006/main"/>
           <a:p xmlns:a="http://schemas.openxmlformats.org/drawingml/2006/main">
             <a:pPr>
+              <a:buNone/>
               <a:defRPr sz="2400" b="1">
                 <a:solidFill>
                   <a:srgbClr val="163345"/>
@@ -5953,6 +10542,7 @@
           <a:lstStyle xmlns:a="http://schemas.openxmlformats.org/drawingml/2006/main"/>
           <a:p xmlns:a="http://schemas.openxmlformats.org/drawingml/2006/main">
             <a:pPr>
+              <a:buNone/>
               <a:defRPr sz="2025" b="0">
                 <a:solidFill>
                   <a:srgbClr val="B3543C"/>
@@ -6010,6 +10600,7 @@
           <a:lstStyle xmlns:a="http://schemas.openxmlformats.org/drawingml/2006/main"/>
           <a:p xmlns:a="http://schemas.openxmlformats.org/drawingml/2006/main">
             <a:pPr>
+              <a:buNone/>
               <a:defRPr sz="3450" b="1">
                 <a:solidFill>
                   <a:srgbClr val="167C80"/>
@@ -6096,6 +10687,7 @@
           <a:lstStyle xmlns:a="http://schemas.openxmlformats.org/drawingml/2006/main"/>
           <a:p xmlns:a="http://schemas.openxmlformats.org/drawingml/2006/main">
             <a:pPr>
+              <a:buNone/>
               <a:defRPr sz="3300" b="1">
                 <a:solidFill>
                   <a:srgbClr val="163345"/>
@@ -6153,6 +10745,7 @@
           <a:lstStyle xmlns:a="http://schemas.openxmlformats.org/drawingml/2006/main"/>
           <a:p xmlns:a="http://schemas.openxmlformats.org/drawingml/2006/main">
             <a:pPr>
+              <a:buNone/>
               <a:defRPr sz="1350" b="0">
                 <a:solidFill>
                   <a:srgbClr val="536A77"/>
@@ -6210,6 +10803,7 @@
           <a:lstStyle xmlns:a="http://schemas.openxmlformats.org/drawingml/2006/main"/>
           <a:p xmlns:a="http://schemas.openxmlformats.org/drawingml/2006/main">
             <a:pPr>
+              <a:buNone/>
               <a:defRPr sz="2925" b="1">
                 <a:solidFill>
                   <a:srgbClr val="163345"/>
@@ -6267,6 +10861,7 @@
           <a:lstStyle xmlns:a="http://schemas.openxmlformats.org/drawingml/2006/main"/>
           <a:p xmlns:a="http://schemas.openxmlformats.org/drawingml/2006/main">
             <a:pPr>
+              <a:buNone/>
               <a:defRPr sz="2025" b="0">
                 <a:solidFill>
                   <a:srgbClr val="263D4B"/>
@@ -6295,6 +10890,7 @@
           </a:p>
           <a:p xmlns:a="http://schemas.openxmlformats.org/drawingml/2006/main">
             <a:pPr>
+              <a:buNone/>
               <a:defRPr sz="2025" b="0">
                 <a:solidFill>
                   <a:srgbClr val="263D4B"/>
@@ -6323,6 +10919,7 @@
           </a:p>
           <a:p xmlns:a="http://schemas.openxmlformats.org/drawingml/2006/main">
             <a:pPr>
+              <a:buNone/>
               <a:defRPr sz="2025" b="0">
                 <a:solidFill>
                   <a:srgbClr val="263D4B"/>
